--- a/workshops/2026-10-25-agifors-annual-symposium/agifors-sefop.pptx
+++ b/workshops/2026-10-25-agifors-annual-symposium/agifors-sefop.pptx
@@ -7663,7 +7663,27 @@
                 <a:latin typeface="Aptos"/>
                 <a:sym typeface="Wingdings" panose="05000000000000000000" pitchFamily="2" charset="2"/>
               </a:rPr>
-              <a:t>If the decision is required recurrently:</a:t>
+              <a:t>If the decision is required </a:t>
+            </a:r>
+            <a:r>
+              <a:rPr lang="en-US" sz="2400" u="sng" dirty="0">
+                <a:solidFill>
+                  <a:srgbClr val="0F2343"/>
+                </a:solidFill>
+                <a:latin typeface="Aptos"/>
+                <a:sym typeface="Wingdings" panose="05000000000000000000" pitchFamily="2" charset="2"/>
+              </a:rPr>
+              <a:t>recurrently</a:t>
+            </a:r>
+            <a:r>
+              <a:rPr lang="en-US" sz="2400" dirty="0">
+                <a:solidFill>
+                  <a:srgbClr val="0F2343"/>
+                </a:solidFill>
+                <a:latin typeface="Aptos"/>
+                <a:sym typeface="Wingdings" panose="05000000000000000000" pitchFamily="2" charset="2"/>
+              </a:rPr>
+              <a:t>:</a:t>
             </a:r>
             <a:endParaRPr sz="2400" dirty="0">
               <a:solidFill>
@@ -8006,7 +8026,7 @@
         <p:spPr>
           <a:xfrm>
             <a:off x="429260" y="5465556"/>
-            <a:ext cx="11440160" cy="369332"/>
+            <a:ext cx="11440160" cy="738664"/>
           </a:xfrm>
           <a:prstGeom prst="rect">
             <a:avLst/>
@@ -8048,7 +8068,7 @@
                 </a:solidFill>
                 <a:latin typeface="Aptos"/>
               </a:rPr>
-              <a:t>. </a:t>
+              <a:t> over the entire lifetime of the business need.</a:t>
             </a:r>
             <a:endParaRPr sz="2400" dirty="0">
               <a:solidFill>

--- a/workshops/2026-10-25-agifors-annual-symposium/agifors-sefop.pptx
+++ b/workshops/2026-10-25-agifors-annual-symposium/agifors-sefop.pptx
@@ -5,7 +5,7 @@
     <p:sldMasterId id="2147483648" r:id="rId1"/>
   </p:sldMasterIdLst>
   <p:notesMasterIdLst>
-    <p:notesMasterId r:id="rId14"/>
+    <p:notesMasterId r:id="rId13"/>
   </p:notesMasterIdLst>
   <p:sldIdLst>
     <p:sldId id="256" r:id="rId2"/>
@@ -13,13 +13,12 @@
     <p:sldId id="268" r:id="rId4"/>
     <p:sldId id="270" r:id="rId5"/>
     <p:sldId id="271" r:id="rId6"/>
-    <p:sldId id="272" r:id="rId7"/>
-    <p:sldId id="273" r:id="rId8"/>
-    <p:sldId id="274" r:id="rId9"/>
-    <p:sldId id="275" r:id="rId10"/>
-    <p:sldId id="276" r:id="rId11"/>
-    <p:sldId id="277" r:id="rId12"/>
-    <p:sldId id="278" r:id="rId13"/>
+    <p:sldId id="275" r:id="rId7"/>
+    <p:sldId id="272" r:id="rId8"/>
+    <p:sldId id="273" r:id="rId9"/>
+    <p:sldId id="274" r:id="rId10"/>
+    <p:sldId id="277" r:id="rId11"/>
+    <p:sldId id="278" r:id="rId12"/>
   </p:sldIdLst>
   <p:sldSz cx="12192000" cy="6858000"/>
   <p:notesSz cx="6858000" cy="9144000"/>
@@ -219,7 +218,7 @@
           <a:p>
             <a:fld id="{A9508B69-4B04-442E-A249-3DCED873EEFA}" type="datetimeFigureOut">
               <a:rPr lang="en-US" smtClean="0"/>
-              <a:t>9/18/2026</a:t>
+              <a:t>9/20/2026</a:t>
             </a:fld>
             <a:endParaRPr lang="en-US"/>
           </a:p>
@@ -510,7 +509,7 @@
             <a:spLocks noGrp="1" noRot="1" noChangeAspect="1"/>
           </p:cNvSpPr>
           <p:nvPr>
-            <p:ph type="sldImg"/>
+            <p:ph type="sldImg" idx="2"/>
           </p:nvPr>
         </p:nvSpPr>
         <p:spPr/>
@@ -522,7 +521,7 @@
             <a:spLocks noGrp="1"/>
           </p:cNvSpPr>
           <p:nvPr>
-            <p:ph type="body" idx="1"/>
+            <p:ph type="body" sz="quarter" idx="3"/>
           </p:nvPr>
         </p:nvSpPr>
         <p:spPr/>
@@ -532,17 +531,9 @@
           <a:p>
             <a:r>
               <a:rPr lang="en-US" dirty="0"/>
-              <a:t>Short-lived system: seems that it provides significant value, but soon (maybe 1 year?) progress stalls as it can’t support changes efficiently.</a:t>
-            </a:r>
-          </a:p>
-          <a:p>
-            <a:r>
-              <a:rPr lang="en-US" dirty="0"/>
-              <a:t>Legacy-system: started fine, after a couple of years the initial developers left. Now is unclear how it works, or making a change is very difficult. At some point has to be re-written to continue supporting the business.</a:t>
-            </a:r>
-          </a:p>
-          <a:p>
-            <a:endParaRPr lang="en-US" dirty="0"/>
+              <a:t>Hook: what is an OR team building?</a:t>
+            </a:r>
+            <a:endParaRPr dirty="0"/>
           </a:p>
         </p:txBody>
       </p:sp>
@@ -557,24 +548,157 @@
           </p:nvPr>
         </p:nvSpPr>
         <p:spPr/>
+      </p:sp>
+    </p:spTree>
+  </p:cSld>
+  <p:clrMapOvr>
+    <a:masterClrMapping/>
+  </p:clrMapOvr>
+</p:notes>
+</file>
+
+<file path=ppt/notesSlides/notesSlide10.xml><?xml version="1.0" encoding="utf-8"?>
+<p:notes xmlns:a="http://schemas.openxmlformats.org/drawingml/2006/main" xmlns:r="http://schemas.openxmlformats.org/officeDocument/2006/relationships" xmlns:p="http://schemas.openxmlformats.org/presentationml/2006/main">
+  <p:cSld>
+    <p:spTree>
+      <p:nvGrpSpPr>
+        <p:cNvPr id="1" name=""/>
+        <p:cNvGrpSpPr/>
+        <p:nvPr/>
+      </p:nvGrpSpPr>
+      <p:grpSpPr>
+        <a:xfrm>
+          <a:off x="0" y="0"/>
+          <a:ext cx="0" cy="0"/>
+          <a:chOff x="0" y="0"/>
+          <a:chExt cx="0" cy="0"/>
+        </a:xfrm>
+      </p:grpSpPr>
+      <p:sp>
+        <p:nvSpPr>
+          <p:cNvPr id="2" name="Slide Image Placeholder 1"/>
+          <p:cNvSpPr>
+            <a:spLocks noGrp="1" noRot="1" noChangeAspect="1"/>
+          </p:cNvSpPr>
+          <p:nvPr>
+            <p:ph type="sldImg" idx="2"/>
+          </p:nvPr>
+        </p:nvSpPr>
+        <p:spPr/>
+      </p:sp>
+      <p:sp>
+        <p:nvSpPr>
+          <p:cNvPr id="3" name="Notes Placeholder 2"/>
+          <p:cNvSpPr>
+            <a:spLocks noGrp="1"/>
+          </p:cNvSpPr>
+          <p:nvPr>
+            <p:ph type="body" sz="quarter" idx="3"/>
+          </p:nvPr>
+        </p:nvSpPr>
+        <p:spPr/>
         <p:txBody>
           <a:bodyPr/>
           <a:lstStyle/>
           <a:p>
-            <a:fld id="{ED0E717D-2DA7-42E8-9D35-D8C48612FADF}" type="slidenum">
-              <a:rPr lang="en-US" smtClean="0"/>
-              <a:t>4</a:t>
-            </a:fld>
-            <a:endParaRPr lang="en-US"/>
-          </a:p>
-        </p:txBody>
+            <a:pPr algn="l">
+              <a:spcAft>
+                <a:spcPts val="400"/>
+              </a:spcAft>
+            </a:pPr>
+            <a:r>
+              <a:rPr lang="en-US" sz="1200" b="0" dirty="0">
+                <a:solidFill>
+                  <a:srgbClr val="64748B"/>
+                </a:solidFill>
+                <a:latin typeface="+mn-lt"/>
+              </a:rPr>
+              <a:t>SEFOP exists so OR teams do not have to rediscover these practices independently.</a:t>
+            </a:r>
+          </a:p>
+        </p:txBody>
+      </p:sp>
+      <p:sp>
+        <p:nvSpPr>
+          <p:cNvPr id="4" name="Slide Number Placeholder 3"/>
+          <p:cNvSpPr>
+            <a:spLocks noGrp="1"/>
+          </p:cNvSpPr>
+          <p:nvPr>
+            <p:ph type="sldNum" sz="quarter" idx="5"/>
+          </p:nvPr>
+        </p:nvSpPr>
+        <p:spPr/>
       </p:sp>
     </p:spTree>
-    <p:extLst>
-      <p:ext uri="{BB962C8B-B14F-4D97-AF65-F5344CB8AC3E}">
-        <p14:creationId xmlns:p14="http://schemas.microsoft.com/office/powerpoint/2010/main" val="4085946106"/>
-      </p:ext>
-    </p:extLst>
+  </p:cSld>
+  <p:clrMapOvr>
+    <a:masterClrMapping/>
+  </p:clrMapOvr>
+</p:notes>
+</file>
+
+<file path=ppt/notesSlides/notesSlide11.xml><?xml version="1.0" encoding="utf-8"?>
+<p:notes xmlns:a="http://schemas.openxmlformats.org/drawingml/2006/main" xmlns:r="http://schemas.openxmlformats.org/officeDocument/2006/relationships" xmlns:p="http://schemas.openxmlformats.org/presentationml/2006/main">
+  <p:cSld>
+    <p:spTree>
+      <p:nvGrpSpPr>
+        <p:cNvPr id="1" name=""/>
+        <p:cNvGrpSpPr/>
+        <p:nvPr/>
+      </p:nvGrpSpPr>
+      <p:grpSpPr>
+        <a:xfrm>
+          <a:off x="0" y="0"/>
+          <a:ext cx="0" cy="0"/>
+          <a:chOff x="0" y="0"/>
+          <a:chExt cx="0" cy="0"/>
+        </a:xfrm>
+      </p:grpSpPr>
+      <p:sp>
+        <p:nvSpPr>
+          <p:cNvPr id="2" name="Slide Image Placeholder 1"/>
+          <p:cNvSpPr>
+            <a:spLocks noGrp="1" noRot="1" noChangeAspect="1"/>
+          </p:cNvSpPr>
+          <p:nvPr>
+            <p:ph type="sldImg" idx="2"/>
+          </p:nvPr>
+        </p:nvSpPr>
+        <p:spPr/>
+      </p:sp>
+      <p:sp>
+        <p:nvSpPr>
+          <p:cNvPr id="3" name="Notes Placeholder 2"/>
+          <p:cNvSpPr>
+            <a:spLocks noGrp="1"/>
+          </p:cNvSpPr>
+          <p:nvPr>
+            <p:ph type="body" sz="quarter" idx="3"/>
+          </p:nvPr>
+        </p:nvSpPr>
+        <p:spPr/>
+        <p:txBody>
+          <a:bodyPr/>
+          <a:lstStyle/>
+          <a:p>
+            <a:endParaRPr dirty="0"/>
+          </a:p>
+        </p:txBody>
+      </p:sp>
+      <p:sp>
+        <p:nvSpPr>
+          <p:cNvPr id="4" name="Slide Number Placeholder 3"/>
+          <p:cNvSpPr>
+            <a:spLocks noGrp="1"/>
+          </p:cNvSpPr>
+          <p:nvPr>
+            <p:ph type="sldNum" sz="quarter" idx="5"/>
+          </p:nvPr>
+        </p:nvSpPr>
+        <p:spPr/>
+      </p:sp>
+    </p:spTree>
   </p:cSld>
   <p:clrMapOvr>
     <a:masterClrMapping/>
@@ -606,6 +730,185 @@
             <a:spLocks noGrp="1" noRot="1" noChangeAspect="1"/>
           </p:cNvSpPr>
           <p:nvPr>
+            <p:ph type="sldImg" idx="2"/>
+          </p:nvPr>
+        </p:nvSpPr>
+        <p:spPr/>
+      </p:sp>
+      <p:sp>
+        <p:nvSpPr>
+          <p:cNvPr id="3" name="Notes Placeholder 2"/>
+          <p:cNvSpPr>
+            <a:spLocks noGrp="1"/>
+          </p:cNvSpPr>
+          <p:nvPr>
+            <p:ph type="body" sz="quarter" idx="3"/>
+          </p:nvPr>
+        </p:nvSpPr>
+        <p:spPr/>
+        <p:txBody>
+          <a:bodyPr/>
+          <a:lstStyle/>
+          <a:p>
+            <a:r>
+              <a:rPr lang="en-US" dirty="0"/>
+              <a:t>Hook: sustainability is a software property, how good is it in DSS?</a:t>
+            </a:r>
+          </a:p>
+        </p:txBody>
+      </p:sp>
+      <p:sp>
+        <p:nvSpPr>
+          <p:cNvPr id="4" name="Slide Number Placeholder 3"/>
+          <p:cNvSpPr>
+            <a:spLocks noGrp="1"/>
+          </p:cNvSpPr>
+          <p:nvPr>
+            <p:ph type="sldNum" sz="quarter" idx="5"/>
+          </p:nvPr>
+        </p:nvSpPr>
+        <p:spPr/>
+      </p:sp>
+    </p:spTree>
+  </p:cSld>
+  <p:clrMapOvr>
+    <a:masterClrMapping/>
+  </p:clrMapOvr>
+</p:notes>
+</file>
+
+<file path=ppt/notesSlides/notesSlide3.xml><?xml version="1.0" encoding="utf-8"?>
+<p:notes xmlns:a="http://schemas.openxmlformats.org/drawingml/2006/main" xmlns:r="http://schemas.openxmlformats.org/officeDocument/2006/relationships" xmlns:p="http://schemas.openxmlformats.org/presentationml/2006/main">
+  <p:cSld>
+    <p:spTree>
+      <p:nvGrpSpPr>
+        <p:cNvPr id="1" name=""/>
+        <p:cNvGrpSpPr/>
+        <p:nvPr/>
+      </p:nvGrpSpPr>
+      <p:grpSpPr>
+        <a:xfrm>
+          <a:off x="0" y="0"/>
+          <a:ext cx="0" cy="0"/>
+          <a:chOff x="0" y="0"/>
+          <a:chExt cx="0" cy="0"/>
+        </a:xfrm>
+      </p:grpSpPr>
+      <p:sp>
+        <p:nvSpPr>
+          <p:cNvPr id="2" name="Slide Image Placeholder 1"/>
+          <p:cNvSpPr>
+            <a:spLocks noGrp="1" noRot="1" noChangeAspect="1"/>
+          </p:cNvSpPr>
+          <p:nvPr>
+            <p:ph type="sldImg" idx="2"/>
+          </p:nvPr>
+        </p:nvSpPr>
+        <p:spPr/>
+      </p:sp>
+      <p:sp>
+        <p:nvSpPr>
+          <p:cNvPr id="3" name="Notes Placeholder 2"/>
+          <p:cNvSpPr>
+            <a:spLocks noGrp="1"/>
+          </p:cNvSpPr>
+          <p:nvPr>
+            <p:ph type="body" sz="quarter" idx="3"/>
+          </p:nvPr>
+        </p:nvSpPr>
+        <p:spPr/>
+        <p:txBody>
+          <a:bodyPr/>
+          <a:lstStyle/>
+          <a:p>
+            <a:r>
+              <a:rPr lang="en-US" dirty="0"/>
+              <a:t>Some cracks: using </a:t>
+            </a:r>
+            <a:r>
+              <a:rPr lang="en-US" dirty="0" err="1"/>
+              <a:t>jupyter</a:t>
+            </a:r>
+            <a:r>
+              <a:rPr lang="en-US" dirty="0"/>
+              <a:t> notebooks; lack of automatic tests.</a:t>
+            </a:r>
+          </a:p>
+          <a:p>
+            <a:endParaRPr lang="en-US" dirty="0"/>
+          </a:p>
+          <a:p>
+            <a:pPr marL="0" marR="0" lvl="0" indent="0" algn="l" defTabSz="914400" rtl="0" eaLnBrk="1" fontAlgn="auto" latinLnBrk="0" hangingPunct="1">
+              <a:lnSpc>
+                <a:spcPct val="100000"/>
+              </a:lnSpc>
+              <a:spcBef>
+                <a:spcPts val="0"/>
+              </a:spcBef>
+              <a:spcAft>
+                <a:spcPts val="0"/>
+              </a:spcAft>
+              <a:buClrTx/>
+              <a:buSzTx/>
+              <a:buFontTx/>
+              <a:buNone/>
+              <a:tabLst/>
+              <a:defRPr/>
+            </a:pPr>
+            <a:r>
+              <a:rPr lang="en-US" dirty="0"/>
+              <a:t>Hook: what is the price we pay because of these weak practices?</a:t>
+            </a:r>
+          </a:p>
+          <a:p>
+            <a:endParaRPr lang="en-US" dirty="0"/>
+          </a:p>
+        </p:txBody>
+      </p:sp>
+      <p:sp>
+        <p:nvSpPr>
+          <p:cNvPr id="4" name="Slide Number Placeholder 3"/>
+          <p:cNvSpPr>
+            <a:spLocks noGrp="1"/>
+          </p:cNvSpPr>
+          <p:nvPr>
+            <p:ph type="sldNum" sz="quarter" idx="5"/>
+          </p:nvPr>
+        </p:nvSpPr>
+        <p:spPr/>
+      </p:sp>
+    </p:spTree>
+  </p:cSld>
+  <p:clrMapOvr>
+    <a:masterClrMapping/>
+  </p:clrMapOvr>
+</p:notes>
+</file>
+
+<file path=ppt/notesSlides/notesSlide4.xml><?xml version="1.0" encoding="utf-8"?>
+<p:notes xmlns:a="http://schemas.openxmlformats.org/drawingml/2006/main" xmlns:r="http://schemas.openxmlformats.org/officeDocument/2006/relationships" xmlns:p="http://schemas.openxmlformats.org/presentationml/2006/main">
+  <p:cSld>
+    <p:spTree>
+      <p:nvGrpSpPr>
+        <p:cNvPr id="1" name=""/>
+        <p:cNvGrpSpPr/>
+        <p:nvPr/>
+      </p:nvGrpSpPr>
+      <p:grpSpPr>
+        <a:xfrm>
+          <a:off x="0" y="0"/>
+          <a:ext cx="0" cy="0"/>
+          <a:chOff x="0" y="0"/>
+          <a:chExt cx="0" cy="0"/>
+        </a:xfrm>
+      </p:grpSpPr>
+      <p:sp>
+        <p:nvSpPr>
+          <p:cNvPr id="2" name="Slide Image Placeholder 1"/>
+          <p:cNvSpPr>
+            <a:spLocks noGrp="1" noRot="1" noChangeAspect="1"/>
+          </p:cNvSpPr>
+          <p:nvPr>
             <p:ph type="sldImg"/>
           </p:nvPr>
         </p:nvSpPr>
@@ -626,7 +929,54 @@
           <a:bodyPr/>
           <a:lstStyle/>
           <a:p>
+            <a:r>
+              <a:rPr dirty="0"/>
+              <a:t>Short-lived system</a:t>
+            </a:r>
+            <a:r>
+              <a:rPr lang="en-US" dirty="0"/>
+              <a:t>: </a:t>
+            </a:r>
+            <a:r>
+              <a:rPr dirty="0"/>
+              <a:t>soon (maybe 1 year?) progress stalls as it can't support changes efficiently.</a:t>
+            </a:r>
+          </a:p>
+          <a:p>
+            <a:r>
+              <a:rPr dirty="0"/>
+              <a:t>Legacy system: started fine; after a couple of years the initial developers left. Now it is unclear how it works, or making a change is very difficult. </a:t>
+            </a:r>
             <a:endParaRPr lang="en-US" dirty="0"/>
+          </a:p>
+          <a:p>
+            <a:endParaRPr lang="en-US" dirty="0"/>
+          </a:p>
+          <a:p>
+            <a:pPr marL="0" marR="0" lvl="0" indent="0" algn="l" defTabSz="914400" rtl="0" eaLnBrk="1" fontAlgn="auto" latinLnBrk="0" hangingPunct="1">
+              <a:lnSpc>
+                <a:spcPct val="100000"/>
+              </a:lnSpc>
+              <a:spcBef>
+                <a:spcPts val="0"/>
+              </a:spcBef>
+              <a:spcAft>
+                <a:spcPts val="0"/>
+              </a:spcAft>
+              <a:buClrTx/>
+              <a:buSzTx/>
+              <a:buFontTx/>
+              <a:buNone/>
+              <a:tabLst/>
+              <a:defRPr/>
+            </a:pPr>
+            <a:r>
+              <a:rPr lang="en-US" dirty="0"/>
+              <a:t>Hook: so how strengthen the weak practices?</a:t>
+            </a:r>
+          </a:p>
+          <a:p>
+            <a:endParaRPr dirty="0"/>
           </a:p>
         </p:txBody>
       </p:sp>
@@ -647,7 +997,350 @@
           <a:p>
             <a:fld id="{ED0E717D-2DA7-42E8-9D35-D8C48612FADF}" type="slidenum">
               <a:rPr lang="en-US" smtClean="0"/>
-              <a:t>6</a:t>
+              <a:t>4</a:t>
+            </a:fld>
+            <a:endParaRPr lang="en-US"/>
+          </a:p>
+        </p:txBody>
+      </p:sp>
+    </p:spTree>
+    <p:extLst>
+      <p:ext uri="{BB962C8B-B14F-4D97-AF65-F5344CB8AC3E}">
+        <p14:creationId xmlns:p14="http://schemas.microsoft.com/office/powerpoint/2010/main" val="4085946106"/>
+      </p:ext>
+    </p:extLst>
+  </p:cSld>
+  <p:clrMapOvr>
+    <a:masterClrMapping/>
+  </p:clrMapOvr>
+</p:notes>
+</file>
+
+<file path=ppt/notesSlides/notesSlide5.xml><?xml version="1.0" encoding="utf-8"?>
+<p:notes xmlns:a="http://schemas.openxmlformats.org/drawingml/2006/main" xmlns:r="http://schemas.openxmlformats.org/officeDocument/2006/relationships" xmlns:p="http://schemas.openxmlformats.org/presentationml/2006/main">
+  <p:cSld>
+    <p:spTree>
+      <p:nvGrpSpPr>
+        <p:cNvPr id="1" name=""/>
+        <p:cNvGrpSpPr/>
+        <p:nvPr/>
+      </p:nvGrpSpPr>
+      <p:grpSpPr>
+        <a:xfrm>
+          <a:off x="0" y="0"/>
+          <a:ext cx="0" cy="0"/>
+          <a:chOff x="0" y="0"/>
+          <a:chExt cx="0" cy="0"/>
+        </a:xfrm>
+      </p:grpSpPr>
+      <p:sp>
+        <p:nvSpPr>
+          <p:cNvPr id="2" name="Slide Image Placeholder 1"/>
+          <p:cNvSpPr>
+            <a:spLocks noGrp="1" noRot="1" noChangeAspect="1"/>
+          </p:cNvSpPr>
+          <p:nvPr>
+            <p:ph type="sldImg" idx="2"/>
+          </p:nvPr>
+        </p:nvSpPr>
+        <p:spPr/>
+      </p:sp>
+      <p:sp>
+        <p:nvSpPr>
+          <p:cNvPr id="3" name="Notes Placeholder 2"/>
+          <p:cNvSpPr>
+            <a:spLocks noGrp="1"/>
+          </p:cNvSpPr>
+          <p:nvPr>
+            <p:ph type="body" sz="quarter" idx="3"/>
+          </p:nvPr>
+        </p:nvSpPr>
+        <p:spPr/>
+        <p:txBody>
+          <a:bodyPr/>
+          <a:lstStyle/>
+          <a:p>
+            <a:r>
+              <a:rPr dirty="0"/>
+              <a:t>The obvious fix</a:t>
+            </a:r>
+            <a:r>
+              <a:rPr lang="en-US" dirty="0"/>
+              <a:t>?</a:t>
+            </a:r>
+            <a:r>
+              <a:rPr dirty="0"/>
+              <a:t> to hire developers, </a:t>
+            </a:r>
+            <a:r>
+              <a:rPr lang="en-US" dirty="0"/>
+              <a:t>but that does not work.</a:t>
+            </a:r>
+          </a:p>
+          <a:p>
+            <a:pPr marL="171450" indent="-171450">
+              <a:buFontTx/>
+              <a:buChar char="-"/>
+            </a:pPr>
+            <a:r>
+              <a:rPr lang="en-US" dirty="0"/>
+              <a:t>OR should not know everything about SE, just what it needs.</a:t>
+            </a:r>
+          </a:p>
+          <a:p>
+            <a:pPr marL="171450" indent="-171450">
+              <a:buFontTx/>
+              <a:buChar char="-"/>
+            </a:pPr>
+            <a:r>
+              <a:rPr lang="en-US" dirty="0"/>
+              <a:t>OR engineers help scientists develop properly</a:t>
+            </a:r>
+          </a:p>
+          <a:p>
+            <a:pPr marL="171450" indent="-171450">
+              <a:buFontTx/>
+              <a:buChar char="-"/>
+            </a:pPr>
+            <a:endParaRPr lang="en-US" dirty="0"/>
+          </a:p>
+          <a:p>
+            <a:pPr marL="0" marR="0" lvl="0" indent="0" algn="l" defTabSz="914400" rtl="0" eaLnBrk="1" fontAlgn="auto" latinLnBrk="0" hangingPunct="1">
+              <a:lnSpc>
+                <a:spcPct val="100000"/>
+              </a:lnSpc>
+              <a:spcBef>
+                <a:spcPts val="0"/>
+              </a:spcBef>
+              <a:spcAft>
+                <a:spcPts val="0"/>
+              </a:spcAft>
+              <a:buClrTx/>
+              <a:buSzTx/>
+              <a:buFontTx/>
+              <a:buNone/>
+              <a:tabLst/>
+              <a:defRPr/>
+            </a:pPr>
+            <a:r>
+              <a:rPr lang="en-US" dirty="0"/>
+              <a:t>Hook: then my science team will grow 10x? What is the actual scope I need?</a:t>
+            </a:r>
+          </a:p>
+          <a:p>
+            <a:pPr marL="0" indent="0">
+              <a:buFontTx/>
+              <a:buNone/>
+            </a:pPr>
+            <a:endParaRPr dirty="0"/>
+          </a:p>
+        </p:txBody>
+      </p:sp>
+      <p:sp>
+        <p:nvSpPr>
+          <p:cNvPr id="4" name="Slide Number Placeholder 3"/>
+          <p:cNvSpPr>
+            <a:spLocks noGrp="1"/>
+          </p:cNvSpPr>
+          <p:nvPr>
+            <p:ph type="sldNum" sz="quarter" idx="5"/>
+          </p:nvPr>
+        </p:nvSpPr>
+        <p:spPr/>
+      </p:sp>
+    </p:spTree>
+  </p:cSld>
+  <p:clrMapOvr>
+    <a:masterClrMapping/>
+  </p:clrMapOvr>
+</p:notes>
+</file>
+
+<file path=ppt/notesSlides/notesSlide6.xml><?xml version="1.0" encoding="utf-8"?>
+<p:notes xmlns:a="http://schemas.openxmlformats.org/drawingml/2006/main" xmlns:r="http://schemas.openxmlformats.org/officeDocument/2006/relationships" xmlns:p="http://schemas.openxmlformats.org/presentationml/2006/main">
+  <p:cSld>
+    <p:spTree>
+      <p:nvGrpSpPr>
+        <p:cNvPr id="1" name=""/>
+        <p:cNvGrpSpPr/>
+        <p:nvPr/>
+      </p:nvGrpSpPr>
+      <p:grpSpPr>
+        <a:xfrm>
+          <a:off x="0" y="0"/>
+          <a:ext cx="0" cy="0"/>
+          <a:chOff x="0" y="0"/>
+          <a:chExt cx="0" cy="0"/>
+        </a:xfrm>
+      </p:grpSpPr>
+      <p:sp>
+        <p:nvSpPr>
+          <p:cNvPr id="2" name="Slide Image Placeholder 1"/>
+          <p:cNvSpPr>
+            <a:spLocks noGrp="1" noRot="1" noChangeAspect="1"/>
+          </p:cNvSpPr>
+          <p:nvPr>
+            <p:ph type="sldImg" idx="2"/>
+          </p:nvPr>
+        </p:nvSpPr>
+        <p:spPr/>
+      </p:sp>
+      <p:sp>
+        <p:nvSpPr>
+          <p:cNvPr id="3" name="Notes Placeholder 2"/>
+          <p:cNvSpPr>
+            <a:spLocks noGrp="1"/>
+          </p:cNvSpPr>
+          <p:nvPr>
+            <p:ph type="body" sz="quarter" idx="3"/>
+          </p:nvPr>
+        </p:nvSpPr>
+        <p:spPr/>
+        <p:txBody>
+          <a:bodyPr/>
+          <a:lstStyle/>
+          <a:p>
+            <a:r>
+              <a:rPr lang="en-US" dirty="0"/>
+              <a:t>Hook:</a:t>
+            </a:r>
+          </a:p>
+          <a:p>
+            <a:r>
+              <a:rPr lang="en-US" dirty="0"/>
+              <a:t>Ok what happens now when we train scientists in software engineering?</a:t>
+            </a:r>
+            <a:endParaRPr dirty="0"/>
+          </a:p>
+        </p:txBody>
+      </p:sp>
+      <p:sp>
+        <p:nvSpPr>
+          <p:cNvPr id="4" name="Slide Number Placeholder 3"/>
+          <p:cNvSpPr>
+            <a:spLocks noGrp="1"/>
+          </p:cNvSpPr>
+          <p:nvPr>
+            <p:ph type="sldNum" sz="quarter" idx="5"/>
+          </p:nvPr>
+        </p:nvSpPr>
+        <p:spPr/>
+      </p:sp>
+    </p:spTree>
+  </p:cSld>
+  <p:clrMapOvr>
+    <a:masterClrMapping/>
+  </p:clrMapOvr>
+</p:notes>
+</file>
+
+<file path=ppt/notesSlides/notesSlide7.xml><?xml version="1.0" encoding="utf-8"?>
+<p:notes xmlns:a="http://schemas.openxmlformats.org/drawingml/2006/main" xmlns:r="http://schemas.openxmlformats.org/officeDocument/2006/relationships" xmlns:p="http://schemas.openxmlformats.org/presentationml/2006/main">
+  <p:cSld>
+    <p:spTree>
+      <p:nvGrpSpPr>
+        <p:cNvPr id="1" name=""/>
+        <p:cNvGrpSpPr/>
+        <p:nvPr/>
+      </p:nvGrpSpPr>
+      <p:grpSpPr>
+        <a:xfrm>
+          <a:off x="0" y="0"/>
+          <a:ext cx="0" cy="0"/>
+          <a:chOff x="0" y="0"/>
+          <a:chExt cx="0" cy="0"/>
+        </a:xfrm>
+      </p:grpSpPr>
+      <p:sp>
+        <p:nvSpPr>
+          <p:cNvPr id="2" name="Slide Image Placeholder 1"/>
+          <p:cNvSpPr>
+            <a:spLocks noGrp="1" noRot="1" noChangeAspect="1"/>
+          </p:cNvSpPr>
+          <p:nvPr>
+            <p:ph type="sldImg"/>
+          </p:nvPr>
+        </p:nvSpPr>
+        <p:spPr/>
+      </p:sp>
+      <p:sp>
+        <p:nvSpPr>
+          <p:cNvPr id="3" name="Notes Placeholder 2"/>
+          <p:cNvSpPr>
+            <a:spLocks noGrp="1"/>
+          </p:cNvSpPr>
+          <p:nvPr>
+            <p:ph type="body" idx="1"/>
+          </p:nvPr>
+        </p:nvSpPr>
+        <p:spPr/>
+        <p:txBody>
+          <a:bodyPr/>
+          <a:lstStyle/>
+          <a:p>
+            <a:r>
+              <a:rPr dirty="0"/>
+              <a:t>Every team walks this leg first, whatever it decides to staff afterwards.</a:t>
+            </a:r>
+            <a:endParaRPr lang="en-US" dirty="0"/>
+          </a:p>
+          <a:p>
+            <a:endParaRPr lang="en-US" dirty="0"/>
+          </a:p>
+          <a:p>
+            <a:pPr marL="0" marR="0" lvl="0" indent="0" algn="l" defTabSz="914400" rtl="0" eaLnBrk="1" fontAlgn="auto" latinLnBrk="0" hangingPunct="1">
+              <a:lnSpc>
+                <a:spcPct val="100000"/>
+              </a:lnSpc>
+              <a:spcBef>
+                <a:spcPts val="0"/>
+              </a:spcBef>
+              <a:spcAft>
+                <a:spcPts val="0"/>
+              </a:spcAft>
+              <a:buClrTx/>
+              <a:buSzTx/>
+              <a:buFontTx/>
+              <a:buNone/>
+              <a:tabLst/>
+              <a:defRPr/>
+            </a:pPr>
+            <a:r>
+              <a:rPr lang="en-US" sz="1200" kern="1200" dirty="0">
+                <a:solidFill>
+                  <a:schemeClr val="tx1"/>
+                </a:solidFill>
+                <a:effectLst/>
+                <a:latin typeface="+mn-lt"/>
+                <a:ea typeface="+mn-ea"/>
+                <a:cs typeface="+mn-cs"/>
+              </a:rPr>
+              <a:t>Hook: 15 months of engineering. why bother, when AI writes the code?</a:t>
+            </a:r>
+          </a:p>
+          <a:p>
+            <a:endParaRPr dirty="0"/>
+          </a:p>
+        </p:txBody>
+      </p:sp>
+      <p:sp>
+        <p:nvSpPr>
+          <p:cNvPr id="4" name="Slide Number Placeholder 3"/>
+          <p:cNvSpPr>
+            <a:spLocks noGrp="1"/>
+          </p:cNvSpPr>
+          <p:nvPr>
+            <p:ph type="sldNum" sz="quarter" idx="5"/>
+          </p:nvPr>
+        </p:nvSpPr>
+        <p:spPr/>
+        <p:txBody>
+          <a:bodyPr/>
+          <a:lstStyle/>
+          <a:p>
+            <a:fld id="{ED0E717D-2DA7-42E8-9D35-D8C48612FADF}" type="slidenum">
+              <a:rPr lang="en-US" smtClean="0"/>
+              <a:t>7</a:t>
             </a:fld>
             <a:endParaRPr lang="en-US"/>
           </a:p>
@@ -659,6 +1352,167 @@
         <p14:creationId xmlns:p14="http://schemas.microsoft.com/office/powerpoint/2010/main" val="1564173047"/>
       </p:ext>
     </p:extLst>
+  </p:cSld>
+  <p:clrMapOvr>
+    <a:masterClrMapping/>
+  </p:clrMapOvr>
+</p:notes>
+</file>
+
+<file path=ppt/notesSlides/notesSlide8.xml><?xml version="1.0" encoding="utf-8"?>
+<p:notes xmlns:a="http://schemas.openxmlformats.org/drawingml/2006/main" xmlns:r="http://schemas.openxmlformats.org/officeDocument/2006/relationships" xmlns:p="http://schemas.openxmlformats.org/presentationml/2006/main">
+  <p:cSld>
+    <p:spTree>
+      <p:nvGrpSpPr>
+        <p:cNvPr id="1" name=""/>
+        <p:cNvGrpSpPr/>
+        <p:nvPr/>
+      </p:nvGrpSpPr>
+      <p:grpSpPr>
+        <a:xfrm>
+          <a:off x="0" y="0"/>
+          <a:ext cx="0" cy="0"/>
+          <a:chOff x="0" y="0"/>
+          <a:chExt cx="0" cy="0"/>
+        </a:xfrm>
+      </p:grpSpPr>
+      <p:sp>
+        <p:nvSpPr>
+          <p:cNvPr id="2" name="Slide Image Placeholder 1"/>
+          <p:cNvSpPr>
+            <a:spLocks noGrp="1" noRot="1" noChangeAspect="1"/>
+          </p:cNvSpPr>
+          <p:nvPr>
+            <p:ph type="sldImg" idx="2"/>
+          </p:nvPr>
+        </p:nvSpPr>
+        <p:spPr/>
+      </p:sp>
+      <p:sp>
+        <p:nvSpPr>
+          <p:cNvPr id="3" name="Notes Placeholder 2"/>
+          <p:cNvSpPr>
+            <a:spLocks noGrp="1"/>
+          </p:cNvSpPr>
+          <p:nvPr>
+            <p:ph type="body" sz="quarter" idx="3"/>
+          </p:nvPr>
+        </p:nvSpPr>
+        <p:spPr/>
+        <p:txBody>
+          <a:bodyPr/>
+          <a:lstStyle/>
+          <a:p>
+            <a:r>
+              <a:rPr lang="en-US" sz="1200" kern="1200" dirty="0">
+                <a:solidFill>
+                  <a:schemeClr val="tx1"/>
+                </a:solidFill>
+                <a:effectLst/>
+                <a:latin typeface="+mn-lt"/>
+                <a:ea typeface="+mn-ea"/>
+                <a:cs typeface="+mn-cs"/>
+              </a:rPr>
+              <a:t>Hook: AI multiplies what you already have. So what does your team already have?</a:t>
+            </a:r>
+          </a:p>
+        </p:txBody>
+      </p:sp>
+      <p:sp>
+        <p:nvSpPr>
+          <p:cNvPr id="4" name="Slide Number Placeholder 3"/>
+          <p:cNvSpPr>
+            <a:spLocks noGrp="1"/>
+          </p:cNvSpPr>
+          <p:nvPr>
+            <p:ph type="sldNum" sz="quarter" idx="5"/>
+          </p:nvPr>
+        </p:nvSpPr>
+        <p:spPr/>
+      </p:sp>
+    </p:spTree>
+  </p:cSld>
+  <p:clrMapOvr>
+    <a:masterClrMapping/>
+  </p:clrMapOvr>
+</p:notes>
+</file>
+
+<file path=ppt/notesSlides/notesSlide9.xml><?xml version="1.0" encoding="utf-8"?>
+<p:notes xmlns:a="http://schemas.openxmlformats.org/drawingml/2006/main" xmlns:r="http://schemas.openxmlformats.org/officeDocument/2006/relationships" xmlns:p="http://schemas.openxmlformats.org/presentationml/2006/main">
+  <p:cSld>
+    <p:spTree>
+      <p:nvGrpSpPr>
+        <p:cNvPr id="1" name=""/>
+        <p:cNvGrpSpPr/>
+        <p:nvPr/>
+      </p:nvGrpSpPr>
+      <p:grpSpPr>
+        <a:xfrm>
+          <a:off x="0" y="0"/>
+          <a:ext cx="0" cy="0"/>
+          <a:chOff x="0" y="0"/>
+          <a:chExt cx="0" cy="0"/>
+        </a:xfrm>
+      </p:grpSpPr>
+      <p:sp>
+        <p:nvSpPr>
+          <p:cNvPr id="2" name="Slide Image Placeholder 1"/>
+          <p:cNvSpPr>
+            <a:spLocks noGrp="1" noRot="1" noChangeAspect="1"/>
+          </p:cNvSpPr>
+          <p:nvPr>
+            <p:ph type="sldImg" idx="2"/>
+          </p:nvPr>
+        </p:nvSpPr>
+        <p:spPr/>
+      </p:sp>
+      <p:sp>
+        <p:nvSpPr>
+          <p:cNvPr id="3" name="Notes Placeholder 2"/>
+          <p:cNvSpPr>
+            <a:spLocks noGrp="1"/>
+          </p:cNvSpPr>
+          <p:nvPr>
+            <p:ph type="body" sz="quarter" idx="3"/>
+          </p:nvPr>
+        </p:nvSpPr>
+        <p:spPr/>
+        <p:txBody>
+          <a:bodyPr/>
+          <a:lstStyle/>
+          <a:p>
+            <a:r>
+              <a:rPr dirty="0"/>
+              <a:t>Pause here. This is the only moment in the talk that is about their team rather than about OR teams in general.</a:t>
+            </a:r>
+            <a:endParaRPr lang="en-US" dirty="0"/>
+          </a:p>
+          <a:p>
+            <a:endParaRPr lang="en-US" dirty="0"/>
+          </a:p>
+          <a:p>
+            <a:r>
+              <a:rPr lang="en-US" dirty="0"/>
+              <a:t>Hook: if you identified a gap in OR Engineers or Scientists training…. How to close that gap?</a:t>
+            </a:r>
+            <a:endParaRPr dirty="0"/>
+          </a:p>
+        </p:txBody>
+      </p:sp>
+      <p:sp>
+        <p:nvSpPr>
+          <p:cNvPr id="4" name="Slide Number Placeholder 3"/>
+          <p:cNvSpPr>
+            <a:spLocks noGrp="1"/>
+          </p:cNvSpPr>
+          <p:nvPr>
+            <p:ph type="sldNum" sz="quarter" idx="5"/>
+          </p:nvPr>
+        </p:nvSpPr>
+        <p:spPr/>
+      </p:sp>
+    </p:spTree>
   </p:cSld>
   <p:clrMapOvr>
     <a:masterClrMapping/>
@@ -845,7 +1699,7 @@
           <a:p>
             <a:fld id="{5CEEA77D-52E4-475F-8F66-88B530FFC6E8}" type="datetime1">
               <a:rPr lang="en-US" smtClean="0"/>
-              <a:t>9/18/2026</a:t>
+              <a:t>9/20/2026</a:t>
             </a:fld>
             <a:endParaRPr lang="en-US"/>
           </a:p>
@@ -1013,7 +1867,7 @@
           <a:p>
             <a:fld id="{42A050E7-01C7-465F-8F29-D3A50E883B89}" type="datetime1">
               <a:rPr lang="en-US" smtClean="0"/>
-              <a:t>9/18/2026</a:t>
+              <a:t>9/20/2026</a:t>
             </a:fld>
             <a:endParaRPr lang="en-US"/>
           </a:p>
@@ -1191,7 +2045,7 @@
           <a:p>
             <a:fld id="{F3CBD988-613B-41D9-B531-672BCF9F6E33}" type="datetime1">
               <a:rPr lang="en-US" smtClean="0"/>
-              <a:t>9/18/2026</a:t>
+              <a:t>9/20/2026</a:t>
             </a:fld>
             <a:endParaRPr lang="en-US"/>
           </a:p>
@@ -1359,7 +2213,7 @@
           <a:p>
             <a:fld id="{509C9C77-8531-4613-A047-115B56092CED}" type="datetime1">
               <a:rPr lang="en-US" smtClean="0"/>
-              <a:t>9/18/2026</a:t>
+              <a:t>9/20/2026</a:t>
             </a:fld>
             <a:endParaRPr lang="en-US"/>
           </a:p>
@@ -1604,7 +2458,7 @@
           <a:p>
             <a:fld id="{C564C9CB-EC00-45C8-90A7-B81D698AE4A7}" type="datetime1">
               <a:rPr lang="en-US" smtClean="0"/>
-              <a:t>9/18/2026</a:t>
+              <a:t>9/20/2026</a:t>
             </a:fld>
             <a:endParaRPr lang="en-US"/>
           </a:p>
@@ -1889,7 +2743,7 @@
           <a:p>
             <a:fld id="{39581C7E-565C-4249-ACB6-BB1600177463}" type="datetime1">
               <a:rPr lang="en-US" smtClean="0"/>
-              <a:t>9/18/2026</a:t>
+              <a:t>9/20/2026</a:t>
             </a:fld>
             <a:endParaRPr lang="en-US"/>
           </a:p>
@@ -2308,7 +3162,7 @@
           <a:p>
             <a:fld id="{A1D53354-70A1-423C-80EE-A19E21E461F6}" type="datetime1">
               <a:rPr lang="en-US" smtClean="0"/>
-              <a:t>9/18/2026</a:t>
+              <a:t>9/20/2026</a:t>
             </a:fld>
             <a:endParaRPr lang="en-US"/>
           </a:p>
@@ -2425,7 +3279,7 @@
           <a:p>
             <a:fld id="{AA8B4E82-6E6E-45F9-B1D4-2ACB92A969F4}" type="datetime1">
               <a:rPr lang="en-US" smtClean="0"/>
-              <a:t>9/18/2026</a:t>
+              <a:t>9/20/2026</a:t>
             </a:fld>
             <a:endParaRPr lang="en-US"/>
           </a:p>
@@ -2520,7 +3374,7 @@
           <a:p>
             <a:fld id="{E9C7CB26-998E-485E-BE3D-E18117E7BFB1}" type="datetime1">
               <a:rPr lang="en-US" smtClean="0"/>
-              <a:t>9/18/2026</a:t>
+              <a:t>9/20/2026</a:t>
             </a:fld>
             <a:endParaRPr lang="en-US"/>
           </a:p>
@@ -2795,7 +3649,7 @@
           <a:p>
             <a:fld id="{2D1B55A5-1783-4E20-9E58-3BBCD1556899}" type="datetime1">
               <a:rPr lang="en-US" smtClean="0"/>
-              <a:t>9/18/2026</a:t>
+              <a:t>9/20/2026</a:t>
             </a:fld>
             <a:endParaRPr lang="en-US"/>
           </a:p>
@@ -3047,7 +3901,7 @@
           <a:p>
             <a:fld id="{AE81F13B-01C5-4282-93B0-5B945710DC35}" type="datetime1">
               <a:rPr lang="en-US" smtClean="0"/>
-              <a:t>9/18/2026</a:t>
+              <a:t>9/20/2026</a:t>
             </a:fld>
             <a:endParaRPr lang="en-US"/>
           </a:p>
@@ -3258,7 +4112,7 @@
           <a:p>
             <a:fld id="{8F05CC9C-3F22-4DB5-9F0E-65DB38F2095C}" type="datetime1">
               <a:rPr lang="en-US" smtClean="0"/>
-              <a:t>9/18/2026</a:t>
+              <a:t>9/20/2026</a:t>
             </a:fld>
             <a:endParaRPr lang="en-US"/>
           </a:p>
@@ -3666,7 +4520,7 @@
           <a:p>
             <a:pPr algn="l"/>
             <a:r>
-              <a:rPr sz="1800" b="0">
+              <a:rPr sz="1800" b="0" dirty="0">
                 <a:solidFill>
                   <a:srgbClr val="E2EBF2"/>
                 </a:solidFill>
@@ -3685,8 +4539,8 @@
         </p:nvSpPr>
         <p:spPr>
           <a:xfrm>
-            <a:off x="685800" y="1785640"/>
-            <a:ext cx="10789920" cy="1046440"/>
+            <a:off x="1085850" y="1693307"/>
+            <a:ext cx="10058400" cy="1231106"/>
           </a:xfrm>
           <a:prstGeom prst="rect">
             <a:avLst/>
@@ -3701,178 +4555,33 @@
           </a:bodyPr>
           <a:lstStyle/>
           <a:p>
-            <a:pPr algn="l"/>
-            <a:r>
-              <a:rPr sz="3400" b="1" dirty="0">
-                <a:solidFill>
-                  <a:srgbClr val="FFFFFF"/>
+            <a:pPr algn="ctr"/>
+            <a:r>
+              <a:rPr sz="4000" b="1" dirty="0">
+                <a:solidFill>
+                  <a:schemeClr val="bg1"/>
                 </a:solidFill>
                 <a:latin typeface="Aptos Display"/>
               </a:rPr>
-              <a:t>Rethinking the </a:t>
-            </a:r>
-            <a:r>
-              <a:rPr lang="en-US" sz="3400" b="1" dirty="0">
-                <a:solidFill>
-                  <a:srgbClr val="FFFFFF"/>
+              <a:t>Rethinking the embedded OR team</a:t>
+            </a:r>
+            <a:r>
+              <a:rPr lang="en-US" sz="4000" b="1" dirty="0">
+                <a:solidFill>
+                  <a:schemeClr val="bg1"/>
                 </a:solidFill>
                 <a:latin typeface="Aptos Display"/>
               </a:rPr>
-              <a:t>e</a:t>
-            </a:r>
-            <a:r>
-              <a:rPr sz="3400" b="1" dirty="0">
-                <a:solidFill>
-                  <a:srgbClr val="FFFFFF"/>
+              <a:t> </a:t>
+            </a:r>
+            <a:r>
+              <a:rPr sz="4000" b="1" dirty="0">
+                <a:solidFill>
+                  <a:schemeClr val="bg1"/>
                 </a:solidFill>
                 <a:latin typeface="Aptos Display"/>
               </a:rPr>
-              <a:t>mbedded Operations Research </a:t>
-            </a:r>
-            <a:r>
-              <a:rPr lang="en-US" sz="3400" b="1" dirty="0">
-                <a:solidFill>
-                  <a:srgbClr val="FFFFFF"/>
-                </a:solidFill>
-                <a:latin typeface="Aptos Display"/>
-              </a:rPr>
-              <a:t>t</a:t>
-            </a:r>
-            <a:r>
-              <a:rPr sz="3400" b="1" dirty="0">
-                <a:solidFill>
-                  <a:srgbClr val="FFFFFF"/>
-                </a:solidFill>
-                <a:latin typeface="Aptos Display"/>
-              </a:rPr>
-              <a:t>eam</a:t>
-            </a:r>
-            <a:r>
-              <a:rPr lang="en-US" sz="3400" b="1" dirty="0">
-                <a:solidFill>
-                  <a:srgbClr val="FFFFFF"/>
-                </a:solidFill>
-                <a:latin typeface="Aptos Display"/>
-              </a:rPr>
-              <a:t>:</a:t>
-            </a:r>
-            <a:r>
-              <a:rPr sz="3400" b="1" dirty="0">
-                <a:solidFill>
-                  <a:srgbClr val="FFFFFF"/>
-                </a:solidFill>
-                <a:latin typeface="Aptos Display"/>
-              </a:rPr>
-              <a:t>
-</a:t>
-            </a:r>
-            <a:r>
-              <a:rPr lang="en-US" sz="3400" b="1" dirty="0">
-                <a:solidFill>
-                  <a:srgbClr val="FFFFFF"/>
-                </a:solidFill>
-                <a:latin typeface="Aptos Display"/>
-              </a:rPr>
-              <a:t>f</a:t>
-            </a:r>
-            <a:r>
-              <a:rPr sz="3400" b="1" dirty="0">
-                <a:solidFill>
-                  <a:srgbClr val="FFFFFF"/>
-                </a:solidFill>
-                <a:latin typeface="Aptos Display"/>
-              </a:rPr>
-              <a:t>rom </a:t>
-            </a:r>
-            <a:r>
-              <a:rPr lang="en-US" sz="3400" b="1" dirty="0">
-                <a:solidFill>
-                  <a:srgbClr val="FFFFFF"/>
-                </a:solidFill>
-                <a:latin typeface="Aptos Display"/>
-              </a:rPr>
-              <a:t>p</a:t>
-            </a:r>
-            <a:r>
-              <a:rPr sz="3400" b="1" dirty="0">
-                <a:solidFill>
-                  <a:srgbClr val="FFFFFF"/>
-                </a:solidFill>
-                <a:latin typeface="Aptos Display"/>
-              </a:rPr>
-              <a:t>roject to </a:t>
-            </a:r>
-            <a:r>
-              <a:rPr lang="en-US" sz="3400" b="1" dirty="0">
-                <a:solidFill>
-                  <a:srgbClr val="FFFFFF"/>
-                </a:solidFill>
-                <a:latin typeface="Aptos Display"/>
-              </a:rPr>
-              <a:t>p</a:t>
-            </a:r>
-            <a:r>
-              <a:rPr sz="3400" b="1" dirty="0">
-                <a:solidFill>
-                  <a:srgbClr val="FFFFFF"/>
-                </a:solidFill>
-                <a:latin typeface="Aptos Display"/>
-              </a:rPr>
-              <a:t>roduct, and </a:t>
-            </a:r>
-            <a:r>
-              <a:rPr lang="en-US" sz="3400" b="1" dirty="0">
-                <a:solidFill>
-                  <a:srgbClr val="FFFFFF"/>
-                </a:solidFill>
-                <a:latin typeface="Aptos Display"/>
-              </a:rPr>
-              <a:t>h</a:t>
-            </a:r>
-            <a:r>
-              <a:rPr sz="3400" b="1" dirty="0">
-                <a:solidFill>
-                  <a:srgbClr val="FFFFFF"/>
-                </a:solidFill>
-                <a:latin typeface="Aptos Display"/>
-              </a:rPr>
-              <a:t>ow to </a:t>
-            </a:r>
-            <a:r>
-              <a:rPr lang="en-US" sz="3400" b="1" dirty="0">
-                <a:solidFill>
-                  <a:srgbClr val="FFFFFF"/>
-                </a:solidFill>
-                <a:latin typeface="Aptos Display"/>
-              </a:rPr>
-              <a:t>g</a:t>
-            </a:r>
-            <a:r>
-              <a:rPr sz="3400" b="1" dirty="0">
-                <a:solidFill>
-                  <a:srgbClr val="FFFFFF"/>
-                </a:solidFill>
-                <a:latin typeface="Aptos Display"/>
-              </a:rPr>
-              <a:t>et </a:t>
-            </a:r>
-            <a:r>
-              <a:rPr lang="en-US" sz="3400" b="1" dirty="0">
-                <a:solidFill>
-                  <a:srgbClr val="FFFFFF"/>
-                </a:solidFill>
-                <a:latin typeface="Aptos Display"/>
-              </a:rPr>
-              <a:t>t</a:t>
-            </a:r>
-            <a:r>
-              <a:rPr sz="3400" b="1" dirty="0">
-                <a:solidFill>
-                  <a:srgbClr val="FFFFFF"/>
-                </a:solidFill>
-                <a:latin typeface="Aptos Display"/>
-              </a:rPr>
-              <a:t>here</a:t>
+              <a:t>as a specialized software team</a:t>
             </a:r>
           </a:p>
         </p:txBody>
@@ -3885,7 +4594,7 @@
         </p:nvSpPr>
         <p:spPr>
           <a:xfrm>
-            <a:off x="685800" y="3246120"/>
+            <a:off x="685800" y="3401568"/>
             <a:ext cx="1051560" cy="54864"/>
           </a:xfrm>
           <a:prstGeom prst="rect">
@@ -3985,105 +4694,6 @@
               </a:rPr>
               <a:t>American Airlines</a:t>
             </a:r>
-          </a:p>
-        </p:txBody>
-      </p:sp>
-      <p:sp>
-        <p:nvSpPr>
-          <p:cNvPr id="10" name="TextBox 9"/>
-          <p:cNvSpPr txBox="1"/>
-          <p:nvPr/>
-        </p:nvSpPr>
-        <p:spPr>
-          <a:xfrm>
-            <a:off x="4699000" y="6239738"/>
-            <a:ext cx="4150360" cy="215444"/>
-          </a:xfrm>
-          <a:prstGeom prst="rect">
-            <a:avLst/>
-          </a:prstGeom>
-          <a:noFill/>
-        </p:spPr>
-        <p:txBody>
-          <a:bodyPr wrap="square" lIns="0" tIns="0" rIns="0" bIns="0" anchor="ctr">
-            <a:spAutoFit/>
-          </a:bodyPr>
-          <a:lstStyle/>
-          <a:p>
-            <a:pPr algn="l"/>
-            <a:r>
-              <a:rPr sz="1400" b="0" dirty="0">
-                <a:solidFill>
-                  <a:srgbClr val="B5C0D3"/>
-                </a:solidFill>
-                <a:latin typeface="Aptos"/>
-              </a:rPr>
-              <a:t>AGIFORS Annual Symposium · October 25, 2026</a:t>
-            </a:r>
-          </a:p>
-        </p:txBody>
-      </p:sp>
-      <p:sp>
-        <p:nvSpPr>
-          <p:cNvPr id="11" name="TextBox 10"/>
-          <p:cNvSpPr txBox="1"/>
-          <p:nvPr/>
-        </p:nvSpPr>
-        <p:spPr>
-          <a:xfrm>
-            <a:off x="11475720" y="6510528"/>
-            <a:ext cx="320040" cy="164592"/>
-          </a:xfrm>
-          <a:prstGeom prst="rect">
-            <a:avLst/>
-          </a:prstGeom>
-          <a:noFill/>
-        </p:spPr>
-        <p:txBody>
-          <a:bodyPr wrap="square" lIns="0" tIns="0" rIns="0" bIns="0" anchor="ctr">
-            <a:spAutoFit/>
-          </a:bodyPr>
-          <a:lstStyle/>
-          <a:p>
-            <a:pPr algn="r"/>
-            <a:r>
-              <a:rPr sz="1000" b="0">
-                <a:solidFill>
-                  <a:srgbClr val="B5C0D3"/>
-                </a:solidFill>
-                <a:latin typeface="Aptos"/>
-              </a:rPr>
-              <a:t>1</a:t>
-            </a:r>
-          </a:p>
-        </p:txBody>
-      </p:sp>
-      <p:sp>
-        <p:nvSpPr>
-          <p:cNvPr id="13" name="Slide Number Placeholder 12">
-            <a:extLst>
-              <a:ext uri="{FF2B5EF4-FFF2-40B4-BE49-F238E27FC236}">
-                <a16:creationId xmlns:a16="http://schemas.microsoft.com/office/drawing/2014/main" id="{F6491400-6813-04C5-CAE0-B49DCD0BFA87}"/>
-              </a:ext>
-            </a:extLst>
-          </p:cNvPr>
-          <p:cNvSpPr>
-            <a:spLocks noGrp="1"/>
-          </p:cNvSpPr>
-          <p:nvPr>
-            <p:ph type="sldNum" sz="quarter" idx="12"/>
-          </p:nvPr>
-        </p:nvSpPr>
-        <p:spPr/>
-        <p:txBody>
-          <a:bodyPr/>
-          <a:lstStyle/>
-          <a:p>
-            <a:fld id="{C1FF6DA9-008F-8B48-92A6-B652298478BF}" type="slidenum">
-              <a:rPr lang="en-US" smtClean="0"/>
-              <a:t>1</a:t>
-            </a:fld>
-            <a:endParaRPr lang="en-US"/>
           </a:p>
         </p:txBody>
       </p:sp>
@@ -4101,7 +4711,7 @@
         </p:nvSpPr>
         <p:spPr>
           <a:xfrm>
-            <a:off x="0" y="5394781"/>
+            <a:off x="0" y="5646574"/>
             <a:ext cx="12192000" cy="215444"/>
           </a:xfrm>
           <a:prstGeom prst="rect">
@@ -4117,15 +4727,15 @@
           <a:p>
             <a:pPr algn="ctr"/>
             <a:r>
-              <a:rPr lang="en-US" sz="1400" dirty="0">
+              <a:rPr lang="en-US" sz="1400" i="1" dirty="0">
                 <a:solidFill>
                   <a:srgbClr val="FFFFFF"/>
                 </a:solidFill>
                 <a:latin typeface="Aptos"/>
               </a:rPr>
-              <a:t>Every comment here represents my own opinion, and does not necessarily represent an American Airlines statement </a:t>
-            </a:r>
-            <a:endParaRPr lang="en-US" sz="1050" dirty="0">
+              <a:t>Every comment here represents my own opinion, and does not represent an American Airlines statement </a:t>
+            </a:r>
+            <a:endParaRPr lang="en-US" sz="1050" i="1" dirty="0">
               <a:solidFill>
                 <a:srgbClr val="FFFFFF"/>
               </a:solidFill>
@@ -4143,89 +4753,6 @@
 </file>
 
 <file path=ppt/slides/slide10.xml><?xml version="1.0" encoding="utf-8"?>
-<p:sld xmlns:a="http://schemas.openxmlformats.org/drawingml/2006/main" xmlns:r="http://schemas.openxmlformats.org/officeDocument/2006/relationships" xmlns:p="http://schemas.openxmlformats.org/presentationml/2006/main">
-  <p:cSld>
-    <p:spTree>
-      <p:nvGrpSpPr>
-        <p:cNvPr id="1" name="">
-          <a:extLst>
-            <a:ext uri="{FF2B5EF4-FFF2-40B4-BE49-F238E27FC236}">
-              <a16:creationId xmlns:a16="http://schemas.microsoft.com/office/drawing/2014/main" id="{72CD7A9C-F396-AB78-8971-F496E43137F7}"/>
-            </a:ext>
-          </a:extLst>
-        </p:cNvPr>
-        <p:cNvGrpSpPr/>
-        <p:nvPr/>
-      </p:nvGrpSpPr>
-      <p:grpSpPr>
-        <a:xfrm>
-          <a:off x="0" y="0"/>
-          <a:ext cx="0" cy="0"/>
-          <a:chOff x="0" y="0"/>
-          <a:chExt cx="0" cy="0"/>
-        </a:xfrm>
-      </p:grpSpPr>
-      <p:sp>
-        <p:nvSpPr>
-          <p:cNvPr id="2" name="TextBox 1">
-            <a:extLst>
-              <a:ext uri="{FF2B5EF4-FFF2-40B4-BE49-F238E27FC236}">
-                <a16:creationId xmlns:a16="http://schemas.microsoft.com/office/drawing/2014/main" id="{E9F7C2A3-54B5-6FFC-067B-6F7C1DB90C9E}"/>
-              </a:ext>
-            </a:extLst>
-          </p:cNvPr>
-          <p:cNvSpPr txBox="1"/>
-          <p:nvPr/>
-        </p:nvSpPr>
-        <p:spPr>
-          <a:xfrm>
-            <a:off x="365760" y="213360"/>
-            <a:ext cx="11567160" cy="1231106"/>
-          </a:xfrm>
-          <a:prstGeom prst="rect">
-            <a:avLst/>
-          </a:prstGeom>
-          <a:noFill/>
-        </p:spPr>
-        <p:txBody>
-          <a:bodyPr wrap="square" lIns="0" tIns="0" rIns="0" bIns="0" anchor="t">
-            <a:spAutoFit/>
-          </a:bodyPr>
-          <a:lstStyle/>
-          <a:p>
-            <a:pPr algn="l"/>
-            <a:r>
-              <a:rPr lang="en-US" sz="4000" b="1" i="0" dirty="0">
-                <a:solidFill>
-                  <a:srgbClr val="0F2343"/>
-                </a:solidFill>
-                <a:latin typeface="Aptos Display"/>
-              </a:rPr>
-              <a:t>OR scientists need some SE skills and specialized infrastructure to be effective developers</a:t>
-            </a:r>
-            <a:endParaRPr sz="4000" b="1" i="0" baseline="30000" dirty="0">
-              <a:solidFill>
-                <a:srgbClr val="0F2343"/>
-              </a:solidFill>
-              <a:latin typeface="Aptos Display"/>
-            </a:endParaRPr>
-          </a:p>
-        </p:txBody>
-      </p:sp>
-    </p:spTree>
-    <p:extLst>
-      <p:ext uri="{BB962C8B-B14F-4D97-AF65-F5344CB8AC3E}">
-        <p14:creationId xmlns:p14="http://schemas.microsoft.com/office/powerpoint/2010/main" val="1353839906"/>
-      </p:ext>
-    </p:extLst>
-  </p:cSld>
-  <p:clrMapOvr>
-    <a:masterClrMapping/>
-  </p:clrMapOvr>
-</p:sld>
-</file>
-
-<file path=ppt/slides/slide11.xml><?xml version="1.0" encoding="utf-8"?>
 <p:sld xmlns:a="http://schemas.openxmlformats.org/drawingml/2006/main" xmlns:r="http://schemas.openxmlformats.org/officeDocument/2006/relationships" xmlns:p="http://schemas.openxmlformats.org/presentationml/2006/main">
   <p:cSld>
     <p:spTree>
@@ -4248,6 +4775,36 @@
           <a:chExt cx="0" cy="0"/>
         </a:xfrm>
       </p:grpSpPr>
+      <p:pic>
+        <p:nvPicPr>
+          <p:cNvPr id="31" name="Picture 30">
+            <a:extLst>
+              <a:ext uri="{FF2B5EF4-FFF2-40B4-BE49-F238E27FC236}">
+                <a16:creationId xmlns:a16="http://schemas.microsoft.com/office/drawing/2014/main" id="{22411A1C-31C5-152B-C891-9094AA9791F1}"/>
+              </a:ext>
+            </a:extLst>
+          </p:cNvPr>
+          <p:cNvPicPr>
+            <a:picLocks noChangeAspect="1"/>
+          </p:cNvPicPr>
+          <p:nvPr/>
+        </p:nvPicPr>
+        <p:blipFill>
+          <a:blip r:embed="rId3"/>
+          <a:stretch>
+            <a:fillRect/>
+          </a:stretch>
+        </p:blipFill>
+        <p:spPr>
+          <a:xfrm>
+            <a:off x="6559634" y="1271354"/>
+            <a:ext cx="5373286" cy="5373286"/>
+          </a:xfrm>
+          <a:prstGeom prst="rect">
+            <a:avLst/>
+          </a:prstGeom>
+        </p:spPr>
+      </p:pic>
       <p:sp>
         <p:nvSpPr>
           <p:cNvPr id="2" name="TextBox 1">
@@ -4278,13 +4835,31 @@
           <a:p>
             <a:pPr algn="l"/>
             <a:r>
-              <a:rPr lang="en-US" sz="4000" b="1" i="0" dirty="0">
+              <a:rPr sz="4000" b="1" dirty="0">
                 <a:solidFill>
                   <a:srgbClr val="0F2343"/>
                 </a:solidFill>
                 <a:latin typeface="Aptos Display"/>
               </a:rPr>
-              <a:t>How to get ther</a:t>
+              <a:t>How do you build that team? </a:t>
+            </a:r>
+            <a:r>
+              <a:rPr sz="4000" b="1" dirty="0">
+                <a:solidFill>
+                  <a:srgbClr val="F97316"/>
+                </a:solidFill>
+                <a:latin typeface="Aptos Display"/>
+              </a:rPr>
+              <a:t>SEFOP</a:t>
+            </a:r>
+            <a:r>
+              <a:rPr sz="4000" b="1" dirty="0">
+                <a:solidFill>
+                  <a:srgbClr val="0F2343"/>
+                </a:solidFill>
+                <a:latin typeface="Aptos Display"/>
+              </a:rPr>
+              <a:t> packages practices</a:t>
             </a:r>
             <a:r>
               <a:rPr lang="en-US" sz="4000" b="1" dirty="0">
@@ -4293,7 +4868,7 @@
                 </a:solidFill>
                 <a:latin typeface="Aptos Display"/>
               </a:rPr>
-              <a:t>e? SEFOP packages the training materials to make this transition</a:t>
+              <a:t> and training materials</a:t>
             </a:r>
             <a:endParaRPr sz="4000" b="1" i="0" baseline="30000" dirty="0">
               <a:solidFill>
@@ -4301,6 +4876,520 @@
               </a:solidFill>
               <a:latin typeface="Aptos Display"/>
             </a:endParaRPr>
+          </a:p>
+        </p:txBody>
+      </p:sp>
+      <p:sp>
+        <p:nvSpPr>
+          <p:cNvPr id="23" name="TextBox 22"/>
+          <p:cNvSpPr txBox="1"/>
+          <p:nvPr/>
+        </p:nvSpPr>
+        <p:spPr>
+          <a:xfrm>
+            <a:off x="7679379" y="6213753"/>
+            <a:ext cx="3133796" cy="430887"/>
+          </a:xfrm>
+          <a:prstGeom prst="rect">
+            <a:avLst/>
+          </a:prstGeom>
+          <a:noFill/>
+        </p:spPr>
+        <p:txBody>
+          <a:bodyPr wrap="square" lIns="36576" tIns="0" rIns="36576" bIns="0" anchor="t">
+            <a:spAutoFit/>
+          </a:bodyPr>
+          <a:lstStyle/>
+          <a:p>
+            <a:pPr algn="l">
+              <a:spcAft>
+                <a:spcPts val="400"/>
+              </a:spcAft>
+            </a:pPr>
+            <a:r>
+              <a:rPr sz="2800" b="1" dirty="0">
+                <a:solidFill>
+                  <a:srgbClr val="0F2343"/>
+                </a:solidFill>
+                <a:latin typeface="Aptos"/>
+              </a:rPr>
+              <a:t>github.com/</a:t>
+            </a:r>
+            <a:r>
+              <a:rPr sz="2800" b="1" dirty="0" err="1">
+                <a:solidFill>
+                  <a:srgbClr val="0F2343"/>
+                </a:solidFill>
+                <a:latin typeface="Aptos"/>
+              </a:rPr>
+              <a:t>sefop</a:t>
+            </a:r>
+            <a:endParaRPr sz="2800" b="1" dirty="0">
+              <a:solidFill>
+                <a:srgbClr val="0F2343"/>
+              </a:solidFill>
+              <a:latin typeface="Aptos"/>
+            </a:endParaRPr>
+          </a:p>
+        </p:txBody>
+      </p:sp>
+      <p:sp>
+        <p:nvSpPr>
+          <p:cNvPr id="27" name="TextBox 26">
+            <a:extLst>
+              <a:ext uri="{FF2B5EF4-FFF2-40B4-BE49-F238E27FC236}">
+                <a16:creationId xmlns:a16="http://schemas.microsoft.com/office/drawing/2014/main" id="{FFA2AAC7-92A8-2E98-7927-C58D1885D6A6}"/>
+              </a:ext>
+            </a:extLst>
+          </p:cNvPr>
+          <p:cNvSpPr txBox="1"/>
+          <p:nvPr/>
+        </p:nvSpPr>
+        <p:spPr>
+          <a:xfrm>
+            <a:off x="365760" y="1895295"/>
+            <a:ext cx="6193875" cy="738664"/>
+          </a:xfrm>
+          <a:prstGeom prst="rect">
+            <a:avLst/>
+          </a:prstGeom>
+          <a:noFill/>
+        </p:spPr>
+        <p:txBody>
+          <a:bodyPr wrap="square" tIns="0" rIns="45720" bIns="0">
+            <a:spAutoFit/>
+          </a:bodyPr>
+          <a:lstStyle/>
+          <a:p>
+            <a:r>
+              <a:rPr lang="en-US" sz="2400" b="1" dirty="0">
+                <a:solidFill>
+                  <a:srgbClr val="0F2343"/>
+                </a:solidFill>
+                <a:latin typeface="Aptos"/>
+              </a:rPr>
+              <a:t>S</a:t>
+            </a:r>
+            <a:r>
+              <a:rPr lang="en-US" sz="2400" dirty="0">
+                <a:solidFill>
+                  <a:srgbClr val="0F2343"/>
+                </a:solidFill>
+                <a:latin typeface="Aptos"/>
+              </a:rPr>
+              <a:t>oftware</a:t>
+            </a:r>
+            <a:r>
+              <a:rPr lang="en-US" sz="2400" b="1" dirty="0">
+                <a:solidFill>
+                  <a:srgbClr val="0F2343"/>
+                </a:solidFill>
+                <a:latin typeface="Aptos"/>
+              </a:rPr>
+              <a:t> E</a:t>
+            </a:r>
+            <a:r>
+              <a:rPr lang="en-US" sz="2400" dirty="0">
+                <a:solidFill>
+                  <a:srgbClr val="0F2343"/>
+                </a:solidFill>
+                <a:latin typeface="Aptos"/>
+              </a:rPr>
+              <a:t>ngineering</a:t>
+            </a:r>
+            <a:r>
+              <a:rPr lang="en-US" sz="2400" b="1" dirty="0">
+                <a:solidFill>
+                  <a:srgbClr val="0F2343"/>
+                </a:solidFill>
+                <a:latin typeface="Aptos"/>
+              </a:rPr>
+              <a:t> F</a:t>
+            </a:r>
+            <a:r>
+              <a:rPr lang="en-US" sz="2400" dirty="0">
+                <a:solidFill>
+                  <a:srgbClr val="0F2343"/>
+                </a:solidFill>
+                <a:latin typeface="Aptos"/>
+              </a:rPr>
+              <a:t>ramework</a:t>
+            </a:r>
+            <a:r>
+              <a:rPr lang="en-US" sz="2400" b="1" dirty="0">
+                <a:solidFill>
+                  <a:srgbClr val="0F2343"/>
+                </a:solidFill>
+                <a:latin typeface="Aptos"/>
+              </a:rPr>
+              <a:t> </a:t>
+            </a:r>
+            <a:r>
+              <a:rPr lang="en-US" sz="2400" dirty="0">
+                <a:solidFill>
+                  <a:srgbClr val="0F2343"/>
+                </a:solidFill>
+                <a:latin typeface="Aptos"/>
+              </a:rPr>
+              <a:t>for </a:t>
+            </a:r>
+            <a:r>
+              <a:rPr lang="en-US" sz="2400" b="1" dirty="0">
+                <a:solidFill>
+                  <a:srgbClr val="0F2343"/>
+                </a:solidFill>
+                <a:latin typeface="Aptos"/>
+              </a:rPr>
+              <a:t>O</a:t>
+            </a:r>
+            <a:r>
+              <a:rPr lang="en-US" sz="2400" dirty="0">
+                <a:solidFill>
+                  <a:srgbClr val="0F2343"/>
+                </a:solidFill>
+                <a:latin typeface="Aptos"/>
+              </a:rPr>
+              <a:t>ptimization</a:t>
+            </a:r>
+            <a:r>
+              <a:rPr lang="en-US" sz="2400" b="1" dirty="0">
+                <a:solidFill>
+                  <a:srgbClr val="0F2343"/>
+                </a:solidFill>
+                <a:latin typeface="Aptos"/>
+              </a:rPr>
+              <a:t> </a:t>
+            </a:r>
+            <a:r>
+              <a:rPr lang="en-US" sz="2400" b="1" dirty="0">
+                <a:solidFill>
+                  <a:srgbClr val="0F2343"/>
+                </a:solidFill>
+                <a:latin typeface="Aptos" panose="020B0004020202020204" pitchFamily="34" charset="0"/>
+              </a:rPr>
+              <a:t>P</a:t>
+            </a:r>
+            <a:r>
+              <a:rPr lang="en-US" sz="2400" dirty="0">
+                <a:solidFill>
+                  <a:srgbClr val="0F2343"/>
+                </a:solidFill>
+                <a:latin typeface="Aptos" panose="020B0004020202020204" pitchFamily="34" charset="0"/>
+              </a:rPr>
+              <a:t>rograms </a:t>
+            </a:r>
+            <a:r>
+              <a:rPr lang="en-US" sz="2400" dirty="0">
+                <a:solidFill>
+                  <a:schemeClr val="bg1">
+                    <a:lumMod val="65000"/>
+                  </a:schemeClr>
+                </a:solidFill>
+                <a:latin typeface="Aptos" panose="020B0004020202020204" pitchFamily="34" charset="0"/>
+              </a:rPr>
+              <a:t>— open-source</a:t>
+            </a:r>
+            <a:r>
+              <a:rPr lang="en-US" sz="2400" dirty="0">
+                <a:solidFill>
+                  <a:srgbClr val="0F2343"/>
+                </a:solidFill>
+                <a:latin typeface="Aptos" panose="020B0004020202020204" pitchFamily="34" charset="0"/>
+              </a:rPr>
+              <a:t> </a:t>
+            </a:r>
+          </a:p>
+        </p:txBody>
+      </p:sp>
+      <p:pic>
+        <p:nvPicPr>
+          <p:cNvPr id="37" name="Picture 36">
+            <a:extLst>
+              <a:ext uri="{FF2B5EF4-FFF2-40B4-BE49-F238E27FC236}">
+                <a16:creationId xmlns:a16="http://schemas.microsoft.com/office/drawing/2014/main" id="{D09A9ACA-ACDD-DE32-4754-A4FDC9C0FDB0}"/>
+              </a:ext>
+            </a:extLst>
+          </p:cNvPr>
+          <p:cNvPicPr>
+            <a:picLocks noChangeAspect="1"/>
+          </p:cNvPicPr>
+          <p:nvPr/>
+        </p:nvPicPr>
+        <p:blipFill>
+          <a:blip r:embed="rId4"/>
+          <a:stretch>
+            <a:fillRect/>
+          </a:stretch>
+        </p:blipFill>
+        <p:spPr>
+          <a:xfrm>
+            <a:off x="3825357" y="2645739"/>
+            <a:ext cx="1737360" cy="1737360"/>
+          </a:xfrm>
+          <a:prstGeom prst="rect">
+            <a:avLst/>
+          </a:prstGeom>
+        </p:spPr>
+      </p:pic>
+      <p:pic>
+        <p:nvPicPr>
+          <p:cNvPr id="39" name="Picture 38">
+            <a:extLst>
+              <a:ext uri="{FF2B5EF4-FFF2-40B4-BE49-F238E27FC236}">
+                <a16:creationId xmlns:a16="http://schemas.microsoft.com/office/drawing/2014/main" id="{33A122A3-D632-227E-8EBE-3EEEA24CF0E8}"/>
+              </a:ext>
+            </a:extLst>
+          </p:cNvPr>
+          <p:cNvPicPr>
+            <a:picLocks noChangeAspect="1"/>
+          </p:cNvPicPr>
+          <p:nvPr/>
+        </p:nvPicPr>
+        <p:blipFill>
+          <a:blip r:embed="rId5"/>
+          <a:stretch>
+            <a:fillRect/>
+          </a:stretch>
+        </p:blipFill>
+        <p:spPr>
+          <a:xfrm>
+            <a:off x="927274" y="4569191"/>
+            <a:ext cx="1737360" cy="1737360"/>
+          </a:xfrm>
+          <a:prstGeom prst="rect">
+            <a:avLst/>
+          </a:prstGeom>
+        </p:spPr>
+      </p:pic>
+      <p:pic>
+        <p:nvPicPr>
+          <p:cNvPr id="41" name="Picture 40">
+            <a:extLst>
+              <a:ext uri="{FF2B5EF4-FFF2-40B4-BE49-F238E27FC236}">
+                <a16:creationId xmlns:a16="http://schemas.microsoft.com/office/drawing/2014/main" id="{BFEC196A-61F4-6E95-B0B1-07A1D3FD8982}"/>
+              </a:ext>
+            </a:extLst>
+          </p:cNvPr>
+          <p:cNvPicPr>
+            <a:picLocks noChangeAspect="1"/>
+          </p:cNvPicPr>
+          <p:nvPr/>
+        </p:nvPicPr>
+        <p:blipFill>
+          <a:blip r:embed="rId6"/>
+          <a:stretch>
+            <a:fillRect/>
+          </a:stretch>
+        </p:blipFill>
+        <p:spPr>
+          <a:xfrm>
+            <a:off x="1018714" y="2737179"/>
+            <a:ext cx="1554480" cy="1554480"/>
+          </a:xfrm>
+          <a:prstGeom prst="rect">
+            <a:avLst/>
+          </a:prstGeom>
+        </p:spPr>
+      </p:pic>
+      <p:pic>
+        <p:nvPicPr>
+          <p:cNvPr id="43" name="Picture 42">
+            <a:extLst>
+              <a:ext uri="{FF2B5EF4-FFF2-40B4-BE49-F238E27FC236}">
+                <a16:creationId xmlns:a16="http://schemas.microsoft.com/office/drawing/2014/main" id="{1BB8DB83-27EE-DF17-6FE0-75DEDF1321B6}"/>
+              </a:ext>
+            </a:extLst>
+          </p:cNvPr>
+          <p:cNvPicPr>
+            <a:picLocks noChangeAspect="1"/>
+          </p:cNvPicPr>
+          <p:nvPr/>
+        </p:nvPicPr>
+        <p:blipFill>
+          <a:blip r:embed="rId7"/>
+          <a:stretch>
+            <a:fillRect/>
+          </a:stretch>
+        </p:blipFill>
+        <p:spPr>
+          <a:xfrm>
+            <a:off x="3916797" y="4660631"/>
+            <a:ext cx="1554480" cy="1554480"/>
+          </a:xfrm>
+          <a:prstGeom prst="rect">
+            <a:avLst/>
+          </a:prstGeom>
+        </p:spPr>
+      </p:pic>
+      <p:sp>
+        <p:nvSpPr>
+          <p:cNvPr id="45" name="TextBox 44">
+            <a:extLst>
+              <a:ext uri="{FF2B5EF4-FFF2-40B4-BE49-F238E27FC236}">
+                <a16:creationId xmlns:a16="http://schemas.microsoft.com/office/drawing/2014/main" id="{CEB3279D-A715-1768-0F0B-9B3E38A334DE}"/>
+              </a:ext>
+            </a:extLst>
+          </p:cNvPr>
+          <p:cNvSpPr txBox="1"/>
+          <p:nvPr/>
+        </p:nvSpPr>
+        <p:spPr>
+          <a:xfrm>
+            <a:off x="1321821" y="4169081"/>
+            <a:ext cx="948266" cy="400110"/>
+          </a:xfrm>
+          <a:prstGeom prst="rect">
+            <a:avLst/>
+          </a:prstGeom>
+          <a:noFill/>
+        </p:spPr>
+        <p:txBody>
+          <a:bodyPr wrap="square">
+            <a:spAutoFit/>
+          </a:bodyPr>
+          <a:lstStyle/>
+          <a:p>
+            <a:pPr algn="ctr"/>
+            <a:r>
+              <a:rPr lang="en-US" sz="2000" dirty="0">
+                <a:solidFill>
+                  <a:srgbClr val="0F2343"/>
+                </a:solidFill>
+                <a:latin typeface="Aptos"/>
+                <a:sym typeface="Wingdings" panose="05000000000000000000" pitchFamily="2" charset="2"/>
+              </a:rPr>
+              <a:t>Train</a:t>
+            </a:r>
+            <a:endParaRPr lang="en-US" dirty="0"/>
+          </a:p>
+        </p:txBody>
+      </p:sp>
+      <p:sp>
+        <p:nvSpPr>
+          <p:cNvPr id="47" name="TextBox 46">
+            <a:extLst>
+              <a:ext uri="{FF2B5EF4-FFF2-40B4-BE49-F238E27FC236}">
+                <a16:creationId xmlns:a16="http://schemas.microsoft.com/office/drawing/2014/main" id="{0C13C749-40E6-AFD5-97C4-DD8D8DD44EA9}"/>
+              </a:ext>
+            </a:extLst>
+          </p:cNvPr>
+          <p:cNvSpPr txBox="1"/>
+          <p:nvPr/>
+        </p:nvSpPr>
+        <p:spPr>
+          <a:xfrm>
+            <a:off x="4220920" y="4169081"/>
+            <a:ext cx="948266" cy="400110"/>
+          </a:xfrm>
+          <a:prstGeom prst="rect">
+            <a:avLst/>
+          </a:prstGeom>
+          <a:noFill/>
+        </p:spPr>
+        <p:txBody>
+          <a:bodyPr wrap="square">
+            <a:spAutoFit/>
+          </a:bodyPr>
+          <a:lstStyle/>
+          <a:p>
+            <a:pPr algn="ctr"/>
+            <a:r>
+              <a:rPr lang="en-US" sz="2000" dirty="0">
+                <a:solidFill>
+                  <a:srgbClr val="0F2343"/>
+                </a:solidFill>
+                <a:latin typeface="Aptos"/>
+                <a:sym typeface="Wingdings" panose="05000000000000000000" pitchFamily="2" charset="2"/>
+              </a:rPr>
+              <a:t>Lead</a:t>
+            </a:r>
+            <a:endParaRPr lang="en-US" dirty="0"/>
+          </a:p>
+        </p:txBody>
+      </p:sp>
+      <p:sp>
+        <p:nvSpPr>
+          <p:cNvPr id="48" name="TextBox 47">
+            <a:extLst>
+              <a:ext uri="{FF2B5EF4-FFF2-40B4-BE49-F238E27FC236}">
+                <a16:creationId xmlns:a16="http://schemas.microsoft.com/office/drawing/2014/main" id="{C022F8AC-347E-5A91-9AA5-6CE8C5564342}"/>
+              </a:ext>
+            </a:extLst>
+          </p:cNvPr>
+          <p:cNvSpPr txBox="1"/>
+          <p:nvPr/>
+        </p:nvSpPr>
+        <p:spPr>
+          <a:xfrm>
+            <a:off x="1196626" y="6153588"/>
+            <a:ext cx="1225409" cy="400110"/>
+          </a:xfrm>
+          <a:prstGeom prst="rect">
+            <a:avLst/>
+          </a:prstGeom>
+          <a:noFill/>
+        </p:spPr>
+        <p:txBody>
+          <a:bodyPr wrap="square">
+            <a:spAutoFit/>
+          </a:bodyPr>
+          <a:lstStyle/>
+          <a:p>
+            <a:pPr algn="ctr"/>
+            <a:r>
+              <a:rPr lang="en-US" sz="2000" dirty="0">
+                <a:solidFill>
+                  <a:srgbClr val="0F2343"/>
+                </a:solidFill>
+                <a:latin typeface="Aptos"/>
+                <a:sym typeface="Wingdings" panose="05000000000000000000" pitchFamily="2" charset="2"/>
+              </a:rPr>
+              <a:t>Deliver</a:t>
+            </a:r>
+            <a:endParaRPr lang="en-US" dirty="0"/>
+          </a:p>
+        </p:txBody>
+      </p:sp>
+      <p:sp>
+        <p:nvSpPr>
+          <p:cNvPr id="49" name="TextBox 48">
+            <a:extLst>
+              <a:ext uri="{FF2B5EF4-FFF2-40B4-BE49-F238E27FC236}">
+                <a16:creationId xmlns:a16="http://schemas.microsoft.com/office/drawing/2014/main" id="{89C7F4D0-DFBC-128B-257E-B41B276C6470}"/>
+              </a:ext>
+            </a:extLst>
+          </p:cNvPr>
+          <p:cNvSpPr txBox="1"/>
+          <p:nvPr/>
+        </p:nvSpPr>
+        <p:spPr>
+          <a:xfrm>
+            <a:off x="3916797" y="6150122"/>
+            <a:ext cx="1645920" cy="400110"/>
+          </a:xfrm>
+          <a:prstGeom prst="rect">
+            <a:avLst/>
+          </a:prstGeom>
+          <a:noFill/>
+        </p:spPr>
+        <p:txBody>
+          <a:bodyPr wrap="square">
+            <a:spAutoFit/>
+          </a:bodyPr>
+          <a:lstStyle/>
+          <a:p>
+            <a:pPr algn="ctr"/>
+            <a:r>
+              <a:rPr lang="en-US" sz="2000" dirty="0">
+                <a:solidFill>
+                  <a:srgbClr val="0F2343"/>
+                </a:solidFill>
+                <a:latin typeface="Aptos"/>
+                <a:sym typeface="Wingdings" panose="05000000000000000000" pitchFamily="2" charset="2"/>
+              </a:rPr>
+              <a:t>Go agentic</a:t>
+            </a:r>
+            <a:endParaRPr lang="en-US" dirty="0"/>
           </a:p>
         </p:txBody>
       </p:sp>
@@ -4317,7 +5406,7 @@
 </p:sld>
 </file>
 
-<file path=ppt/slides/slide12.xml><?xml version="1.0" encoding="utf-8"?>
+<file path=ppt/slides/slide11.xml><?xml version="1.0" encoding="utf-8"?>
 <p:sld xmlns:a="http://schemas.openxmlformats.org/drawingml/2006/main" xmlns:r="http://schemas.openxmlformats.org/officeDocument/2006/relationships" xmlns:p="http://schemas.openxmlformats.org/presentationml/2006/main">
   <p:cSld>
     <p:spTree>
@@ -4370,19 +5459,510 @@
           <a:p>
             <a:pPr algn="l"/>
             <a:r>
-              <a:rPr lang="en-US" sz="4000" b="1" i="0" dirty="0">
+              <a:rPr sz="4000" b="1" dirty="0">
                 <a:solidFill>
                   <a:srgbClr val="0F2343"/>
                 </a:solidFill>
                 <a:latin typeface="Aptos Display"/>
               </a:rPr>
               <a:t>Conclusion</a:t>
+            </a:r>
+            <a:r>
+              <a:rPr lang="en-US" sz="4000" b="1" dirty="0">
+                <a:solidFill>
+                  <a:srgbClr val="0F2343"/>
+                </a:solidFill>
+                <a:latin typeface="Aptos Display"/>
+              </a:rPr>
+              <a:t>s</a:t>
             </a:r>
             <a:endParaRPr sz="4000" b="1" i="0" baseline="30000" dirty="0">
               <a:solidFill>
                 <a:srgbClr val="0F2343"/>
               </a:solidFill>
               <a:latin typeface="Aptos Display"/>
+            </a:endParaRPr>
+          </a:p>
+        </p:txBody>
+      </p:sp>
+      <p:sp>
+        <p:nvSpPr>
+          <p:cNvPr id="3" name="Oval 2"/>
+          <p:cNvSpPr/>
+          <p:nvPr/>
+        </p:nvSpPr>
+        <p:spPr>
+          <a:xfrm>
+            <a:off x="463974" y="1506083"/>
+            <a:ext cx="830862" cy="830862"/>
+          </a:xfrm>
+          <a:prstGeom prst="ellipse">
+            <a:avLst/>
+          </a:prstGeom>
+          <a:solidFill>
+            <a:srgbClr val="0F2343"/>
+          </a:solidFill>
+          <a:ln>
+            <a:noFill/>
+          </a:ln>
+          <a:effectLst/>
+        </p:spPr>
+        <p:style>
+          <a:lnRef idx="1">
+            <a:schemeClr val="accent1"/>
+          </a:lnRef>
+          <a:fillRef idx="3">
+            <a:schemeClr val="accent1"/>
+          </a:fillRef>
+          <a:effectRef idx="2">
+            <a:schemeClr val="accent1"/>
+          </a:effectRef>
+          <a:fontRef idx="minor">
+            <a:schemeClr val="lt1"/>
+          </a:fontRef>
+        </p:style>
+        <p:txBody>
+          <a:bodyPr rtlCol="0" anchor="ctr"/>
+          <a:lstStyle/>
+          <a:p>
+            <a:pPr algn="ctr"/>
+            <a:r>
+              <a:rPr lang="en-US" sz="2800" b="1" dirty="0">
+                <a:latin typeface="Aptos" panose="020B0004020202020204" pitchFamily="34" charset="0"/>
+              </a:rPr>
+              <a:t>1</a:t>
+            </a:r>
+            <a:endParaRPr sz="2800" b="1" dirty="0">
+              <a:latin typeface="Aptos" panose="020B0004020202020204" pitchFamily="34" charset="0"/>
+            </a:endParaRPr>
+          </a:p>
+        </p:txBody>
+      </p:sp>
+      <p:sp>
+        <p:nvSpPr>
+          <p:cNvPr id="5" name="TextBox 4"/>
+          <p:cNvSpPr txBox="1"/>
+          <p:nvPr/>
+        </p:nvSpPr>
+        <p:spPr>
+          <a:xfrm>
+            <a:off x="1851376" y="1716670"/>
+            <a:ext cx="9492827" cy="369332"/>
+          </a:xfrm>
+          <a:prstGeom prst="rect">
+            <a:avLst/>
+          </a:prstGeom>
+          <a:noFill/>
+        </p:spPr>
+        <p:txBody>
+          <a:bodyPr wrap="square" lIns="36576" tIns="0" rIns="36576" bIns="0" anchor="t">
+            <a:spAutoFit/>
+          </a:bodyPr>
+          <a:lstStyle/>
+          <a:p>
+            <a:pPr algn="l">
+              <a:spcAft>
+                <a:spcPts val="400"/>
+              </a:spcAft>
+            </a:pPr>
+            <a:r>
+              <a:rPr sz="2400" b="0" dirty="0">
+                <a:solidFill>
+                  <a:srgbClr val="0F2343"/>
+                </a:solidFill>
+                <a:latin typeface="Aptos"/>
+              </a:rPr>
+              <a:t>A recurring decision is a product.</a:t>
+            </a:r>
+            <a:r>
+              <a:rPr lang="en-US" sz="2400" b="0" dirty="0">
+                <a:solidFill>
+                  <a:srgbClr val="0F2343"/>
+                </a:solidFill>
+                <a:latin typeface="Aptos"/>
+              </a:rPr>
+              <a:t> Product is software.</a:t>
+            </a:r>
+            <a:endParaRPr sz="2400" b="0" dirty="0">
+              <a:solidFill>
+                <a:srgbClr val="0F2343"/>
+              </a:solidFill>
+              <a:latin typeface="Aptos"/>
+            </a:endParaRPr>
+          </a:p>
+        </p:txBody>
+      </p:sp>
+      <p:sp>
+        <p:nvSpPr>
+          <p:cNvPr id="8" name="TextBox 7"/>
+          <p:cNvSpPr txBox="1"/>
+          <p:nvPr/>
+        </p:nvSpPr>
+        <p:spPr>
+          <a:xfrm>
+            <a:off x="1851376" y="2979178"/>
+            <a:ext cx="9492827" cy="738664"/>
+          </a:xfrm>
+          <a:prstGeom prst="rect">
+            <a:avLst/>
+          </a:prstGeom>
+          <a:noFill/>
+        </p:spPr>
+        <p:txBody>
+          <a:bodyPr wrap="square" lIns="36576" tIns="0" rIns="36576" bIns="0" anchor="t">
+            <a:spAutoFit/>
+          </a:bodyPr>
+          <a:lstStyle/>
+          <a:p>
+            <a:pPr algn="l">
+              <a:spcAft>
+                <a:spcPts val="400"/>
+              </a:spcAft>
+            </a:pPr>
+            <a:r>
+              <a:rPr lang="en-US" sz="2400" b="0" dirty="0">
+                <a:solidFill>
+                  <a:srgbClr val="0F2343"/>
+                </a:solidFill>
+                <a:latin typeface="Aptos"/>
+              </a:rPr>
+              <a:t>Software</a:t>
+            </a:r>
+            <a:r>
+              <a:rPr sz="2400" b="0" dirty="0">
+                <a:solidFill>
+                  <a:srgbClr val="0F2343"/>
+                </a:solidFill>
+                <a:latin typeface="Aptos"/>
+              </a:rPr>
+              <a:t> need </a:t>
+            </a:r>
+            <a:r>
+              <a:rPr lang="en-US" sz="2400" b="0" dirty="0">
+                <a:solidFill>
+                  <a:srgbClr val="0F2343"/>
+                </a:solidFill>
+                <a:latin typeface="Aptos"/>
+              </a:rPr>
+              <a:t>proper </a:t>
+            </a:r>
+            <a:r>
+              <a:rPr sz="2400" b="0" dirty="0">
+                <a:solidFill>
+                  <a:srgbClr val="0F2343"/>
+                </a:solidFill>
+                <a:latin typeface="Aptos"/>
+              </a:rPr>
+              <a:t>engineering practices</a:t>
+            </a:r>
+            <a:r>
+              <a:rPr lang="en-US" sz="2400" b="0" dirty="0">
+                <a:solidFill>
+                  <a:srgbClr val="0F2343"/>
+                </a:solidFill>
+                <a:latin typeface="Aptos"/>
+              </a:rPr>
+              <a:t> to unlock its full business value.</a:t>
+            </a:r>
+            <a:endParaRPr sz="2400" b="0" dirty="0">
+              <a:solidFill>
+                <a:srgbClr val="0F2343"/>
+              </a:solidFill>
+              <a:latin typeface="Aptos"/>
+            </a:endParaRPr>
+          </a:p>
+        </p:txBody>
+      </p:sp>
+      <p:sp>
+        <p:nvSpPr>
+          <p:cNvPr id="11" name="TextBox 10"/>
+          <p:cNvSpPr txBox="1"/>
+          <p:nvPr/>
+        </p:nvSpPr>
+        <p:spPr>
+          <a:xfrm>
+            <a:off x="1851376" y="4298576"/>
+            <a:ext cx="9492827" cy="738664"/>
+          </a:xfrm>
+          <a:prstGeom prst="rect">
+            <a:avLst/>
+          </a:prstGeom>
+          <a:noFill/>
+        </p:spPr>
+        <p:txBody>
+          <a:bodyPr wrap="square" lIns="36576" tIns="0" rIns="36576" bIns="0" anchor="t">
+            <a:spAutoFit/>
+          </a:bodyPr>
+          <a:lstStyle/>
+          <a:p>
+            <a:pPr algn="l">
+              <a:spcAft>
+                <a:spcPts val="400"/>
+              </a:spcAft>
+            </a:pPr>
+            <a:r>
+              <a:rPr sz="2400" b="0" dirty="0">
+                <a:solidFill>
+                  <a:srgbClr val="0F2343"/>
+                </a:solidFill>
+                <a:latin typeface="Aptos"/>
+              </a:rPr>
+              <a:t>The OR team has to own the </a:t>
+            </a:r>
+            <a:r>
+              <a:rPr lang="en-US" sz="2400" b="0" dirty="0">
+                <a:solidFill>
+                  <a:srgbClr val="0F2343"/>
+                </a:solidFill>
+                <a:latin typeface="Aptos"/>
+              </a:rPr>
+              <a:t>lifecycle of the </a:t>
+            </a:r>
+            <a:r>
+              <a:rPr sz="2400" b="0" dirty="0">
+                <a:solidFill>
+                  <a:srgbClr val="0F2343"/>
+                </a:solidFill>
+                <a:latin typeface="Aptos"/>
+              </a:rPr>
+              <a:t>product, </a:t>
+            </a:r>
+            <a:r>
+              <a:rPr lang="en-US" sz="2400" dirty="0">
+                <a:solidFill>
+                  <a:srgbClr val="0F2343"/>
+                </a:solidFill>
+                <a:latin typeface="Aptos"/>
+              </a:rPr>
+              <a:t>with its specific software &amp; scientific needs.</a:t>
+            </a:r>
+            <a:endParaRPr sz="2400" b="0" dirty="0">
+              <a:solidFill>
+                <a:srgbClr val="0F2343"/>
+              </a:solidFill>
+              <a:latin typeface="Aptos"/>
+            </a:endParaRPr>
+          </a:p>
+        </p:txBody>
+      </p:sp>
+      <p:sp>
+        <p:nvSpPr>
+          <p:cNvPr id="14" name="TextBox 13"/>
+          <p:cNvSpPr txBox="1"/>
+          <p:nvPr/>
+        </p:nvSpPr>
+        <p:spPr>
+          <a:xfrm>
+            <a:off x="1851376" y="5579441"/>
+            <a:ext cx="9956802" cy="369332"/>
+          </a:xfrm>
+          <a:prstGeom prst="rect">
+            <a:avLst/>
+          </a:prstGeom>
+          <a:noFill/>
+        </p:spPr>
+        <p:txBody>
+          <a:bodyPr wrap="square" lIns="36576" tIns="0" rIns="36576" bIns="0" anchor="t">
+            <a:spAutoFit/>
+          </a:bodyPr>
+          <a:lstStyle/>
+          <a:p>
+            <a:pPr algn="l">
+              <a:spcAft>
+                <a:spcPts val="400"/>
+              </a:spcAft>
+            </a:pPr>
+            <a:r>
+              <a:rPr lang="en-US" sz="2400" b="0" dirty="0">
+                <a:solidFill>
+                  <a:srgbClr val="0F2343"/>
+                </a:solidFill>
+                <a:latin typeface="Aptos"/>
+              </a:rPr>
+              <a:t>AI-coding assistants need proper engineering first to unlock full potential.  </a:t>
+            </a:r>
+            <a:endParaRPr sz="2400" b="0" dirty="0">
+              <a:solidFill>
+                <a:srgbClr val="0F2343"/>
+              </a:solidFill>
+              <a:latin typeface="Aptos"/>
+            </a:endParaRPr>
+          </a:p>
+        </p:txBody>
+      </p:sp>
+      <p:sp>
+        <p:nvSpPr>
+          <p:cNvPr id="23" name="Oval 22">
+            <a:extLst>
+              <a:ext uri="{FF2B5EF4-FFF2-40B4-BE49-F238E27FC236}">
+                <a16:creationId xmlns:a16="http://schemas.microsoft.com/office/drawing/2014/main" id="{0FC1515D-B1D5-E84F-931F-45C879B1F17C}"/>
+              </a:ext>
+            </a:extLst>
+          </p:cNvPr>
+          <p:cNvSpPr/>
+          <p:nvPr/>
+        </p:nvSpPr>
+        <p:spPr>
+          <a:xfrm>
+            <a:off x="463974" y="2786947"/>
+            <a:ext cx="830862" cy="830862"/>
+          </a:xfrm>
+          <a:prstGeom prst="ellipse">
+            <a:avLst/>
+          </a:prstGeom>
+          <a:solidFill>
+            <a:srgbClr val="0F2343"/>
+          </a:solidFill>
+          <a:ln>
+            <a:noFill/>
+          </a:ln>
+          <a:effectLst/>
+        </p:spPr>
+        <p:style>
+          <a:lnRef idx="1">
+            <a:schemeClr val="accent1"/>
+          </a:lnRef>
+          <a:fillRef idx="3">
+            <a:schemeClr val="accent1"/>
+          </a:fillRef>
+          <a:effectRef idx="2">
+            <a:schemeClr val="accent1"/>
+          </a:effectRef>
+          <a:fontRef idx="minor">
+            <a:schemeClr val="lt1"/>
+          </a:fontRef>
+        </p:style>
+        <p:txBody>
+          <a:bodyPr rtlCol="0" anchor="ctr"/>
+          <a:lstStyle/>
+          <a:p>
+            <a:pPr algn="ctr"/>
+            <a:r>
+              <a:rPr lang="en-US" sz="2800" b="1" dirty="0">
+                <a:latin typeface="Aptos" panose="020B0004020202020204" pitchFamily="34" charset="0"/>
+              </a:rPr>
+              <a:t>2</a:t>
+            </a:r>
+            <a:endParaRPr sz="2800" b="1" dirty="0">
+              <a:latin typeface="Aptos" panose="020B0004020202020204" pitchFamily="34" charset="0"/>
+            </a:endParaRPr>
+          </a:p>
+        </p:txBody>
+      </p:sp>
+      <p:sp>
+        <p:nvSpPr>
+          <p:cNvPr id="24" name="Oval 23">
+            <a:extLst>
+              <a:ext uri="{FF2B5EF4-FFF2-40B4-BE49-F238E27FC236}">
+                <a16:creationId xmlns:a16="http://schemas.microsoft.com/office/drawing/2014/main" id="{D71F4C30-3CEC-098D-0118-C753D52B3A2F}"/>
+              </a:ext>
+            </a:extLst>
+          </p:cNvPr>
+          <p:cNvSpPr/>
+          <p:nvPr/>
+        </p:nvSpPr>
+        <p:spPr>
+          <a:xfrm>
+            <a:off x="463974" y="4067811"/>
+            <a:ext cx="830862" cy="830862"/>
+          </a:xfrm>
+          <a:prstGeom prst="ellipse">
+            <a:avLst/>
+          </a:prstGeom>
+          <a:solidFill>
+            <a:srgbClr val="0F2343"/>
+          </a:solidFill>
+          <a:ln>
+            <a:noFill/>
+          </a:ln>
+          <a:effectLst/>
+        </p:spPr>
+        <p:style>
+          <a:lnRef idx="1">
+            <a:schemeClr val="accent1"/>
+          </a:lnRef>
+          <a:fillRef idx="3">
+            <a:schemeClr val="accent1"/>
+          </a:fillRef>
+          <a:effectRef idx="2">
+            <a:schemeClr val="accent1"/>
+          </a:effectRef>
+          <a:fontRef idx="minor">
+            <a:schemeClr val="lt1"/>
+          </a:fontRef>
+        </p:style>
+        <p:txBody>
+          <a:bodyPr rtlCol="0" anchor="ctr"/>
+          <a:lstStyle/>
+          <a:p>
+            <a:pPr algn="ctr"/>
+            <a:r>
+              <a:rPr lang="en-US" sz="2800" b="1" dirty="0">
+                <a:latin typeface="Aptos" panose="020B0004020202020204" pitchFamily="34" charset="0"/>
+              </a:rPr>
+              <a:t>3</a:t>
+            </a:r>
+            <a:endParaRPr sz="2800" b="1" dirty="0">
+              <a:latin typeface="Aptos" panose="020B0004020202020204" pitchFamily="34" charset="0"/>
+            </a:endParaRPr>
+          </a:p>
+        </p:txBody>
+      </p:sp>
+      <p:sp>
+        <p:nvSpPr>
+          <p:cNvPr id="25" name="Oval 24">
+            <a:extLst>
+              <a:ext uri="{FF2B5EF4-FFF2-40B4-BE49-F238E27FC236}">
+                <a16:creationId xmlns:a16="http://schemas.microsoft.com/office/drawing/2014/main" id="{021650A3-6C64-0309-0E3B-F77325B3F440}"/>
+              </a:ext>
+            </a:extLst>
+          </p:cNvPr>
+          <p:cNvSpPr/>
+          <p:nvPr/>
+        </p:nvSpPr>
+        <p:spPr>
+          <a:xfrm>
+            <a:off x="463974" y="5348676"/>
+            <a:ext cx="830862" cy="830862"/>
+          </a:xfrm>
+          <a:prstGeom prst="ellipse">
+            <a:avLst/>
+          </a:prstGeom>
+          <a:solidFill>
+            <a:srgbClr val="0F2343"/>
+          </a:solidFill>
+          <a:ln>
+            <a:noFill/>
+          </a:ln>
+          <a:effectLst/>
+        </p:spPr>
+        <p:style>
+          <a:lnRef idx="1">
+            <a:schemeClr val="accent1"/>
+          </a:lnRef>
+          <a:fillRef idx="3">
+            <a:schemeClr val="accent1"/>
+          </a:fillRef>
+          <a:effectRef idx="2">
+            <a:schemeClr val="accent1"/>
+          </a:effectRef>
+          <a:fontRef idx="minor">
+            <a:schemeClr val="lt1"/>
+          </a:fontRef>
+        </p:style>
+        <p:txBody>
+          <a:bodyPr rtlCol="0" anchor="ctr"/>
+          <a:lstStyle/>
+          <a:p>
+            <a:pPr algn="ctr"/>
+            <a:r>
+              <a:rPr lang="en-US" sz="2800" b="1" dirty="0">
+                <a:latin typeface="Aptos" panose="020B0004020202020204" pitchFamily="34" charset="0"/>
+              </a:rPr>
+              <a:t>4</a:t>
+            </a:r>
+            <a:endParaRPr sz="2800" b="1" dirty="0">
+              <a:latin typeface="Aptos" panose="020B0004020202020204" pitchFamily="34" charset="0"/>
             </a:endParaRPr>
           </a:p>
         </p:txBody>
@@ -4474,8 +6054,8 @@
         </p:nvSpPr>
         <p:spPr>
           <a:xfrm>
-            <a:off x="365760" y="1683512"/>
-            <a:ext cx="11440160" cy="1107996"/>
+            <a:off x="365760" y="1488862"/>
+            <a:ext cx="11567160" cy="1248290"/>
           </a:xfrm>
           <a:prstGeom prst="rect">
             <a:avLst/>
@@ -4493,7 +6073,7 @@
               <a:buChar char="•"/>
             </a:pPr>
             <a:r>
-              <a:rPr lang="en-US" sz="2400" dirty="0">
+              <a:rPr sz="2400" b="0" dirty="0">
                 <a:solidFill>
                   <a:srgbClr val="0F2343"/>
                 </a:solidFill>
@@ -4502,7 +6082,7 @@
               <a:t>Operations Research (OR) turns data + business needs + mathematics </a:t>
             </a:r>
             <a:r>
-              <a:rPr lang="en-US" sz="2400" dirty="0">
+              <a:rPr lang="en-US" sz="2400" b="0" dirty="0">
                 <a:solidFill>
                   <a:srgbClr val="0F2343"/>
                 </a:solidFill>
@@ -4512,70 +6092,181 @@
               <a:t> </a:t>
             </a:r>
             <a:r>
-              <a:rPr lang="en-US" sz="2400" b="1" dirty="0">
+              <a:rPr sz="2400" b="0" dirty="0">
                 <a:solidFill>
                   <a:srgbClr val="0F2343"/>
                 </a:solidFill>
                 <a:latin typeface="Aptos"/>
-                <a:sym typeface="Wingdings" panose="05000000000000000000" pitchFamily="2" charset="2"/>
-              </a:rPr>
-              <a:t>decision</a:t>
-            </a:r>
-          </a:p>
-          <a:p>
-            <a:pPr marL="285750" indent="-285750" algn="l">
-              <a:buFont typeface="Arial" panose="020B0604020202020204" pitchFamily="34" charset="0"/>
-              <a:buChar char="•"/>
+              </a:rPr>
+              <a:t>decision.</a:t>
+            </a:r>
+          </a:p>
+          <a:p>
+            <a:pPr algn="l">
+              <a:lnSpc>
+                <a:spcPct val="150000"/>
+              </a:lnSpc>
             </a:pPr>
-            <a:endParaRPr lang="en-US" sz="2400" b="1" dirty="0">
-              <a:solidFill>
-                <a:srgbClr val="0F2343"/>
-              </a:solidFill>
-              <a:latin typeface="Aptos"/>
-              <a:sym typeface="Wingdings" panose="05000000000000000000" pitchFamily="2" charset="2"/>
-            </a:endParaRPr>
-          </a:p>
-          <a:p>
-            <a:pPr marL="285750" indent="-285750" algn="l">
-              <a:buFont typeface="Arial" panose="020B0604020202020204" pitchFamily="34" charset="0"/>
-              <a:buChar char="•"/>
+            <a:r>
+              <a:rPr lang="en-US" sz="2000" b="1" dirty="0">
+                <a:solidFill>
+                  <a:srgbClr val="0F2343"/>
+                </a:solidFill>
+                <a:latin typeface="Aptos"/>
+              </a:rPr>
+              <a:t>	</a:t>
+            </a:r>
+            <a:r>
+              <a:rPr sz="2000" dirty="0">
+                <a:solidFill>
+                  <a:srgbClr val="0F2343"/>
+                </a:solidFill>
+                <a:latin typeface="Aptos"/>
+              </a:rPr>
+              <a:t>A </a:t>
+            </a:r>
+            <a:r>
+              <a:rPr sz="2000" b="1" dirty="0">
+                <a:solidFill>
+                  <a:srgbClr val="0F2343"/>
+                </a:solidFill>
+                <a:latin typeface="Aptos"/>
+              </a:rPr>
+              <a:t>project</a:t>
+            </a:r>
+            <a:r>
+              <a:rPr sz="2000" b="0" dirty="0">
+                <a:solidFill>
+                  <a:srgbClr val="0F2343"/>
+                </a:solidFill>
+                <a:latin typeface="Aptos"/>
+              </a:rPr>
+              <a:t> </a:t>
+            </a:r>
+            <a:r>
+              <a:rPr lang="en-US" sz="2000" b="0" dirty="0">
+                <a:solidFill>
+                  <a:srgbClr val="0F2343"/>
+                </a:solidFill>
+                <a:latin typeface="Aptos"/>
+              </a:rPr>
+              <a:t>delivers</a:t>
+            </a:r>
+            <a:r>
+              <a:rPr sz="2000" b="0" dirty="0">
+                <a:solidFill>
+                  <a:srgbClr val="0F2343"/>
+                </a:solidFill>
+                <a:latin typeface="Aptos"/>
+              </a:rPr>
+              <a:t> a one-time decision</a:t>
+            </a:r>
+            <a:r>
+              <a:rPr lang="en-US" sz="2000" dirty="0">
+                <a:solidFill>
+                  <a:srgbClr val="0F2343"/>
+                </a:solidFill>
+                <a:latin typeface="Aptos"/>
+              </a:rPr>
+              <a:t>.</a:t>
+            </a:r>
+          </a:p>
+          <a:p>
+            <a:pPr algn="l">
+              <a:lnSpc>
+                <a:spcPct val="150000"/>
+              </a:lnSpc>
             </a:pPr>
             <a:r>
-              <a:rPr lang="en-US" sz="2400" dirty="0">
+              <a:rPr lang="en-US" sz="2000" b="1" dirty="0">
                 <a:solidFill>
                   <a:srgbClr val="0F2343"/>
                 </a:solidFill>
                 <a:latin typeface="Aptos"/>
-                <a:sym typeface="Wingdings" panose="05000000000000000000" pitchFamily="2" charset="2"/>
-              </a:rPr>
-              <a:t>If the decision is required </a:t>
-            </a:r>
-            <a:r>
-              <a:rPr lang="en-US" sz="2400" u="sng" dirty="0">
+              </a:rPr>
+              <a:t>	</a:t>
+            </a:r>
+            <a:r>
+              <a:rPr sz="2000" dirty="0">
                 <a:solidFill>
                   <a:srgbClr val="0F2343"/>
                 </a:solidFill>
                 <a:latin typeface="Aptos"/>
-                <a:sym typeface="Wingdings" panose="05000000000000000000" pitchFamily="2" charset="2"/>
-              </a:rPr>
-              <a:t>recurrently</a:t>
-            </a:r>
-            <a:r>
-              <a:rPr lang="en-US" sz="2400" dirty="0">
+              </a:rPr>
+              <a:t>A </a:t>
+            </a:r>
+            <a:r>
+              <a:rPr sz="2000" b="1" dirty="0">
                 <a:solidFill>
                   <a:srgbClr val="0F2343"/>
                 </a:solidFill>
                 <a:latin typeface="Aptos"/>
-                <a:sym typeface="Wingdings" panose="05000000000000000000" pitchFamily="2" charset="2"/>
-              </a:rPr>
-              <a:t>:</a:t>
-            </a:r>
-            <a:endParaRPr sz="2400" dirty="0">
-              <a:solidFill>
-                <a:srgbClr val="0F2343"/>
-              </a:solidFill>
-              <a:latin typeface="Aptos"/>
-            </a:endParaRPr>
+              </a:rPr>
+              <a:t>product</a:t>
+            </a:r>
+            <a:r>
+              <a:rPr sz="2000" b="0" dirty="0">
+                <a:solidFill>
+                  <a:srgbClr val="0F2343"/>
+                </a:solidFill>
+                <a:latin typeface="Aptos"/>
+              </a:rPr>
+              <a:t> </a:t>
+            </a:r>
+            <a:r>
+              <a:rPr lang="en-US" sz="2000" b="0" dirty="0">
+                <a:solidFill>
+                  <a:srgbClr val="0F2343"/>
+                </a:solidFill>
+                <a:latin typeface="Aptos"/>
+              </a:rPr>
+              <a:t>delivers a recurring decision (</a:t>
+            </a:r>
+            <a:r>
+              <a:rPr sz="2000" b="0" dirty="0">
+                <a:solidFill>
+                  <a:srgbClr val="0F2343"/>
+                </a:solidFill>
+                <a:latin typeface="Aptos"/>
+              </a:rPr>
+              <a:t>and someone </a:t>
+            </a:r>
+            <a:r>
+              <a:rPr lang="en-US" sz="2000" b="0" dirty="0">
+                <a:solidFill>
+                  <a:srgbClr val="0F2343"/>
+                </a:solidFill>
+                <a:latin typeface="Aptos"/>
+              </a:rPr>
+              <a:t>must</a:t>
+            </a:r>
+            <a:r>
+              <a:rPr sz="2000" b="0" dirty="0">
+                <a:solidFill>
+                  <a:srgbClr val="0F2343"/>
+                </a:solidFill>
+                <a:latin typeface="Aptos"/>
+              </a:rPr>
+              <a:t> own it</a:t>
+            </a:r>
+            <a:r>
+              <a:rPr lang="en-US" sz="2000" b="0" dirty="0">
+                <a:solidFill>
+                  <a:srgbClr val="0F2343"/>
+                </a:solidFill>
+                <a:latin typeface="Aptos"/>
+              </a:rPr>
+              <a:t>)</a:t>
+            </a:r>
+            <a:r>
+              <a:rPr lang="en-US" sz="2000" dirty="0">
+                <a:solidFill>
+                  <a:srgbClr val="0F2343"/>
+                </a:solidFill>
+                <a:latin typeface="Aptos"/>
+              </a:rPr>
+              <a:t>.</a:t>
+            </a:r>
           </a:p>
         </p:txBody>
       </p:sp>
@@ -4585,42 +6276,6 @@
             <a:extLst>
               <a:ext uri="{FF2B5EF4-FFF2-40B4-BE49-F238E27FC236}">
                 <a16:creationId xmlns:a16="http://schemas.microsoft.com/office/drawing/2014/main" id="{346383ED-F08C-CE59-A228-D3E3CF1C5A4A}"/>
-              </a:ext>
-            </a:extLst>
-          </p:cNvPr>
-          <p:cNvPicPr>
-            <a:picLocks noChangeAspect="1"/>
-          </p:cNvPicPr>
-          <p:nvPr/>
-        </p:nvPicPr>
-        <p:blipFill>
-          <a:blip>
-            <a:extLst>
-              <a:ext uri="{96DAC541-7B7A-43D3-8B79-37D633B846F1}">
-                <asvg:svgBlip xmlns:asvg="http://schemas.microsoft.com/office/drawing/2016/SVG/main" r:embed="rId2"/>
-              </a:ext>
-            </a:extLst>
-          </a:blip>
-          <a:stretch>
-            <a:fillRect/>
-          </a:stretch>
-        </p:blipFill>
-        <p:spPr>
-          <a:xfrm>
-            <a:off x="1014984" y="2877502"/>
-            <a:ext cx="640080" cy="640080"/>
-          </a:xfrm>
-          <a:prstGeom prst="rect">
-            <a:avLst/>
-          </a:prstGeom>
-        </p:spPr>
-      </p:pic>
-      <p:pic>
-        <p:nvPicPr>
-          <p:cNvPr id="25" name="Graphic 24" descr="Pilot male with solid fill">
-            <a:extLst>
-              <a:ext uri="{FF2B5EF4-FFF2-40B4-BE49-F238E27FC236}">
-                <a16:creationId xmlns:a16="http://schemas.microsoft.com/office/drawing/2014/main" id="{808A3FA4-B9B9-3C55-0FB2-0794A6F436BD}"/>
               </a:ext>
             </a:extLst>
           </p:cNvPr>
@@ -4643,7 +6298,7 @@
         </p:blipFill>
         <p:spPr>
           <a:xfrm>
-            <a:off x="1014984" y="3517626"/>
+            <a:off x="903224" y="3636362"/>
             <a:ext cx="640080" cy="640080"/>
           </a:xfrm>
           <a:prstGeom prst="rect">
@@ -4651,115 +6306,12 @@
           </a:prstGeom>
         </p:spPr>
       </p:pic>
-      <p:sp>
-        <p:nvSpPr>
-          <p:cNvPr id="27" name="TextBox 26">
+      <p:pic>
+        <p:nvPicPr>
+          <p:cNvPr id="25" name="Graphic 24" descr="Pilot male with solid fill">
             <a:extLst>
               <a:ext uri="{FF2B5EF4-FFF2-40B4-BE49-F238E27FC236}">
-                <a16:creationId xmlns:a16="http://schemas.microsoft.com/office/drawing/2014/main" id="{F4779463-3AE0-4406-F6DC-6C888E644398}"/>
-              </a:ext>
-            </a:extLst>
-          </p:cNvPr>
-          <p:cNvSpPr txBox="1"/>
-          <p:nvPr/>
-        </p:nvSpPr>
-        <p:spPr>
-          <a:xfrm>
-            <a:off x="1664209" y="3078329"/>
-            <a:ext cx="4777231" cy="1538883"/>
-          </a:xfrm>
-          <a:prstGeom prst="rect">
-            <a:avLst/>
-          </a:prstGeom>
-          <a:noFill/>
-        </p:spPr>
-        <p:txBody>
-          <a:bodyPr wrap="square" tIns="0" rIns="45720" bIns="0">
-            <a:spAutoFit/>
-          </a:bodyPr>
-          <a:lstStyle/>
-          <a:p>
-            <a:pPr algn="l"/>
-            <a:r>
-              <a:rPr lang="en-US" sz="2000" dirty="0">
-                <a:solidFill>
-                  <a:srgbClr val="0F2343"/>
-                </a:solidFill>
-                <a:latin typeface="Aptos"/>
-              </a:rPr>
-              <a:t>Plan the annual fleet composition</a:t>
-            </a:r>
-            <a:endParaRPr lang="en-US" sz="2000" b="1" dirty="0">
-              <a:solidFill>
-                <a:srgbClr val="0F2343"/>
-              </a:solidFill>
-              <a:latin typeface="Aptos"/>
-              <a:sym typeface="Wingdings" panose="05000000000000000000" pitchFamily="2" charset="2"/>
-            </a:endParaRPr>
-          </a:p>
-          <a:p>
-            <a:pPr marL="285750" indent="-285750" algn="l">
-              <a:buFont typeface="Arial" panose="020B0604020202020204" pitchFamily="34" charset="0"/>
-              <a:buChar char="•"/>
-            </a:pPr>
-            <a:endParaRPr lang="en-US" sz="2000" b="1" dirty="0">
-              <a:solidFill>
-                <a:srgbClr val="0F2343"/>
-              </a:solidFill>
-              <a:latin typeface="Aptos"/>
-              <a:sym typeface="Wingdings" panose="05000000000000000000" pitchFamily="2" charset="2"/>
-            </a:endParaRPr>
-          </a:p>
-          <a:p>
-            <a:pPr algn="l"/>
-            <a:r>
-              <a:rPr lang="en-US" sz="2000" dirty="0">
-                <a:solidFill>
-                  <a:srgbClr val="0F2343"/>
-                </a:solidFill>
-                <a:latin typeface="Aptos"/>
-                <a:sym typeface="Wingdings" panose="05000000000000000000" pitchFamily="2" charset="2"/>
-              </a:rPr>
-              <a:t>Generate the monthly crew schedules</a:t>
-            </a:r>
-          </a:p>
-          <a:p>
-            <a:pPr algn="l"/>
-            <a:endParaRPr lang="en-US" sz="2000" dirty="0">
-              <a:solidFill>
-                <a:srgbClr val="0F2343"/>
-              </a:solidFill>
-              <a:latin typeface="Aptos"/>
-              <a:sym typeface="Wingdings" panose="05000000000000000000" pitchFamily="2" charset="2"/>
-            </a:endParaRPr>
-          </a:p>
-          <a:p>
-            <a:pPr algn="l"/>
-            <a:r>
-              <a:rPr lang="en-US" sz="2000" dirty="0">
-                <a:solidFill>
-                  <a:srgbClr val="0F2343"/>
-                </a:solidFill>
-                <a:latin typeface="Aptos"/>
-                <a:sym typeface="Wingdings" panose="05000000000000000000" pitchFamily="2" charset="2"/>
-              </a:rPr>
-              <a:t>Recover from irregular operations</a:t>
-            </a:r>
-            <a:endParaRPr sz="2000" dirty="0">
-              <a:solidFill>
-                <a:srgbClr val="0F2343"/>
-              </a:solidFill>
-              <a:latin typeface="Aptos"/>
-            </a:endParaRPr>
-          </a:p>
-        </p:txBody>
-      </p:sp>
-      <p:pic>
-        <p:nvPicPr>
-          <p:cNvPr id="29" name="Graphic 28" descr="Lightning with solid fill">
-            <a:extLst>
-              <a:ext uri="{FF2B5EF4-FFF2-40B4-BE49-F238E27FC236}">
-                <a16:creationId xmlns:a16="http://schemas.microsoft.com/office/drawing/2014/main" id="{D5FB4D47-9306-5EAE-D4F1-AA8CA553A44C}"/>
+                <a16:creationId xmlns:a16="http://schemas.microsoft.com/office/drawing/2014/main" id="{808A3FA4-B9B9-3C55-0FB2-0794A6F436BD}"/>
               </a:ext>
             </a:extLst>
           </p:cNvPr>
@@ -4782,7 +6334,146 @@
         </p:blipFill>
         <p:spPr>
           <a:xfrm>
-            <a:off x="1014984" y="4157750"/>
+            <a:off x="903224" y="4276486"/>
+            <a:ext cx="640080" cy="640080"/>
+          </a:xfrm>
+          <a:prstGeom prst="rect">
+            <a:avLst/>
+          </a:prstGeom>
+        </p:spPr>
+      </p:pic>
+      <p:sp>
+        <p:nvSpPr>
+          <p:cNvPr id="27" name="TextBox 26">
+            <a:extLst>
+              <a:ext uri="{FF2B5EF4-FFF2-40B4-BE49-F238E27FC236}">
+                <a16:creationId xmlns:a16="http://schemas.microsoft.com/office/drawing/2014/main" id="{F4779463-3AE0-4406-F6DC-6C888E644398}"/>
+              </a:ext>
+            </a:extLst>
+          </p:cNvPr>
+          <p:cNvSpPr txBox="1"/>
+          <p:nvPr/>
+        </p:nvSpPr>
+        <p:spPr>
+          <a:xfrm>
+            <a:off x="1552449" y="3837189"/>
+            <a:ext cx="4777231" cy="1538883"/>
+          </a:xfrm>
+          <a:prstGeom prst="rect">
+            <a:avLst/>
+          </a:prstGeom>
+          <a:noFill/>
+        </p:spPr>
+        <p:txBody>
+          <a:bodyPr wrap="square" tIns="0" rIns="45720" bIns="0">
+            <a:spAutoFit/>
+          </a:bodyPr>
+          <a:lstStyle/>
+          <a:p>
+            <a:pPr algn="l"/>
+            <a:r>
+              <a:rPr lang="en-US" sz="2000" dirty="0">
+                <a:solidFill>
+                  <a:srgbClr val="0F2343"/>
+                </a:solidFill>
+                <a:latin typeface="Aptos"/>
+              </a:rPr>
+              <a:t>Plan the annual fleet composition</a:t>
+            </a:r>
+            <a:endParaRPr lang="en-US" sz="2000" b="1" dirty="0">
+              <a:solidFill>
+                <a:srgbClr val="0F2343"/>
+              </a:solidFill>
+              <a:latin typeface="Aptos"/>
+              <a:sym typeface="Wingdings" panose="05000000000000000000" pitchFamily="2" charset="2"/>
+            </a:endParaRPr>
+          </a:p>
+          <a:p>
+            <a:pPr marL="285750" indent="-285750" algn="l">
+              <a:buFont typeface="Arial" panose="020B0604020202020204" pitchFamily="34" charset="0"/>
+              <a:buChar char="•"/>
+            </a:pPr>
+            <a:endParaRPr lang="en-US" sz="2000" b="1" dirty="0">
+              <a:solidFill>
+                <a:srgbClr val="0F2343"/>
+              </a:solidFill>
+              <a:latin typeface="Aptos"/>
+              <a:sym typeface="Wingdings" panose="05000000000000000000" pitchFamily="2" charset="2"/>
+            </a:endParaRPr>
+          </a:p>
+          <a:p>
+            <a:pPr algn="l"/>
+            <a:r>
+              <a:rPr lang="en-US" sz="2000" dirty="0">
+                <a:solidFill>
+                  <a:srgbClr val="0F2343"/>
+                </a:solidFill>
+                <a:latin typeface="Aptos"/>
+                <a:sym typeface="Wingdings" panose="05000000000000000000" pitchFamily="2" charset="2"/>
+              </a:rPr>
+              <a:t>Generate the monthly crew schedules</a:t>
+            </a:r>
+          </a:p>
+          <a:p>
+            <a:pPr algn="l"/>
+            <a:endParaRPr lang="en-US" sz="2000" dirty="0">
+              <a:solidFill>
+                <a:srgbClr val="0F2343"/>
+              </a:solidFill>
+              <a:latin typeface="Aptos"/>
+              <a:sym typeface="Wingdings" panose="05000000000000000000" pitchFamily="2" charset="2"/>
+            </a:endParaRPr>
+          </a:p>
+          <a:p>
+            <a:pPr algn="l"/>
+            <a:r>
+              <a:rPr lang="en-US" sz="2000" dirty="0">
+                <a:solidFill>
+                  <a:srgbClr val="0F2343"/>
+                </a:solidFill>
+                <a:latin typeface="Aptos"/>
+                <a:sym typeface="Wingdings" panose="05000000000000000000" pitchFamily="2" charset="2"/>
+              </a:rPr>
+              <a:t>Recover from irregular operations</a:t>
+            </a:r>
+            <a:endParaRPr sz="2000" dirty="0">
+              <a:solidFill>
+                <a:srgbClr val="0F2343"/>
+              </a:solidFill>
+              <a:latin typeface="Aptos"/>
+            </a:endParaRPr>
+          </a:p>
+        </p:txBody>
+      </p:sp>
+      <p:pic>
+        <p:nvPicPr>
+          <p:cNvPr id="29" name="Graphic 28" descr="Lightning with solid fill">
+            <a:extLst>
+              <a:ext uri="{FF2B5EF4-FFF2-40B4-BE49-F238E27FC236}">
+                <a16:creationId xmlns:a16="http://schemas.microsoft.com/office/drawing/2014/main" id="{D5FB4D47-9306-5EAE-D4F1-AA8CA553A44C}"/>
+              </a:ext>
+            </a:extLst>
+          </p:cNvPr>
+          <p:cNvPicPr>
+            <a:picLocks noChangeAspect="1"/>
+          </p:cNvPicPr>
+          <p:nvPr/>
+        </p:nvPicPr>
+        <p:blipFill>
+          <a:blip>
+            <a:extLst>
+              <a:ext uri="{96DAC541-7B7A-43D3-8B79-37D633B846F1}">
+                <asvg:svgBlip xmlns:asvg="http://schemas.microsoft.com/office/drawing/2016/SVG/main" r:embed="rId5"/>
+              </a:ext>
+            </a:extLst>
+          </a:blip>
+          <a:stretch>
+            <a:fillRect/>
+          </a:stretch>
+        </p:blipFill>
+        <p:spPr>
+          <a:xfrm>
+            <a:off x="903224" y="4916610"/>
             <a:ext cx="640080" cy="640080"/>
           </a:xfrm>
           <a:prstGeom prst="rect">
@@ -4804,8 +6495,8 @@
         </p:nvSpPr>
         <p:spPr>
           <a:xfrm>
-            <a:off x="7282689" y="3109606"/>
-            <a:ext cx="3720591" cy="1354217"/>
+            <a:off x="7059719" y="4242583"/>
+            <a:ext cx="4677663" cy="707886"/>
           </a:xfrm>
           <a:prstGeom prst="rect">
             <a:avLst/>
@@ -4820,13 +6511,61 @@
           <a:p>
             <a:pPr algn="ctr"/>
             <a:r>
-              <a:rPr lang="en-US" sz="2000" dirty="0">
+              <a:rPr lang="en-US" sz="2200" b="1" dirty="0">
                 <a:solidFill>
                   <a:srgbClr val="0F2343"/>
                 </a:solidFill>
                 <a:latin typeface="Aptos"/>
               </a:rPr>
-              <a:t>The OR solution becomes a software product, particularly, a </a:t>
+              <a:t>These</a:t>
+            </a:r>
+            <a:r>
+              <a:rPr sz="2200" b="1" dirty="0">
+                <a:solidFill>
+                  <a:srgbClr val="0F2343"/>
+                </a:solidFill>
+                <a:latin typeface="Aptos"/>
+              </a:rPr>
+              <a:t> product</a:t>
+            </a:r>
+            <a:r>
+              <a:rPr lang="en-US" sz="2200" b="1" dirty="0">
+                <a:solidFill>
+                  <a:srgbClr val="0F2343"/>
+                </a:solidFill>
+                <a:latin typeface="Aptos"/>
+              </a:rPr>
+              <a:t>s</a:t>
+            </a:r>
+            <a:r>
+              <a:rPr sz="2200" b="1" dirty="0">
+                <a:solidFill>
+                  <a:srgbClr val="0F2343"/>
+                </a:solidFill>
+                <a:latin typeface="Aptos"/>
+              </a:rPr>
+              <a:t> </a:t>
+            </a:r>
+            <a:r>
+              <a:rPr lang="en-US" sz="2200" b="1" dirty="0">
+                <a:solidFill>
+                  <a:srgbClr val="0F2343"/>
+                </a:solidFill>
+                <a:latin typeface="Aptos"/>
+              </a:rPr>
+              <a:t>are also known as</a:t>
+            </a:r>
+          </a:p>
+          <a:p>
+            <a:pPr algn="ctr"/>
+            <a:r>
+              <a:rPr sz="2400" b="1" dirty="0">
+                <a:solidFill>
+                  <a:srgbClr val="F97316"/>
+                </a:solidFill>
+                <a:latin typeface="Aptos"/>
+              </a:rPr>
+              <a:t>decision-support system</a:t>
             </a:r>
             <a:r>
               <a:rPr lang="en-US" sz="2400" b="1" dirty="0">
@@ -4835,11 +6574,20 @@
                 </a:solidFill>
                 <a:latin typeface="Aptos"/>
               </a:rPr>
-              <a:t>decision-support system (DSS)</a:t>
-            </a:r>
-            <a:endParaRPr sz="2000" dirty="0">
+              <a:t>s</a:t>
+            </a:r>
+            <a:r>
+              <a:rPr sz="2400" b="1" dirty="0">
+                <a:solidFill>
+                  <a:srgbClr val="F97316"/>
+                </a:solidFill>
+                <a:latin typeface="Aptos"/>
+              </a:rPr>
+              <a:t> (DSS)</a:t>
+            </a:r>
+            <a:endParaRPr sz="2400" dirty="0">
               <a:solidFill>
-                <a:srgbClr val="0F2343"/>
+                <a:srgbClr val="F97316"/>
               </a:solidFill>
               <a:latin typeface="Aptos"/>
             </a:endParaRPr>
@@ -4860,8 +6608,8 @@
         </p:nvSpPr>
         <p:spPr>
           <a:xfrm>
-            <a:off x="429260" y="5465556"/>
-            <a:ext cx="11440160" cy="738664"/>
+            <a:off x="492760" y="5951100"/>
+            <a:ext cx="11440160" cy="338554"/>
           </a:xfrm>
           <a:prstGeom prst="rect">
             <a:avLst/>
@@ -4879,31 +6627,31 @@
               <a:buChar char="•"/>
             </a:pPr>
             <a:r>
-              <a:rPr lang="en-US" sz="2400" dirty="0">
+              <a:rPr sz="2200" dirty="0">
                 <a:solidFill>
                   <a:srgbClr val="0F2343"/>
                 </a:solidFill>
                 <a:latin typeface="Aptos"/>
               </a:rPr>
-              <a:t>The business value comes from </a:t>
-            </a:r>
-            <a:r>
-              <a:rPr lang="en-US" sz="2400" u="sng" dirty="0">
+              <a:t>Its business value comes from </a:t>
+            </a:r>
+            <a:r>
+              <a:rPr sz="2200" b="1" dirty="0">
                 <a:solidFill>
                   <a:srgbClr val="0F2343"/>
                 </a:solidFill>
                 <a:latin typeface="Aptos"/>
               </a:rPr>
-              <a:t>building a sustainable decision-making product</a:t>
-            </a:r>
-            <a:r>
-              <a:rPr lang="en-US" sz="2400" dirty="0">
+              <a:t>being sustainable over the lifetime of the business need</a:t>
+            </a:r>
+            <a:r>
+              <a:rPr sz="2200" dirty="0">
                 <a:solidFill>
                   <a:srgbClr val="0F2343"/>
                 </a:solidFill>
                 <a:latin typeface="Aptos"/>
               </a:rPr>
-              <a:t> over the lifetime of the business need.</a:t>
+              <a:t>.</a:t>
             </a:r>
             <a:endParaRPr sz="2400" dirty="0">
               <a:solidFill>
@@ -4928,7 +6676,7 @@
         </p:nvSpPr>
         <p:spPr>
           <a:xfrm rot="7931673">
-            <a:off x="5927922" y="3371117"/>
+            <a:off x="5816163" y="4185198"/>
             <a:ext cx="842125" cy="842864"/>
           </a:xfrm>
           <a:prstGeom prst="halfFrame">
@@ -4971,11 +6719,414 @@
           </a:p>
         </p:txBody>
       </p:sp>
+      <p:sp>
+        <p:nvSpPr>
+          <p:cNvPr id="5" name="TextBox 4">
+            <a:extLst>
+              <a:ext uri="{FF2B5EF4-FFF2-40B4-BE49-F238E27FC236}">
+                <a16:creationId xmlns:a16="http://schemas.microsoft.com/office/drawing/2014/main" id="{5CE796BF-8B07-91B8-7E72-BD4A45710603}"/>
+              </a:ext>
+            </a:extLst>
+          </p:cNvPr>
+          <p:cNvSpPr txBox="1"/>
+          <p:nvPr/>
+        </p:nvSpPr>
+        <p:spPr>
+          <a:xfrm>
+            <a:off x="408432" y="3143967"/>
+            <a:ext cx="11440160" cy="338554"/>
+          </a:xfrm>
+          <a:prstGeom prst="rect">
+            <a:avLst/>
+          </a:prstGeom>
+          <a:noFill/>
+        </p:spPr>
+        <p:txBody>
+          <a:bodyPr wrap="square" tIns="0" rIns="45720" bIns="0">
+            <a:spAutoFit/>
+          </a:bodyPr>
+          <a:lstStyle/>
+          <a:p>
+            <a:pPr marL="285750" indent="-285750" algn="l">
+              <a:buFont typeface="Arial" panose="020B0604020202020204" pitchFamily="34" charset="0"/>
+              <a:buChar char="•"/>
+            </a:pPr>
+            <a:r>
+              <a:rPr lang="en-US" sz="2200" b="0" dirty="0">
+                <a:solidFill>
+                  <a:srgbClr val="0F2343"/>
+                </a:solidFill>
+                <a:latin typeface="Aptos"/>
+              </a:rPr>
+              <a:t>Examples:</a:t>
+            </a:r>
+            <a:endParaRPr sz="2400" dirty="0">
+              <a:solidFill>
+                <a:srgbClr val="0F2343"/>
+              </a:solidFill>
+              <a:latin typeface="Aptos"/>
+            </a:endParaRPr>
+          </a:p>
+        </p:txBody>
+      </p:sp>
     </p:spTree>
   </p:cSld>
   <p:clrMapOvr>
     <a:masterClrMapping/>
   </p:clrMapOvr>
+  <p:timing>
+    <p:tnLst>
+      <p:par>
+        <p:cTn id="1" dur="indefinite" restart="never" nodeType="tmRoot">
+          <p:childTnLst>
+            <p:seq concurrent="1" nextAc="seek">
+              <p:cTn id="2" dur="indefinite" nodeType="mainSeq">
+                <p:childTnLst>
+                  <p:par>
+                    <p:cTn id="3" fill="hold">
+                      <p:stCondLst>
+                        <p:cond delay="indefinite"/>
+                      </p:stCondLst>
+                      <p:childTnLst>
+                        <p:par>
+                          <p:cTn id="4" fill="hold">
+                            <p:stCondLst>
+                              <p:cond delay="0"/>
+                            </p:stCondLst>
+                            <p:childTnLst>
+                              <p:par>
+                                <p:cTn id="5" presetID="1" presetClass="entr" presetSubtype="0" fill="hold" grpId="0" nodeType="clickEffect">
+                                  <p:stCondLst>
+                                    <p:cond delay="0"/>
+                                  </p:stCondLst>
+                                  <p:childTnLst>
+                                    <p:set>
+                                      <p:cBhvr>
+                                        <p:cTn id="6" dur="1" fill="hold">
+                                          <p:stCondLst>
+                                            <p:cond delay="0"/>
+                                          </p:stCondLst>
+                                        </p:cTn>
+                                        <p:tgtEl>
+                                          <p:spTgt spid="4"/>
+                                        </p:tgtEl>
+                                        <p:attrNameLst>
+                                          <p:attrName>style.visibility</p:attrName>
+                                        </p:attrNameLst>
+                                      </p:cBhvr>
+                                      <p:to>
+                                        <p:strVal val="visible"/>
+                                      </p:to>
+                                    </p:set>
+                                  </p:childTnLst>
+                                </p:cTn>
+                              </p:par>
+                            </p:childTnLst>
+                          </p:cTn>
+                        </p:par>
+                      </p:childTnLst>
+                    </p:cTn>
+                  </p:par>
+                  <p:par>
+                    <p:cTn id="7" fill="hold">
+                      <p:stCondLst>
+                        <p:cond delay="indefinite"/>
+                      </p:stCondLst>
+                      <p:childTnLst>
+                        <p:par>
+                          <p:cTn id="8" fill="hold">
+                            <p:stCondLst>
+                              <p:cond delay="0"/>
+                            </p:stCondLst>
+                            <p:childTnLst>
+                              <p:par>
+                                <p:cTn id="9" presetID="1" presetClass="entr" presetSubtype="0" fill="hold" grpId="0" nodeType="clickEffect">
+                                  <p:stCondLst>
+                                    <p:cond delay="0"/>
+                                  </p:stCondLst>
+                                  <p:childTnLst>
+                                    <p:set>
+                                      <p:cBhvr>
+                                        <p:cTn id="10" dur="1" fill="hold">
+                                          <p:stCondLst>
+                                            <p:cond delay="0"/>
+                                          </p:stCondLst>
+                                        </p:cTn>
+                                        <p:tgtEl>
+                                          <p:spTgt spid="5"/>
+                                        </p:tgtEl>
+                                        <p:attrNameLst>
+                                          <p:attrName>style.visibility</p:attrName>
+                                        </p:attrNameLst>
+                                      </p:cBhvr>
+                                      <p:to>
+                                        <p:strVal val="visible"/>
+                                      </p:to>
+                                    </p:set>
+                                  </p:childTnLst>
+                                </p:cTn>
+                              </p:par>
+                              <p:par>
+                                <p:cTn id="11" presetID="1" presetClass="entr" presetSubtype="0" fill="hold" nodeType="withEffect">
+                                  <p:stCondLst>
+                                    <p:cond delay="0"/>
+                                  </p:stCondLst>
+                                  <p:childTnLst>
+                                    <p:set>
+                                      <p:cBhvr>
+                                        <p:cTn id="12" dur="1" fill="hold">
+                                          <p:stCondLst>
+                                            <p:cond delay="0"/>
+                                          </p:stCondLst>
+                                        </p:cTn>
+                                        <p:tgtEl>
+                                          <p:spTgt spid="23"/>
+                                        </p:tgtEl>
+                                        <p:attrNameLst>
+                                          <p:attrName>style.visibility</p:attrName>
+                                        </p:attrNameLst>
+                                      </p:cBhvr>
+                                      <p:to>
+                                        <p:strVal val="visible"/>
+                                      </p:to>
+                                    </p:set>
+                                  </p:childTnLst>
+                                </p:cTn>
+                              </p:par>
+                              <p:par>
+                                <p:cTn id="13" presetID="1" presetClass="entr" presetSubtype="0" fill="hold" nodeType="withEffect">
+                                  <p:stCondLst>
+                                    <p:cond delay="0"/>
+                                  </p:stCondLst>
+                                  <p:childTnLst>
+                                    <p:set>
+                                      <p:cBhvr>
+                                        <p:cTn id="14" dur="1" fill="hold">
+                                          <p:stCondLst>
+                                            <p:cond delay="0"/>
+                                          </p:stCondLst>
+                                        </p:cTn>
+                                        <p:tgtEl>
+                                          <p:spTgt spid="25"/>
+                                        </p:tgtEl>
+                                        <p:attrNameLst>
+                                          <p:attrName>style.visibility</p:attrName>
+                                        </p:attrNameLst>
+                                      </p:cBhvr>
+                                      <p:to>
+                                        <p:strVal val="visible"/>
+                                      </p:to>
+                                    </p:set>
+                                  </p:childTnLst>
+                                </p:cTn>
+                              </p:par>
+                              <p:par>
+                                <p:cTn id="15" presetID="1" presetClass="entr" presetSubtype="0" fill="hold" nodeType="withEffect">
+                                  <p:stCondLst>
+                                    <p:cond delay="0"/>
+                                  </p:stCondLst>
+                                  <p:childTnLst>
+                                    <p:set>
+                                      <p:cBhvr>
+                                        <p:cTn id="16" dur="1" fill="hold">
+                                          <p:stCondLst>
+                                            <p:cond delay="0"/>
+                                          </p:stCondLst>
+                                        </p:cTn>
+                                        <p:tgtEl>
+                                          <p:spTgt spid="29"/>
+                                        </p:tgtEl>
+                                        <p:attrNameLst>
+                                          <p:attrName>style.visibility</p:attrName>
+                                        </p:attrNameLst>
+                                      </p:cBhvr>
+                                      <p:to>
+                                        <p:strVal val="visible"/>
+                                      </p:to>
+                                    </p:set>
+                                  </p:childTnLst>
+                                </p:cTn>
+                              </p:par>
+                              <p:par>
+                                <p:cTn id="17" presetID="1" presetClass="entr" presetSubtype="0" fill="hold" grpId="0" nodeType="withEffect">
+                                  <p:stCondLst>
+                                    <p:cond delay="0"/>
+                                  </p:stCondLst>
+                                  <p:childTnLst>
+                                    <p:set>
+                                      <p:cBhvr>
+                                        <p:cTn id="18" dur="1" fill="hold">
+                                          <p:stCondLst>
+                                            <p:cond delay="0"/>
+                                          </p:stCondLst>
+                                        </p:cTn>
+                                        <p:tgtEl>
+                                          <p:spTgt spid="27"/>
+                                        </p:tgtEl>
+                                        <p:attrNameLst>
+                                          <p:attrName>style.visibility</p:attrName>
+                                        </p:attrNameLst>
+                                      </p:cBhvr>
+                                      <p:to>
+                                        <p:strVal val="visible"/>
+                                      </p:to>
+                                    </p:set>
+                                  </p:childTnLst>
+                                </p:cTn>
+                              </p:par>
+                            </p:childTnLst>
+                          </p:cTn>
+                        </p:par>
+                      </p:childTnLst>
+                    </p:cTn>
+                  </p:par>
+                  <p:par>
+                    <p:cTn id="19" fill="hold">
+                      <p:stCondLst>
+                        <p:cond delay="indefinite"/>
+                      </p:stCondLst>
+                      <p:childTnLst>
+                        <p:par>
+                          <p:cTn id="20" fill="hold">
+                            <p:stCondLst>
+                              <p:cond delay="0"/>
+                            </p:stCondLst>
+                            <p:childTnLst>
+                              <p:par>
+                                <p:cTn id="21" presetID="1" presetClass="entr" presetSubtype="0" fill="hold" grpId="0" nodeType="clickEffect">
+                                  <p:stCondLst>
+                                    <p:cond delay="0"/>
+                                  </p:stCondLst>
+                                  <p:childTnLst>
+                                    <p:set>
+                                      <p:cBhvr>
+                                        <p:cTn id="22" dur="1" fill="hold">
+                                          <p:stCondLst>
+                                            <p:cond delay="0"/>
+                                          </p:stCondLst>
+                                        </p:cTn>
+                                        <p:tgtEl>
+                                          <p:spTgt spid="42"/>
+                                        </p:tgtEl>
+                                        <p:attrNameLst>
+                                          <p:attrName>style.visibility</p:attrName>
+                                        </p:attrNameLst>
+                                      </p:cBhvr>
+                                      <p:to>
+                                        <p:strVal val="visible"/>
+                                      </p:to>
+                                    </p:set>
+                                  </p:childTnLst>
+                                </p:cTn>
+                              </p:par>
+                              <p:par>
+                                <p:cTn id="23" presetID="1" presetClass="entr" presetSubtype="0" fill="hold" grpId="0" nodeType="withEffect">
+                                  <p:stCondLst>
+                                    <p:cond delay="0"/>
+                                  </p:stCondLst>
+                                  <p:childTnLst>
+                                    <p:set>
+                                      <p:cBhvr>
+                                        <p:cTn id="24" dur="1" fill="hold">
+                                          <p:stCondLst>
+                                            <p:cond delay="0"/>
+                                          </p:stCondLst>
+                                        </p:cTn>
+                                        <p:tgtEl>
+                                          <p:spTgt spid="32"/>
+                                        </p:tgtEl>
+                                        <p:attrNameLst>
+                                          <p:attrName>style.visibility</p:attrName>
+                                        </p:attrNameLst>
+                                      </p:cBhvr>
+                                      <p:to>
+                                        <p:strVal val="visible"/>
+                                      </p:to>
+                                    </p:set>
+                                  </p:childTnLst>
+                                </p:cTn>
+                              </p:par>
+                            </p:childTnLst>
+                          </p:cTn>
+                        </p:par>
+                      </p:childTnLst>
+                    </p:cTn>
+                  </p:par>
+                  <p:par>
+                    <p:cTn id="25" fill="hold">
+                      <p:stCondLst>
+                        <p:cond delay="indefinite"/>
+                      </p:stCondLst>
+                      <p:childTnLst>
+                        <p:par>
+                          <p:cTn id="26" fill="hold">
+                            <p:stCondLst>
+                              <p:cond delay="0"/>
+                            </p:stCondLst>
+                            <p:childTnLst>
+                              <p:par>
+                                <p:cTn id="27" presetID="1" presetClass="entr" presetSubtype="0" fill="hold" grpId="0" nodeType="clickEffect">
+                                  <p:stCondLst>
+                                    <p:cond delay="0"/>
+                                  </p:stCondLst>
+                                  <p:childTnLst>
+                                    <p:set>
+                                      <p:cBhvr>
+                                        <p:cTn id="28" dur="1" fill="hold">
+                                          <p:stCondLst>
+                                            <p:cond delay="0"/>
+                                          </p:stCondLst>
+                                        </p:cTn>
+                                        <p:tgtEl>
+                                          <p:spTgt spid="34"/>
+                                        </p:tgtEl>
+                                        <p:attrNameLst>
+                                          <p:attrName>style.visibility</p:attrName>
+                                        </p:attrNameLst>
+                                      </p:cBhvr>
+                                      <p:to>
+                                        <p:strVal val="visible"/>
+                                      </p:to>
+                                    </p:set>
+                                  </p:childTnLst>
+                                </p:cTn>
+                              </p:par>
+                            </p:childTnLst>
+                          </p:cTn>
+                        </p:par>
+                      </p:childTnLst>
+                    </p:cTn>
+                  </p:par>
+                </p:childTnLst>
+              </p:cTn>
+              <p:prevCondLst>
+                <p:cond evt="onPrev" delay="0">
+                  <p:tgtEl>
+                    <p:sldTgt/>
+                  </p:tgtEl>
+                </p:cond>
+              </p:prevCondLst>
+              <p:nextCondLst>
+                <p:cond evt="onNext" delay="0">
+                  <p:tgtEl>
+                    <p:sldTgt/>
+                  </p:tgtEl>
+                </p:cond>
+              </p:nextCondLst>
+            </p:seq>
+          </p:childTnLst>
+        </p:cTn>
+      </p:par>
+    </p:tnLst>
+    <p:bldLst>
+      <p:bldP spid="4" grpId="0"/>
+      <p:bldP spid="27" grpId="0"/>
+      <p:bldP spid="32" grpId="0"/>
+      <p:bldP spid="34" grpId="0"/>
+      <p:bldP spid="42" grpId="0" animBg="1"/>
+      <p:bldP spid="5" grpId="0"/>
+    </p:bldLst>
+  </p:timing>
 </p:sld>
 </file>
 
@@ -5047,7 +7198,7 @@
                 </a:solidFill>
                 <a:latin typeface="Aptos Display"/>
               </a:rPr>
-              <a:t>n has weak software practices surrounding the mathematics</a:t>
+              <a:t>n has weak software practices surrounding the applied mathematics</a:t>
             </a:r>
             <a:endParaRPr sz="4000" b="1" i="0" baseline="30000" dirty="0">
               <a:solidFill>
@@ -5213,7 +7364,7 @@
         </p:nvCxnSpPr>
         <p:spPr>
           <a:xfrm>
-            <a:off x="365760" y="3103880"/>
+            <a:off x="365760" y="3054452"/>
             <a:ext cx="2877895" cy="0"/>
           </a:xfrm>
           <a:prstGeom prst="line">
@@ -5257,7 +7408,7 @@
         </p:nvCxnSpPr>
         <p:spPr>
           <a:xfrm>
-            <a:off x="365760" y="4310380"/>
+            <a:off x="365760" y="4260952"/>
             <a:ext cx="2877895" cy="0"/>
           </a:xfrm>
           <a:prstGeom prst="line">
@@ -5299,7 +7450,7 @@
         </p:nvSpPr>
         <p:spPr>
           <a:xfrm>
-            <a:off x="1520010" y="3430642"/>
+            <a:off x="1520010" y="3381214"/>
             <a:ext cx="616413" cy="616413"/>
           </a:xfrm>
           <a:prstGeom prst="ellipse">
@@ -5396,7 +7547,7 @@
         </p:nvGrpSpPr>
         <p:grpSpPr>
           <a:xfrm>
-            <a:off x="2214880" y="3098800"/>
+            <a:off x="2214880" y="3049372"/>
             <a:ext cx="210820" cy="665449"/>
             <a:chOff x="2448560" y="3002280"/>
             <a:chExt cx="210820" cy="665449"/>
@@ -5725,7 +7876,7 @@
         </p:nvGrpSpPr>
         <p:grpSpPr>
           <a:xfrm>
-            <a:off x="1319329" y="4019671"/>
+            <a:off x="1319329" y="3970243"/>
             <a:ext cx="177843" cy="295789"/>
             <a:chOff x="1410769" y="3999351"/>
             <a:chExt cx="177843" cy="295789"/>
@@ -6275,7 +8426,7 @@
         <p:spPr>
           <a:xfrm>
             <a:off x="4824985" y="4092473"/>
-            <a:ext cx="6719314" cy="1538883"/>
+            <a:ext cx="6719314" cy="984885"/>
           </a:xfrm>
           <a:prstGeom prst="rect">
             <a:avLst/>
@@ -6312,16 +8463,45 @@
                 <a:latin typeface="Aptos"/>
                 <a:sym typeface="Wingdings" panose="05000000000000000000" pitchFamily="2" charset="2"/>
               </a:rPr>
-              <a:t>DSS has unique challenges deriving from the mixture of applied mathematics and SE. For example:</a:t>
-            </a:r>
-          </a:p>
+              <a:t>DSS has unique challenges deriving from the mixture of applied mathematics and SE.</a:t>
+            </a:r>
+          </a:p>
+        </p:txBody>
+      </p:sp>
+      <p:sp>
+        <p:nvSpPr>
+          <p:cNvPr id="5" name="TextBox 4">
+            <a:extLst>
+              <a:ext uri="{FF2B5EF4-FFF2-40B4-BE49-F238E27FC236}">
+                <a16:creationId xmlns:a16="http://schemas.microsoft.com/office/drawing/2014/main" id="{EC571187-EF99-43F8-610D-5D0E2CEC23E0}"/>
+              </a:ext>
+            </a:extLst>
+          </p:cNvPr>
+          <p:cNvSpPr txBox="1"/>
+          <p:nvPr/>
+        </p:nvSpPr>
+        <p:spPr>
+          <a:xfrm>
+            <a:off x="5069518" y="5111687"/>
+            <a:ext cx="6093822" cy="923330"/>
+          </a:xfrm>
+          <a:prstGeom prst="rect">
+            <a:avLst/>
+          </a:prstGeom>
+          <a:noFill/>
+        </p:spPr>
+        <p:txBody>
+          <a:bodyPr wrap="square">
+            <a:spAutoFit/>
+          </a:bodyPr>
+          <a:lstStyle/>
           <a:p>
             <a:pPr marL="800100" lvl="1" indent="-342900">
               <a:buFont typeface="Wingdings" panose="05000000000000000000" pitchFamily="2" charset="2"/>
               <a:buChar char="§"/>
             </a:pPr>
             <a:r>
-              <a:rPr lang="en-US" i="1" dirty="0">
+              <a:rPr lang="en-US" sz="1800" dirty="0">
                 <a:solidFill>
                   <a:srgbClr val="0F2343"/>
                 </a:solidFill>
@@ -6337,7 +8517,7 @@
               <a:buChar char="§"/>
             </a:pPr>
             <a:r>
-              <a:rPr lang="en-US" i="1" dirty="0">
+              <a:rPr lang="en-US" sz="1800" dirty="0">
                 <a:solidFill>
                   <a:srgbClr val="0F2343"/>
                 </a:solidFill>
@@ -6346,7 +8526,23 @@
               </a:rPr>
               <a:t>How to design the system to be solver-agnostic?</a:t>
             </a:r>
-            <a:endParaRPr dirty="0">
+          </a:p>
+          <a:p>
+            <a:pPr marL="800100" lvl="1" indent="-342900">
+              <a:buFont typeface="Wingdings" panose="05000000000000000000" pitchFamily="2" charset="2"/>
+              <a:buChar char="§"/>
+            </a:pPr>
+            <a:r>
+              <a:rPr lang="en-US" sz="1800" dirty="0">
+                <a:solidFill>
+                  <a:srgbClr val="0F2343"/>
+                </a:solidFill>
+                <a:latin typeface="Aptos"/>
+                <a:sym typeface="Wingdings" panose="05000000000000000000" pitchFamily="2" charset="2"/>
+              </a:rPr>
+              <a:t>How to set an experimentation platform?</a:t>
+            </a:r>
+            <a:endParaRPr lang="en-US" sz="1800" dirty="0">
               <a:solidFill>
                 <a:srgbClr val="0F2343"/>
               </a:solidFill>
@@ -6580,6 +8776,51 @@
                       </p:childTnLst>
                     </p:cTn>
                   </p:par>
+                  <p:par>
+                    <p:cTn id="21" fill="hold">
+                      <p:stCondLst>
+                        <p:cond delay="indefinite"/>
+                      </p:stCondLst>
+                      <p:childTnLst>
+                        <p:par>
+                          <p:cTn id="22" fill="hold">
+                            <p:stCondLst>
+                              <p:cond delay="0"/>
+                            </p:stCondLst>
+                            <p:childTnLst>
+                              <p:par>
+                                <p:cTn id="23" presetID="1" presetClass="entr" presetSubtype="0" fill="hold" grpId="0" nodeType="clickEffect">
+                                  <p:stCondLst>
+                                    <p:cond delay="0"/>
+                                  </p:stCondLst>
+                                  <p:childTnLst>
+                                    <p:set>
+                                      <p:cBhvr>
+                                        <p:cTn id="24" dur="1" fill="hold">
+                                          <p:stCondLst>
+                                            <p:cond delay="0"/>
+                                          </p:stCondLst>
+                                        </p:cTn>
+                                        <p:tgtEl>
+                                          <p:spTgt spid="5"/>
+                                        </p:tgtEl>
+                                        <p:attrNameLst>
+                                          <p:attrName>style.visibility</p:attrName>
+                                        </p:attrNameLst>
+                                      </p:cBhvr>
+                                      <p:to>
+                                        <p:strVal val="visible"/>
+                                      </p:to>
+                                    </p:set>
+                                  </p:childTnLst>
+                                </p:cTn>
+                              </p:par>
+                            </p:childTnLst>
+                          </p:cTn>
+                        </p:par>
+                      </p:childTnLst>
+                    </p:cTn>
+                  </p:par>
                 </p:childTnLst>
               </p:cTn>
               <p:prevCondLst>
@@ -6605,6 +8846,7 @@
       <p:bldP spid="88" grpId="0" animBg="1"/>
       <p:bldP spid="90" grpId="0"/>
       <p:bldP spid="92" grpId="0"/>
+      <p:bldP spid="5" grpId="0"/>
     </p:bldLst>
   </p:timing>
 </p:sld>
@@ -6662,22 +8904,13 @@
           <a:lstStyle/>
           <a:p>
             <a:r>
-              <a:rPr lang="en-US" sz="4000" b="1" i="0" dirty="0">
+              <a:rPr sz="4000" b="1">
                 <a:solidFill>
                   <a:srgbClr val="0F2343"/>
                 </a:solidFill>
                 <a:latin typeface="Aptos Display"/>
               </a:rPr>
-              <a:t>Weak software practices constraints the potential business value a DSS </a:t>
-            </a:r>
-            <a:r>
-              <a:rPr lang="en-US" sz="4000" b="1" dirty="0">
-                <a:solidFill>
-                  <a:srgbClr val="0F2343"/>
-                </a:solidFill>
-                <a:latin typeface="Aptos Display"/>
-              </a:rPr>
-              <a:t>can deliver</a:t>
+              <a:t>Weak software practices constrain the potential business value a DSS can deliver</a:t>
             </a:r>
             <a:endParaRPr sz="4000" b="1" i="0" baseline="30000" dirty="0">
               <a:solidFill>
@@ -6749,8 +8982,8 @@
         </p:nvSpPr>
         <p:spPr>
           <a:xfrm>
-            <a:off x="365759" y="1988312"/>
-            <a:ext cx="5560685" cy="3570208"/>
+            <a:off x="365759" y="2069592"/>
+            <a:ext cx="5560685" cy="3877985"/>
           </a:xfrm>
           <a:prstGeom prst="rect">
             <a:avLst/>
@@ -6784,7 +9017,7 @@
             </a:endParaRPr>
           </a:p>
           <a:p>
-            <a:pPr marL="285750" indent="-285750" algn="l">
+            <a:pPr marL="342900" indent="-342900" algn="l">
               <a:buFont typeface="Arial" panose="020B0604020202020204" pitchFamily="34" charset="0"/>
               <a:buChar char="•"/>
             </a:pPr>
@@ -6815,6 +9048,18 @@
               <a:buFont typeface="Arial" panose="020B0604020202020204" pitchFamily="34" charset="0"/>
               <a:buChar char="•"/>
             </a:pPr>
+            <a:endParaRPr lang="en-US" sz="2000" dirty="0">
+              <a:solidFill>
+                <a:srgbClr val="0F2343"/>
+              </a:solidFill>
+              <a:latin typeface="Aptos"/>
+            </a:endParaRPr>
+          </a:p>
+          <a:p>
+            <a:pPr marL="342900" indent="-342900" algn="l">
+              <a:buFont typeface="Arial" panose="020B0604020202020204" pitchFamily="34" charset="0"/>
+              <a:buChar char="•"/>
+            </a:pPr>
             <a:r>
               <a:rPr lang="en-US" sz="2000" dirty="0">
                 <a:solidFill>
@@ -6822,7 +9067,7 @@
                 </a:solidFill>
                 <a:latin typeface="Aptos"/>
               </a:rPr>
-              <a:t>Short-term delivery is misleading as it hides technical debt.</a:t>
+              <a:t>Short-term delivery includes significant technical debt.</a:t>
             </a:r>
           </a:p>
           <a:p>
@@ -6835,6 +9080,15 @@
             </a:endParaRPr>
           </a:p>
           <a:p>
+            <a:pPr algn="l"/>
+            <a:endParaRPr lang="en-US" sz="2000" dirty="0">
+              <a:solidFill>
+                <a:srgbClr val="0F2343"/>
+              </a:solidFill>
+              <a:latin typeface="Aptos"/>
+            </a:endParaRPr>
+          </a:p>
+          <a:p>
             <a:pPr marL="342900" indent="-342900" algn="l">
               <a:buFont typeface="Arial" panose="020B0604020202020204" pitchFamily="34" charset="0"/>
               <a:buChar char="•"/>
@@ -6846,7 +9100,7 @@
                 </a:solidFill>
                 <a:latin typeface="Aptos"/>
               </a:rPr>
-              <a:t>At some point it can’t sustain progress economically: might get re-written or decommissioned.</a:t>
+              <a:t>At some point becomes unsustainable: rewrite or decommission.</a:t>
             </a:r>
           </a:p>
           <a:p>
@@ -6879,7 +9133,7 @@
         </p:nvCxnSpPr>
         <p:spPr>
           <a:xfrm flipV="1">
-            <a:off x="6471920" y="1950720"/>
+            <a:off x="6471920" y="2133600"/>
             <a:ext cx="0" cy="3688080"/>
           </a:xfrm>
           <a:prstGeom prst="straightConnector1">
@@ -6924,7 +9178,7 @@
         </p:nvCxnSpPr>
         <p:spPr>
           <a:xfrm>
-            <a:off x="6471920" y="5638800"/>
+            <a:off x="6471920" y="5821680"/>
             <a:ext cx="4328160" cy="0"/>
           </a:xfrm>
           <a:prstGeom prst="straightConnector1">
@@ -6967,7 +9221,7 @@
         </p:nvSpPr>
         <p:spPr>
           <a:xfrm>
-            <a:off x="6700875" y="1920932"/>
+            <a:off x="6700875" y="2103812"/>
             <a:ext cx="1608430" cy="276999"/>
           </a:xfrm>
           <a:prstGeom prst="rect">
@@ -7014,7 +9268,7 @@
         </p:nvSpPr>
         <p:spPr>
           <a:xfrm rot="16410470">
-            <a:off x="6648889" y="4165784"/>
+            <a:off x="6648889" y="4308024"/>
             <a:ext cx="2820006" cy="3175572"/>
           </a:xfrm>
           <a:prstGeom prst="arc">
@@ -7064,7 +9318,7 @@
         </p:nvSpPr>
         <p:spPr>
           <a:xfrm>
-            <a:off x="10904510" y="5495317"/>
+            <a:off x="10904510" y="5678197"/>
             <a:ext cx="797205" cy="276999"/>
           </a:xfrm>
           <a:prstGeom prst="rect">
@@ -7111,8 +9365,8 @@
         </p:nvSpPr>
         <p:spPr>
           <a:xfrm rot="16410470">
-            <a:off x="7410189" y="1787645"/>
-            <a:ext cx="6117552" cy="7983363"/>
+            <a:off x="7789658" y="2038551"/>
+            <a:ext cx="5463219" cy="8096824"/>
           </a:xfrm>
           <a:prstGeom prst="arc">
             <a:avLst/>
@@ -7163,8 +9417,8 @@
         </p:nvCxnSpPr>
         <p:spPr>
           <a:xfrm flipV="1">
-            <a:off x="6471920" y="2357120"/>
-            <a:ext cx="2753360" cy="3281680"/>
+            <a:off x="6471920" y="2751376"/>
+            <a:ext cx="1837385" cy="3070304"/>
           </a:xfrm>
           <a:prstGeom prst="line">
             <a:avLst/>
@@ -7207,7 +9461,7 @@
         </p:nvSpPr>
         <p:spPr>
           <a:xfrm>
-            <a:off x="9083041" y="1878041"/>
+            <a:off x="8560387" y="2582204"/>
             <a:ext cx="1960880" cy="338344"/>
           </a:xfrm>
           <a:prstGeom prst="rect">
@@ -7265,7 +9519,7 @@
         </p:nvSpPr>
         <p:spPr>
           <a:xfrm>
-            <a:off x="10011103" y="2889846"/>
+            <a:off x="9954774" y="3428905"/>
             <a:ext cx="1690612" cy="338344"/>
           </a:xfrm>
           <a:prstGeom prst="rect">
@@ -7323,7 +9577,7 @@
         </p:nvSpPr>
         <p:spPr>
           <a:xfrm>
-            <a:off x="8320490" y="4174648"/>
+            <a:off x="8259252" y="4313267"/>
             <a:ext cx="2032545" cy="338344"/>
           </a:xfrm>
           <a:prstGeom prst="rect">
@@ -7814,22 +10068,13 @@
           <a:p>
             <a:pPr algn="l"/>
             <a:r>
-              <a:rPr lang="en-US" sz="4000" b="1" i="0" dirty="0">
+              <a:rPr lang="en-US" sz="4000" b="1" dirty="0">
                 <a:solidFill>
                   <a:srgbClr val="0F2343"/>
                 </a:solidFill>
                 <a:latin typeface="Aptos Display"/>
               </a:rPr>
-              <a:t>How to unlock the full value of the DSS? </a:t>
-            </a:r>
-            <a:r>
-              <a:rPr lang="en-US" sz="4000" b="1" dirty="0">
-                <a:solidFill>
-                  <a:srgbClr val="0F2343"/>
-                </a:solidFill>
-                <a:latin typeface="Aptos Display"/>
-              </a:rPr>
-              <a:t>operate as a specialized software development team</a:t>
+              <a:t>Operate as a specialized software development team to unlock the full value of a DSS</a:t>
             </a:r>
             <a:endParaRPr sz="4000" b="1" i="0" baseline="30000" dirty="0">
               <a:solidFill>
@@ -7889,21 +10134,9 @@
           <a:lstStyle/>
           <a:p>
             <a:pPr algn="ctr"/>
-            <a:r>
-              <a:rPr lang="en-US" sz="2000" dirty="0">
-                <a:latin typeface="Aptos" panose="020B0004020202020204" pitchFamily="34" charset="0"/>
-              </a:rPr>
-              <a:t>Operations</a:t>
-            </a:r>
-          </a:p>
-          <a:p>
-            <a:pPr algn="ctr"/>
-            <a:r>
-              <a:rPr lang="en-US" sz="2000" dirty="0">
-                <a:latin typeface="Aptos" panose="020B0004020202020204" pitchFamily="34" charset="0"/>
-              </a:rPr>
-              <a:t>Research</a:t>
-            </a:r>
+            <a:endParaRPr lang="en-US" sz="2000" dirty="0">
+              <a:latin typeface="Aptos" panose="020B0004020202020204" pitchFamily="34" charset="0"/>
+            </a:endParaRPr>
           </a:p>
         </p:txBody>
       </p:sp>
@@ -7956,21 +10189,9 @@
           <a:lstStyle/>
           <a:p>
             <a:pPr algn="ctr"/>
-            <a:r>
-              <a:rPr lang="en-US" sz="2000" dirty="0">
-                <a:latin typeface="Aptos" panose="020B0004020202020204" pitchFamily="34" charset="0"/>
-              </a:rPr>
-              <a:t>Software</a:t>
-            </a:r>
-          </a:p>
-          <a:p>
-            <a:pPr algn="ctr"/>
-            <a:r>
-              <a:rPr lang="en-US" sz="2000" dirty="0">
-                <a:latin typeface="Aptos" panose="020B0004020202020204" pitchFamily="34" charset="0"/>
-              </a:rPr>
-              <a:t>Engineering</a:t>
-            </a:r>
+            <a:endParaRPr lang="en-US" sz="2000" dirty="0">
+              <a:latin typeface="Aptos" panose="020B0004020202020204" pitchFamily="34" charset="0"/>
+            </a:endParaRPr>
           </a:p>
         </p:txBody>
       </p:sp>
@@ -7990,8 +10211,8 @@
         </p:nvCxnSpPr>
         <p:spPr>
           <a:xfrm>
-            <a:off x="2885440" y="2753360"/>
-            <a:ext cx="1818640" cy="0"/>
+            <a:off x="3027680" y="2635794"/>
+            <a:ext cx="1676400" cy="0"/>
           </a:xfrm>
           <a:prstGeom prst="straightConnector1">
             <a:avLst/>
@@ -8035,8 +10256,8 @@
         </p:nvCxnSpPr>
         <p:spPr>
           <a:xfrm>
-            <a:off x="2885440" y="4090670"/>
-            <a:ext cx="1818640" cy="0"/>
+            <a:off x="3027680" y="4090670"/>
+            <a:ext cx="1676400" cy="0"/>
           </a:xfrm>
           <a:prstGeom prst="straightConnector1">
             <a:avLst/>
@@ -8080,8 +10301,8 @@
         </p:nvCxnSpPr>
         <p:spPr>
           <a:xfrm>
-            <a:off x="2885440" y="5382582"/>
-            <a:ext cx="1818640" cy="0"/>
+            <a:off x="3027680" y="5542924"/>
+            <a:ext cx="1676400" cy="0"/>
           </a:xfrm>
           <a:prstGeom prst="straightConnector1">
             <a:avLst/>
@@ -8123,8 +10344,8 @@
         </p:nvSpPr>
         <p:spPr>
           <a:xfrm>
-            <a:off x="4873374" y="2445583"/>
-            <a:ext cx="6996935" cy="615553"/>
+            <a:off x="4873374" y="2297240"/>
+            <a:ext cx="7059546" cy="677108"/>
           </a:xfrm>
           <a:prstGeom prst="rect">
             <a:avLst/>
@@ -8139,7 +10360,7 @@
           <a:p>
             <a:pPr algn="l"/>
             <a:r>
-              <a:rPr lang="en-US" sz="2000" b="1" dirty="0">
+              <a:rPr lang="en-US" sz="2400" b="1" dirty="0">
                 <a:solidFill>
                   <a:srgbClr val="0F2343"/>
                 </a:solidFill>
@@ -8156,7 +10377,7 @@
                 <a:latin typeface="Aptos"/>
                 <a:sym typeface="Wingdings" panose="05000000000000000000" pitchFamily="2" charset="2"/>
               </a:rPr>
-              <a:t> with traditional skills to tackle problems unrelated to OR (ex: design a database)</a:t>
+              <a:t> to tackle problems unrelated to OR: design a database, data, deployments.</a:t>
             </a:r>
             <a:endParaRPr sz="1600" dirty="0">
               <a:solidFill>
@@ -8181,8 +10402,8 @@
         </p:nvSpPr>
         <p:spPr>
           <a:xfrm>
-            <a:off x="4935985" y="5074805"/>
-            <a:ext cx="6996935" cy="615553"/>
+            <a:off x="4842069" y="5206992"/>
+            <a:ext cx="7059546" cy="677108"/>
           </a:xfrm>
           <a:prstGeom prst="rect">
             <a:avLst/>
@@ -8197,7 +10418,7 @@
           <a:p>
             <a:pPr algn="l"/>
             <a:r>
-              <a:rPr lang="en-US" sz="2000" b="1" dirty="0">
+              <a:rPr lang="en-US" sz="2400" b="1" dirty="0">
                 <a:solidFill>
                   <a:srgbClr val="0F2343"/>
                 </a:solidFill>
@@ -8214,7 +10435,27 @@
                 <a:latin typeface="Aptos"/>
                 <a:sym typeface="Wingdings" panose="05000000000000000000" pitchFamily="2" charset="2"/>
               </a:rPr>
-              <a:t> trained in some SE elements: SDLC, elicitation, agile, OOP, basics of design, automated testing, TDD, CI.</a:t>
+              <a:t> trained in </a:t>
+            </a:r>
+            <a:r>
+              <a:rPr lang="en-US" sz="2000" u="sng" dirty="0">
+                <a:solidFill>
+                  <a:srgbClr val="0F2343"/>
+                </a:solidFill>
+                <a:latin typeface="Aptos"/>
+                <a:sym typeface="Wingdings" panose="05000000000000000000" pitchFamily="2" charset="2"/>
+              </a:rPr>
+              <a:t>some</a:t>
+            </a:r>
+            <a:r>
+              <a:rPr lang="en-US" sz="2000" dirty="0">
+                <a:solidFill>
+                  <a:srgbClr val="0F2343"/>
+                </a:solidFill>
+                <a:latin typeface="Aptos"/>
+                <a:sym typeface="Wingdings" panose="05000000000000000000" pitchFamily="2" charset="2"/>
+              </a:rPr>
+              <a:t> SE elements: SDLC, elicitation, agile, OOP, basics of design, automated testing, TDD, CI.</a:t>
             </a:r>
             <a:endParaRPr sz="1600" dirty="0">
               <a:solidFill>
@@ -8239,8 +10480,8 @@
         </p:nvSpPr>
         <p:spPr>
           <a:xfrm>
-            <a:off x="4935985" y="3782893"/>
-            <a:ext cx="6996935" cy="615553"/>
+            <a:off x="4842069" y="3587750"/>
+            <a:ext cx="7059546" cy="1005840"/>
           </a:xfrm>
           <a:prstGeom prst="rect">
             <a:avLst/>
@@ -8255,24 +10496,85 @@
           <a:p>
             <a:pPr algn="l"/>
             <a:r>
-              <a:rPr lang="en-US" sz="2000" b="1" dirty="0">
+              <a:rPr lang="en-US" sz="2400" b="1" dirty="0">
                 <a:solidFill>
                   <a:srgbClr val="0F2343"/>
                 </a:solidFill>
                 <a:latin typeface="Aptos"/>
-                <a:sym typeface="Wingdings" panose="05000000000000000000" pitchFamily="2" charset="2"/>
-              </a:rPr>
-              <a:t>Specialists</a:t>
-            </a:r>
-            <a:r>
-              <a:rPr lang="en-US" sz="2000" dirty="0">
+              </a:rPr>
+              <a:t>OR Engineers</a:t>
+            </a:r>
+            <a:r>
+              <a:rPr sz="2000" b="0" dirty="0">
                 <a:solidFill>
                   <a:srgbClr val="0F2343"/>
                 </a:solidFill>
                 <a:latin typeface="Aptos"/>
-                <a:sym typeface="Wingdings" panose="05000000000000000000" pitchFamily="2" charset="2"/>
-              </a:rPr>
-              <a:t> in SE &amp; OR to solve hard problems at the intersection: architecture, design, automated testing.</a:t>
+              </a:rPr>
+              <a:t> </a:t>
+            </a:r>
+            <a:r>
+              <a:rPr lang="en-US" sz="2000" b="0" dirty="0">
+                <a:solidFill>
+                  <a:srgbClr val="0F2343"/>
+                </a:solidFill>
+                <a:latin typeface="Aptos"/>
+              </a:rPr>
+              <a:t>to set</a:t>
+            </a:r>
+            <a:r>
+              <a:rPr sz="2000" b="0" dirty="0">
+                <a:solidFill>
+                  <a:srgbClr val="0F2343"/>
+                </a:solidFill>
+                <a:latin typeface="Aptos"/>
+              </a:rPr>
+              <a:t> </a:t>
+            </a:r>
+            <a:r>
+              <a:rPr lang="en-US" sz="2000" b="0" dirty="0">
+                <a:solidFill>
+                  <a:srgbClr val="0F2343"/>
+                </a:solidFill>
+                <a:latin typeface="Aptos"/>
+              </a:rPr>
+              <a:t>scientific</a:t>
+            </a:r>
+            <a:r>
+              <a:rPr sz="2000" b="0" dirty="0">
+                <a:solidFill>
+                  <a:srgbClr val="0F2343"/>
+                </a:solidFill>
+                <a:latin typeface="Aptos"/>
+              </a:rPr>
+              <a:t> </a:t>
+            </a:r>
+            <a:r>
+              <a:rPr lang="en-US" sz="2000" b="0" dirty="0">
+                <a:solidFill>
+                  <a:srgbClr val="0F2343"/>
+                </a:solidFill>
+                <a:latin typeface="Aptos"/>
+              </a:rPr>
+              <a:t>development needs: optimization model testing</a:t>
+            </a:r>
+            <a:r>
+              <a:rPr sz="2000" b="0" dirty="0">
+                <a:solidFill>
+                  <a:srgbClr val="0F2343"/>
+                </a:solidFill>
+                <a:latin typeface="Aptos"/>
+              </a:rPr>
+              <a:t>, </a:t>
+            </a:r>
+            <a:r>
+              <a:rPr lang="en-US" sz="2000" b="0" dirty="0">
+                <a:solidFill>
+                  <a:srgbClr val="0F2343"/>
+                </a:solidFill>
+                <a:latin typeface="Aptos"/>
+              </a:rPr>
+              <a:t>solver-agnostic design, experimentation suite, among others.</a:t>
             </a:r>
             <a:endParaRPr sz="1600" dirty="0">
               <a:solidFill>
@@ -8280,6 +10582,117 @@
               </a:solidFill>
               <a:latin typeface="Aptos"/>
             </a:endParaRPr>
+          </a:p>
+        </p:txBody>
+      </p:sp>
+      <p:sp>
+        <p:nvSpPr>
+          <p:cNvPr id="4" name="TextBox 3">
+            <a:extLst>
+              <a:ext uri="{FF2B5EF4-FFF2-40B4-BE49-F238E27FC236}">
+                <a16:creationId xmlns:a16="http://schemas.microsoft.com/office/drawing/2014/main" id="{40901C05-FAAC-4E71-0873-19FC666A2078}"/>
+              </a:ext>
+            </a:extLst>
+          </p:cNvPr>
+          <p:cNvSpPr txBox="1"/>
+          <p:nvPr/>
+        </p:nvSpPr>
+        <p:spPr>
+          <a:xfrm>
+            <a:off x="1471536" y="2505372"/>
+            <a:ext cx="1478290" cy="707886"/>
+          </a:xfrm>
+          <a:prstGeom prst="rect">
+            <a:avLst/>
+          </a:prstGeom>
+          <a:noFill/>
+        </p:spPr>
+        <p:txBody>
+          <a:bodyPr wrap="none" rtlCol="0">
+            <a:spAutoFit/>
+          </a:bodyPr>
+          <a:lstStyle/>
+          <a:p>
+            <a:pPr algn="ctr"/>
+            <a:r>
+              <a:rPr lang="en-US" sz="2000" dirty="0">
+                <a:solidFill>
+                  <a:schemeClr val="bg1"/>
+                </a:solidFill>
+                <a:latin typeface="Aptos" panose="020B0004020202020204" pitchFamily="34" charset="0"/>
+              </a:rPr>
+              <a:t>Software</a:t>
+            </a:r>
+            <a:br>
+              <a:rPr lang="en-US" sz="2000" dirty="0">
+                <a:solidFill>
+                  <a:schemeClr val="bg1"/>
+                </a:solidFill>
+                <a:latin typeface="Aptos" panose="020B0004020202020204" pitchFamily="34" charset="0"/>
+              </a:rPr>
+            </a:br>
+            <a:r>
+              <a:rPr lang="en-US" sz="2000" dirty="0">
+                <a:solidFill>
+                  <a:schemeClr val="bg1"/>
+                </a:solidFill>
+                <a:latin typeface="Aptos" panose="020B0004020202020204" pitchFamily="34" charset="0"/>
+              </a:rPr>
+              <a:t>Engineering</a:t>
+            </a:r>
+          </a:p>
+        </p:txBody>
+      </p:sp>
+      <p:sp>
+        <p:nvSpPr>
+          <p:cNvPr id="10" name="TextBox 9">
+            <a:extLst>
+              <a:ext uri="{FF2B5EF4-FFF2-40B4-BE49-F238E27FC236}">
+                <a16:creationId xmlns:a16="http://schemas.microsoft.com/office/drawing/2014/main" id="{CCC0BF73-EF50-8BF3-4BB8-82120F16D1B3}"/>
+              </a:ext>
+            </a:extLst>
+          </p:cNvPr>
+          <p:cNvSpPr txBox="1"/>
+          <p:nvPr/>
+        </p:nvSpPr>
+        <p:spPr>
+          <a:xfrm>
+            <a:off x="1502925" y="4925949"/>
+            <a:ext cx="1415516" cy="707886"/>
+          </a:xfrm>
+          <a:prstGeom prst="rect">
+            <a:avLst/>
+          </a:prstGeom>
+          <a:noFill/>
+        </p:spPr>
+        <p:txBody>
+          <a:bodyPr wrap="none" rtlCol="0">
+            <a:spAutoFit/>
+          </a:bodyPr>
+          <a:lstStyle/>
+          <a:p>
+            <a:pPr algn="ctr"/>
+            <a:r>
+              <a:rPr lang="en-US" sz="2000" dirty="0">
+                <a:solidFill>
+                  <a:schemeClr val="bg1"/>
+                </a:solidFill>
+                <a:latin typeface="Aptos" panose="020B0004020202020204" pitchFamily="34" charset="0"/>
+              </a:rPr>
+              <a:t>Operations</a:t>
+            </a:r>
+          </a:p>
+          <a:p>
+            <a:pPr algn="ctr"/>
+            <a:r>
+              <a:rPr lang="en-US" sz="2000" dirty="0">
+                <a:solidFill>
+                  <a:schemeClr val="bg1"/>
+                </a:solidFill>
+                <a:latin typeface="Aptos" panose="020B0004020202020204" pitchFamily="34" charset="0"/>
+              </a:rPr>
+              <a:t>Research</a:t>
+            </a:r>
           </a:p>
         </p:txBody>
       </p:sp>
@@ -8399,7 +10812,7 @@
                                           </p:stCondLst>
                                         </p:cTn>
                                         <p:tgtEl>
-                                          <p:spTgt spid="77"/>
+                                          <p:spTgt spid="70"/>
                                         </p:tgtEl>
                                         <p:attrNameLst>
                                           <p:attrName>style.visibility</p:attrName>
@@ -8426,7 +10839,7 @@
                                           </p:stCondLst>
                                         </p:cTn>
                                         <p:tgtEl>
-                                          <p:spTgt spid="87"/>
+                                          <p:spTgt spid="89"/>
                                         </p:tgtEl>
                                         <p:attrNameLst>
                                           <p:attrName>style.visibility</p:attrName>
@@ -8471,7 +10884,7 @@
                                           </p:stCondLst>
                                         </p:cTn>
                                         <p:tgtEl>
-                                          <p:spTgt spid="70"/>
+                                          <p:spTgt spid="77"/>
                                         </p:tgtEl>
                                         <p:attrNameLst>
                                           <p:attrName>style.visibility</p:attrName>
@@ -8498,7 +10911,7 @@
                                           </p:stCondLst>
                                         </p:cTn>
                                         <p:tgtEl>
-                                          <p:spTgt spid="89"/>
+                                          <p:spTgt spid="87"/>
                                         </p:tgtEl>
                                         <p:attrNameLst>
                                           <p:attrName>style.visibility</p:attrName>
@@ -8555,6 +10968,626 @@
         <p:cNvPr id="1" name="">
           <a:extLst>
             <a:ext uri="{FF2B5EF4-FFF2-40B4-BE49-F238E27FC236}">
+              <a16:creationId xmlns:a16="http://schemas.microsoft.com/office/drawing/2014/main" id="{A19E8281-9896-64B1-6096-21E51F7B9A98}"/>
+            </a:ext>
+          </a:extLst>
+        </p:cNvPr>
+        <p:cNvGrpSpPr/>
+        <p:nvPr/>
+      </p:nvGrpSpPr>
+      <p:grpSpPr>
+        <a:xfrm>
+          <a:off x="0" y="0"/>
+          <a:ext cx="0" cy="0"/>
+          <a:chOff x="0" y="0"/>
+          <a:chExt cx="0" cy="0"/>
+        </a:xfrm>
+      </p:grpSpPr>
+      <p:sp>
+        <p:nvSpPr>
+          <p:cNvPr id="2" name="TextBox 1">
+            <a:extLst>
+              <a:ext uri="{FF2B5EF4-FFF2-40B4-BE49-F238E27FC236}">
+                <a16:creationId xmlns:a16="http://schemas.microsoft.com/office/drawing/2014/main" id="{1C46D02F-6B0B-996E-8E33-91A236B17836}"/>
+              </a:ext>
+            </a:extLst>
+          </p:cNvPr>
+          <p:cNvSpPr txBox="1"/>
+          <p:nvPr/>
+        </p:nvSpPr>
+        <p:spPr>
+          <a:xfrm>
+            <a:off x="365760" y="213360"/>
+            <a:ext cx="11567160" cy="1231106"/>
+          </a:xfrm>
+          <a:prstGeom prst="rect">
+            <a:avLst/>
+          </a:prstGeom>
+          <a:noFill/>
+        </p:spPr>
+        <p:txBody>
+          <a:bodyPr wrap="square" lIns="0" tIns="0" rIns="0" bIns="0" anchor="t">
+            <a:spAutoFit/>
+          </a:bodyPr>
+          <a:lstStyle/>
+          <a:p>
+            <a:pPr algn="l"/>
+            <a:r>
+              <a:rPr sz="4000" b="1" dirty="0">
+                <a:solidFill>
+                  <a:srgbClr val="0F2343"/>
+                </a:solidFill>
+                <a:latin typeface="Aptos Display"/>
+              </a:rPr>
+              <a:t>The OR team owns the product, but it does not need to hold every skill itself</a:t>
+            </a:r>
+            <a:endParaRPr sz="4000" b="1" i="0" baseline="30000" dirty="0">
+              <a:solidFill>
+                <a:srgbClr val="0F2343"/>
+              </a:solidFill>
+              <a:latin typeface="Aptos Display"/>
+            </a:endParaRPr>
+          </a:p>
+        </p:txBody>
+      </p:sp>
+      <p:sp>
+        <p:nvSpPr>
+          <p:cNvPr id="5" name="Rounded Rectangle 4"/>
+          <p:cNvSpPr/>
+          <p:nvPr/>
+        </p:nvSpPr>
+        <p:spPr>
+          <a:xfrm>
+            <a:off x="365760" y="1804093"/>
+            <a:ext cx="5486400" cy="3707022"/>
+          </a:xfrm>
+          <a:prstGeom prst="roundRect">
+            <a:avLst>
+              <a:gd name="adj" fmla="val 7667"/>
+            </a:avLst>
+          </a:prstGeom>
+          <a:solidFill>
+            <a:srgbClr val="F9F2EE"/>
+          </a:solidFill>
+          <a:ln>
+            <a:noFill/>
+          </a:ln>
+          <a:effectLst/>
+        </p:spPr>
+        <p:style>
+          <a:lnRef idx="1">
+            <a:schemeClr val="accent1"/>
+          </a:lnRef>
+          <a:fillRef idx="3">
+            <a:schemeClr val="accent1"/>
+          </a:fillRef>
+          <a:effectRef idx="2">
+            <a:schemeClr val="accent1"/>
+          </a:effectRef>
+          <a:fontRef idx="minor">
+            <a:schemeClr val="lt1"/>
+          </a:fontRef>
+        </p:style>
+        <p:txBody>
+          <a:bodyPr rtlCol="0" anchor="ctr"/>
+          <a:lstStyle/>
+          <a:p>
+            <a:endParaRPr/>
+          </a:p>
+        </p:txBody>
+      </p:sp>
+      <p:sp>
+        <p:nvSpPr>
+          <p:cNvPr id="16" name="Rounded Rectangle 15"/>
+          <p:cNvSpPr/>
+          <p:nvPr/>
+        </p:nvSpPr>
+        <p:spPr>
+          <a:xfrm>
+            <a:off x="365760" y="5902452"/>
+            <a:ext cx="11457432" cy="502920"/>
+          </a:xfrm>
+          <a:prstGeom prst="roundRect">
+            <a:avLst/>
+          </a:prstGeom>
+          <a:solidFill>
+            <a:srgbClr val="0F2343"/>
+          </a:solidFill>
+          <a:ln>
+            <a:noFill/>
+          </a:ln>
+          <a:effectLst/>
+        </p:spPr>
+        <p:style>
+          <a:lnRef idx="1">
+            <a:schemeClr val="accent1"/>
+          </a:lnRef>
+          <a:fillRef idx="3">
+            <a:schemeClr val="accent1"/>
+          </a:fillRef>
+          <a:effectRef idx="2">
+            <a:schemeClr val="accent1"/>
+          </a:effectRef>
+          <a:fontRef idx="minor">
+            <a:schemeClr val="lt1"/>
+          </a:fontRef>
+        </p:style>
+        <p:txBody>
+          <a:bodyPr wrap="square" rtlCol="0" anchor="ctr"/>
+          <a:lstStyle/>
+          <a:p>
+            <a:pPr algn="ctr"/>
+            <a:r>
+              <a:rPr sz="2000" b="1" dirty="0">
+                <a:solidFill>
+                  <a:srgbClr val="FFFFFF"/>
+                </a:solidFill>
+                <a:latin typeface="Aptos Display"/>
+              </a:rPr>
+              <a:t>Borrow expertise</a:t>
+            </a:r>
+            <a:r>
+              <a:rPr lang="en-US" sz="2000" b="1" dirty="0">
+                <a:solidFill>
+                  <a:srgbClr val="FFFFFF"/>
+                </a:solidFill>
+                <a:latin typeface="Aptos Display"/>
+              </a:rPr>
+              <a:t> from your organization</a:t>
+            </a:r>
+            <a:r>
+              <a:rPr sz="2000" b="1" dirty="0">
+                <a:solidFill>
+                  <a:srgbClr val="FFFFFF"/>
+                </a:solidFill>
+                <a:latin typeface="Aptos Display"/>
+              </a:rPr>
+              <a:t>. Keep product ownership.</a:t>
+            </a:r>
+          </a:p>
+        </p:txBody>
+      </p:sp>
+      <p:sp>
+        <p:nvSpPr>
+          <p:cNvPr id="19" name="Rounded Rectangle 4">
+            <a:extLst>
+              <a:ext uri="{FF2B5EF4-FFF2-40B4-BE49-F238E27FC236}">
+                <a16:creationId xmlns:a16="http://schemas.microsoft.com/office/drawing/2014/main" id="{11D39324-2762-08FD-6268-45EDFE4A53E3}"/>
+              </a:ext>
+            </a:extLst>
+          </p:cNvPr>
+          <p:cNvSpPr/>
+          <p:nvPr/>
+        </p:nvSpPr>
+        <p:spPr>
+          <a:xfrm>
+            <a:off x="6248400" y="1748158"/>
+            <a:ext cx="5486400" cy="3707022"/>
+          </a:xfrm>
+          <a:prstGeom prst="roundRect">
+            <a:avLst>
+              <a:gd name="adj" fmla="val 7334"/>
+            </a:avLst>
+          </a:prstGeom>
+          <a:solidFill>
+            <a:srgbClr val="E9F1FB"/>
+          </a:solidFill>
+          <a:ln>
+            <a:noFill/>
+          </a:ln>
+          <a:effectLst/>
+        </p:spPr>
+        <p:style>
+          <a:lnRef idx="1">
+            <a:schemeClr val="accent1"/>
+          </a:lnRef>
+          <a:fillRef idx="3">
+            <a:schemeClr val="accent1"/>
+          </a:fillRef>
+          <a:effectRef idx="2">
+            <a:schemeClr val="accent1"/>
+          </a:effectRef>
+          <a:fontRef idx="minor">
+            <a:schemeClr val="lt1"/>
+          </a:fontRef>
+        </p:style>
+        <p:txBody>
+          <a:bodyPr rtlCol="0" anchor="ctr"/>
+          <a:lstStyle/>
+          <a:p>
+            <a:endParaRPr/>
+          </a:p>
+        </p:txBody>
+      </p:sp>
+      <p:sp>
+        <p:nvSpPr>
+          <p:cNvPr id="20" name="TextBox 19">
+            <a:extLst>
+              <a:ext uri="{FF2B5EF4-FFF2-40B4-BE49-F238E27FC236}">
+                <a16:creationId xmlns:a16="http://schemas.microsoft.com/office/drawing/2014/main" id="{B5BE0993-DA21-3D5B-A442-AD34A197EE69}"/>
+              </a:ext>
+            </a:extLst>
+          </p:cNvPr>
+          <p:cNvSpPr txBox="1"/>
+          <p:nvPr/>
+        </p:nvSpPr>
+        <p:spPr>
+          <a:xfrm>
+            <a:off x="365760" y="1892072"/>
+            <a:ext cx="5486400" cy="707886"/>
+          </a:xfrm>
+          <a:prstGeom prst="rect">
+            <a:avLst/>
+          </a:prstGeom>
+          <a:noFill/>
+        </p:spPr>
+        <p:txBody>
+          <a:bodyPr wrap="square" rtlCol="0">
+            <a:spAutoFit/>
+          </a:bodyPr>
+          <a:lstStyle/>
+          <a:p>
+            <a:pPr algn="ctr"/>
+            <a:r>
+              <a:rPr lang="en-US" sz="4000" b="1" dirty="0">
+                <a:solidFill>
+                  <a:srgbClr val="F97316"/>
+                </a:solidFill>
+                <a:latin typeface="Aptos" panose="020B0004020202020204" pitchFamily="34" charset="0"/>
+              </a:rPr>
+              <a:t>OWN</a:t>
+            </a:r>
+          </a:p>
+        </p:txBody>
+      </p:sp>
+      <p:sp>
+        <p:nvSpPr>
+          <p:cNvPr id="22" name="TextBox 21">
+            <a:extLst>
+              <a:ext uri="{FF2B5EF4-FFF2-40B4-BE49-F238E27FC236}">
+                <a16:creationId xmlns:a16="http://schemas.microsoft.com/office/drawing/2014/main" id="{FAD641A7-263D-A057-BCA2-AA08F2B6313B}"/>
+              </a:ext>
+            </a:extLst>
+          </p:cNvPr>
+          <p:cNvSpPr txBox="1"/>
+          <p:nvPr/>
+        </p:nvSpPr>
+        <p:spPr>
+          <a:xfrm>
+            <a:off x="6248400" y="1892072"/>
+            <a:ext cx="5486400" cy="707886"/>
+          </a:xfrm>
+          <a:prstGeom prst="rect">
+            <a:avLst/>
+          </a:prstGeom>
+          <a:noFill/>
+        </p:spPr>
+        <p:txBody>
+          <a:bodyPr wrap="square" rtlCol="0">
+            <a:spAutoFit/>
+          </a:bodyPr>
+          <a:lstStyle/>
+          <a:p>
+            <a:pPr algn="ctr"/>
+            <a:r>
+              <a:rPr lang="en-US" sz="4000" b="1" dirty="0">
+                <a:solidFill>
+                  <a:srgbClr val="3B82F6"/>
+                </a:solidFill>
+                <a:latin typeface="Aptos" panose="020B0004020202020204" pitchFamily="34" charset="0"/>
+              </a:rPr>
+              <a:t>BORROW</a:t>
+            </a:r>
+          </a:p>
+        </p:txBody>
+      </p:sp>
+      <p:cxnSp>
+        <p:nvCxnSpPr>
+          <p:cNvPr id="24" name="Straight Connector 23">
+            <a:extLst>
+              <a:ext uri="{FF2B5EF4-FFF2-40B4-BE49-F238E27FC236}">
+                <a16:creationId xmlns:a16="http://schemas.microsoft.com/office/drawing/2014/main" id="{4E648204-F497-5152-2C64-ECEDAA84540D}"/>
+              </a:ext>
+            </a:extLst>
+          </p:cNvPr>
+          <p:cNvCxnSpPr/>
+          <p:nvPr/>
+        </p:nvCxnSpPr>
+        <p:spPr>
+          <a:xfrm>
+            <a:off x="543697" y="2637030"/>
+            <a:ext cx="5115698" cy="0"/>
+          </a:xfrm>
+          <a:prstGeom prst="line">
+            <a:avLst/>
+          </a:prstGeom>
+          <a:ln>
+            <a:solidFill>
+              <a:schemeClr val="bg1">
+                <a:lumMod val="85000"/>
+              </a:schemeClr>
+            </a:solidFill>
+          </a:ln>
+          <a:effectLst/>
+        </p:spPr>
+        <p:style>
+          <a:lnRef idx="2">
+            <a:schemeClr val="accent1"/>
+          </a:lnRef>
+          <a:fillRef idx="0">
+            <a:schemeClr val="accent1"/>
+          </a:fillRef>
+          <a:effectRef idx="1">
+            <a:schemeClr val="accent1"/>
+          </a:effectRef>
+          <a:fontRef idx="minor">
+            <a:schemeClr val="tx1"/>
+          </a:fontRef>
+        </p:style>
+      </p:cxnSp>
+      <p:cxnSp>
+        <p:nvCxnSpPr>
+          <p:cNvPr id="25" name="Straight Connector 24">
+            <a:extLst>
+              <a:ext uri="{FF2B5EF4-FFF2-40B4-BE49-F238E27FC236}">
+                <a16:creationId xmlns:a16="http://schemas.microsoft.com/office/drawing/2014/main" id="{BC36063B-1C9B-6027-A453-EB20CF8A324C}"/>
+              </a:ext>
+            </a:extLst>
+          </p:cNvPr>
+          <p:cNvCxnSpPr/>
+          <p:nvPr/>
+        </p:nvCxnSpPr>
+        <p:spPr>
+          <a:xfrm>
+            <a:off x="6437870" y="2637030"/>
+            <a:ext cx="5115698" cy="0"/>
+          </a:xfrm>
+          <a:prstGeom prst="line">
+            <a:avLst/>
+          </a:prstGeom>
+          <a:ln>
+            <a:solidFill>
+              <a:schemeClr val="bg1">
+                <a:lumMod val="85000"/>
+              </a:schemeClr>
+            </a:solidFill>
+          </a:ln>
+          <a:effectLst/>
+        </p:spPr>
+        <p:style>
+          <a:lnRef idx="2">
+            <a:schemeClr val="accent1"/>
+          </a:lnRef>
+          <a:fillRef idx="0">
+            <a:schemeClr val="accent1"/>
+          </a:fillRef>
+          <a:effectRef idx="1">
+            <a:schemeClr val="accent1"/>
+          </a:effectRef>
+          <a:fontRef idx="minor">
+            <a:schemeClr val="tx1"/>
+          </a:fontRef>
+        </p:style>
+      </p:cxnSp>
+      <p:sp>
+        <p:nvSpPr>
+          <p:cNvPr id="27" name="TextBox 26">
+            <a:extLst>
+              <a:ext uri="{FF2B5EF4-FFF2-40B4-BE49-F238E27FC236}">
+                <a16:creationId xmlns:a16="http://schemas.microsoft.com/office/drawing/2014/main" id="{0F622C4D-D1A1-74FE-B3EB-0A20AA3415B0}"/>
+              </a:ext>
+            </a:extLst>
+          </p:cNvPr>
+          <p:cNvSpPr txBox="1"/>
+          <p:nvPr/>
+        </p:nvSpPr>
+        <p:spPr>
+          <a:xfrm>
+            <a:off x="1404407" y="2867262"/>
+            <a:ext cx="4254988" cy="2162708"/>
+          </a:xfrm>
+          <a:prstGeom prst="rect">
+            <a:avLst/>
+          </a:prstGeom>
+          <a:noFill/>
+        </p:spPr>
+        <p:txBody>
+          <a:bodyPr wrap="square" tIns="0" rIns="45720" bIns="0">
+            <a:spAutoFit/>
+          </a:bodyPr>
+          <a:lstStyle/>
+          <a:p>
+            <a:pPr algn="l">
+              <a:lnSpc>
+                <a:spcPct val="150000"/>
+              </a:lnSpc>
+            </a:pPr>
+            <a:r>
+              <a:rPr lang="en-US" sz="2400" dirty="0">
+                <a:solidFill>
+                  <a:srgbClr val="0F2343"/>
+                </a:solidFill>
+                <a:latin typeface="Aptos"/>
+              </a:rPr>
+              <a:t>Business interaction</a:t>
+            </a:r>
+          </a:p>
+          <a:p>
+            <a:pPr algn="l">
+              <a:lnSpc>
+                <a:spcPct val="150000"/>
+              </a:lnSpc>
+            </a:pPr>
+            <a:r>
+              <a:rPr lang="en-US" sz="2400" dirty="0">
+                <a:solidFill>
+                  <a:srgbClr val="0F2343"/>
+                </a:solidFill>
+                <a:latin typeface="Aptos"/>
+              </a:rPr>
+              <a:t>Product behavior</a:t>
+            </a:r>
+          </a:p>
+          <a:p>
+            <a:pPr algn="l">
+              <a:lnSpc>
+                <a:spcPct val="150000"/>
+              </a:lnSpc>
+            </a:pPr>
+            <a:r>
+              <a:rPr lang="en-US" sz="2400" dirty="0">
+                <a:solidFill>
+                  <a:srgbClr val="0F2343"/>
+                </a:solidFill>
+                <a:latin typeface="Aptos"/>
+              </a:rPr>
+              <a:t>Software quality</a:t>
+            </a:r>
+          </a:p>
+          <a:p>
+            <a:pPr algn="l">
+              <a:lnSpc>
+                <a:spcPct val="150000"/>
+              </a:lnSpc>
+            </a:pPr>
+            <a:r>
+              <a:rPr lang="en-US" sz="2400" dirty="0">
+                <a:solidFill>
+                  <a:srgbClr val="0F2343"/>
+                </a:solidFill>
+                <a:latin typeface="Aptos"/>
+              </a:rPr>
+              <a:t>CI/CD</a:t>
+            </a:r>
+            <a:endParaRPr sz="2400" dirty="0">
+              <a:solidFill>
+                <a:srgbClr val="0F2343"/>
+              </a:solidFill>
+              <a:latin typeface="Aptos"/>
+            </a:endParaRPr>
+          </a:p>
+        </p:txBody>
+      </p:sp>
+      <p:sp>
+        <p:nvSpPr>
+          <p:cNvPr id="30" name="TextBox 29">
+            <a:extLst>
+              <a:ext uri="{FF2B5EF4-FFF2-40B4-BE49-F238E27FC236}">
+                <a16:creationId xmlns:a16="http://schemas.microsoft.com/office/drawing/2014/main" id="{8660F76A-B17B-6B86-FDF2-5721256C5003}"/>
+              </a:ext>
+            </a:extLst>
+          </p:cNvPr>
+          <p:cNvSpPr txBox="1"/>
+          <p:nvPr/>
+        </p:nvSpPr>
+        <p:spPr>
+          <a:xfrm>
+            <a:off x="7298580" y="2867262"/>
+            <a:ext cx="4254988" cy="2162708"/>
+          </a:xfrm>
+          <a:prstGeom prst="rect">
+            <a:avLst/>
+          </a:prstGeom>
+          <a:noFill/>
+        </p:spPr>
+        <p:txBody>
+          <a:bodyPr wrap="square" tIns="0" rIns="45720" bIns="0">
+            <a:spAutoFit/>
+          </a:bodyPr>
+          <a:lstStyle/>
+          <a:p>
+            <a:pPr algn="l">
+              <a:lnSpc>
+                <a:spcPct val="150000"/>
+              </a:lnSpc>
+            </a:pPr>
+            <a:r>
+              <a:rPr lang="en-US" sz="2400" dirty="0">
+                <a:solidFill>
+                  <a:srgbClr val="0F2343"/>
+                </a:solidFill>
+                <a:latin typeface="Aptos"/>
+              </a:rPr>
+              <a:t>Cybersecurity</a:t>
+            </a:r>
+          </a:p>
+          <a:p>
+            <a:pPr algn="l">
+              <a:lnSpc>
+                <a:spcPct val="150000"/>
+              </a:lnSpc>
+            </a:pPr>
+            <a:r>
+              <a:rPr lang="en-US" sz="2400" dirty="0">
+                <a:solidFill>
+                  <a:srgbClr val="0F2343"/>
+                </a:solidFill>
+                <a:latin typeface="Aptos"/>
+              </a:rPr>
+              <a:t>Infrastructure</a:t>
+            </a:r>
+          </a:p>
+          <a:p>
+            <a:pPr algn="l">
+              <a:lnSpc>
+                <a:spcPct val="150000"/>
+              </a:lnSpc>
+            </a:pPr>
+            <a:r>
+              <a:rPr lang="en-US" sz="2400" dirty="0">
+                <a:solidFill>
+                  <a:srgbClr val="0F2343"/>
+                </a:solidFill>
+                <a:latin typeface="Aptos"/>
+              </a:rPr>
+              <a:t>Reliability expertise</a:t>
+            </a:r>
+          </a:p>
+          <a:p>
+            <a:pPr algn="l">
+              <a:lnSpc>
+                <a:spcPct val="150000"/>
+              </a:lnSpc>
+            </a:pPr>
+            <a:r>
+              <a:rPr lang="en-US" sz="2400" dirty="0">
+                <a:solidFill>
+                  <a:srgbClr val="0F2343"/>
+                </a:solidFill>
+                <a:latin typeface="Aptos"/>
+              </a:rPr>
+              <a:t>UI/UX</a:t>
+            </a:r>
+            <a:endParaRPr sz="2400" dirty="0">
+              <a:solidFill>
+                <a:srgbClr val="0F2343"/>
+              </a:solidFill>
+              <a:latin typeface="Aptos"/>
+            </a:endParaRPr>
+          </a:p>
+        </p:txBody>
+      </p:sp>
+    </p:spTree>
+    <p:extLst>
+      <p:ext uri="{BB962C8B-B14F-4D97-AF65-F5344CB8AC3E}">
+        <p14:creationId xmlns:p14="http://schemas.microsoft.com/office/powerpoint/2010/main" val="1035564382"/>
+      </p:ext>
+    </p:extLst>
+  </p:cSld>
+  <p:clrMapOvr>
+    <a:masterClrMapping/>
+  </p:clrMapOvr>
+</p:sld>
+</file>
+
+<file path=ppt/slides/slide7.xml><?xml version="1.0" encoding="utf-8"?>
+<p:sld xmlns:a="http://schemas.openxmlformats.org/drawingml/2006/main" xmlns:r="http://schemas.openxmlformats.org/officeDocument/2006/relationships" xmlns:p="http://schemas.openxmlformats.org/presentationml/2006/main">
+  <p:cSld>
+    <p:spTree>
+      <p:nvGrpSpPr>
+        <p:cNvPr id="1" name="">
+          <a:extLst>
+            <a:ext uri="{FF2B5EF4-FFF2-40B4-BE49-F238E27FC236}">
               <a16:creationId xmlns:a16="http://schemas.microsoft.com/office/drawing/2014/main" id="{6EA2DBCE-072F-C084-65A4-4E814DB5EF4D}"/>
             </a:ext>
           </a:extLst>
@@ -8600,13 +11633,13 @@
           <a:p>
             <a:pPr algn="l"/>
             <a:r>
-              <a:rPr lang="en-US" sz="4000" b="1" i="0" dirty="0">
+              <a:rPr sz="4000" b="1">
                 <a:solidFill>
                   <a:srgbClr val="0F2343"/>
                 </a:solidFill>
                 <a:latin typeface="Aptos Display"/>
               </a:rPr>
-              <a:t>Case of study: strengthening the engineering of a DSS improved throughput and quality</a:t>
+              <a:t>Case study: strengthening the engineering of a DSS improved throughput and quality</a:t>
             </a:r>
             <a:endParaRPr sz="4000" b="1" i="0" baseline="30000" dirty="0">
               <a:solidFill>
@@ -10081,7 +13114,7 @@
 </p:sld>
 </file>
 
-<file path=ppt/slides/slide7.xml><?xml version="1.0" encoding="utf-8"?>
+<file path=ppt/slides/slide8.xml><?xml version="1.0" encoding="utf-8"?>
 <p:sld xmlns:a="http://schemas.openxmlformats.org/drawingml/2006/main" xmlns:r="http://schemas.openxmlformats.org/officeDocument/2006/relationships" xmlns:p="http://schemas.openxmlformats.org/presentationml/2006/main">
   <p:cSld>
     <p:spTree>
@@ -10242,16 +13275,16 @@
           <a:p>
             <a:pPr algn="l"/>
             <a:r>
-              <a:rPr lang="en-US" sz="4000" b="1" i="0" dirty="0">
+              <a:rPr lang="en-US" sz="4000" b="1" dirty="0">
                 <a:solidFill>
                   <a:srgbClr val="0F2343"/>
                 </a:solidFill>
                 <a:latin typeface="Aptos Display"/>
               </a:rPr>
-              <a:t>AI-coding assistants make this transition more urgent: they </a:t>
-            </a:r>
-            <a:r>
-              <a:rPr lang="en-US" sz="4000" b="1" i="0" dirty="0">
+              <a:t>AI-coding assistants require the engineering investment urgently: they </a:t>
+            </a:r>
+            <a:r>
+              <a:rPr lang="en-US" sz="4000" b="1" dirty="0">
                 <a:solidFill>
                   <a:srgbClr val="F97316"/>
                 </a:solidFill>
@@ -10260,13 +13293,13 @@
               <a:t>amplify</a:t>
             </a:r>
             <a:r>
-              <a:rPr lang="en-US" sz="4000" b="1" i="0" dirty="0">
+              <a:rPr lang="en-US" sz="4000" b="1" dirty="0">
                 <a:solidFill>
                   <a:srgbClr val="0F2343"/>
                 </a:solidFill>
                 <a:latin typeface="Aptos Display"/>
               </a:rPr>
-              <a:t> existing practices</a:t>
+              <a:t> your practices</a:t>
             </a:r>
             <a:endParaRPr sz="4000" b="1" i="0" baseline="30000" dirty="0">
               <a:solidFill>
@@ -11212,89 +14245,6 @@
             <a:extLst>
               <a:ext uri="{FF2B5EF4-FFF2-40B4-BE49-F238E27FC236}">
                 <a16:creationId xmlns:a16="http://schemas.microsoft.com/office/drawing/2014/main" id="{C0D0DD34-B5B9-F297-EEB0-CCC0C1C8BFB3}"/>
-              </a:ext>
-            </a:extLst>
-          </p:cNvPr>
-          <p:cNvPicPr>
-            <a:picLocks noChangeAspect="1"/>
-          </p:cNvPicPr>
-          <p:nvPr/>
-        </p:nvPicPr>
-        <p:blipFill>
-          <a:blip>
-            <a:extLst>
-              <a:ext uri="{96DAC541-7B7A-43D3-8B79-37D633B846F1}">
-                <asvg:svgBlip xmlns:asvg="http://schemas.microsoft.com/office/drawing/2016/SVG/main" r:embed="rId2"/>
-              </a:ext>
-            </a:extLst>
-          </a:blip>
-          <a:stretch>
-            <a:fillRect/>
-          </a:stretch>
-        </p:blipFill>
-        <p:spPr>
-          <a:xfrm>
-            <a:off x="1041652" y="2519304"/>
-            <a:ext cx="731520" cy="731520"/>
-          </a:xfrm>
-          <a:prstGeom prst="rect">
-            <a:avLst/>
-          </a:prstGeom>
-        </p:spPr>
-      </p:pic>
-      <p:sp>
-        <p:nvSpPr>
-          <p:cNvPr id="77" name="TextBox 76">
-            <a:extLst>
-              <a:ext uri="{FF2B5EF4-FFF2-40B4-BE49-F238E27FC236}">
-                <a16:creationId xmlns:a16="http://schemas.microsoft.com/office/drawing/2014/main" id="{4D1787E6-CC16-93A4-0161-6F5E0D7F47B5}"/>
-              </a:ext>
-            </a:extLst>
-          </p:cNvPr>
-          <p:cNvSpPr txBox="1"/>
-          <p:nvPr/>
-        </p:nvSpPr>
-        <p:spPr>
-          <a:xfrm>
-            <a:off x="554417" y="3361297"/>
-            <a:ext cx="1830084" cy="276999"/>
-          </a:xfrm>
-          <a:prstGeom prst="rect">
-            <a:avLst/>
-          </a:prstGeom>
-          <a:noFill/>
-        </p:spPr>
-        <p:txBody>
-          <a:bodyPr wrap="square" lIns="0" tIns="0" rIns="0" bIns="0" anchor="t">
-            <a:spAutoFit/>
-          </a:bodyPr>
-          <a:lstStyle/>
-          <a:p>
-            <a:pPr algn="ctr"/>
-            <a:r>
-              <a:rPr lang="en-US" b="0" dirty="0">
-                <a:solidFill>
-                  <a:srgbClr val="0F2343"/>
-                </a:solidFill>
-                <a:latin typeface="Aptos"/>
-              </a:rPr>
-              <a:t>Automated testing</a:t>
-            </a:r>
-            <a:endParaRPr b="0" dirty="0">
-              <a:solidFill>
-                <a:srgbClr val="0F2343"/>
-              </a:solidFill>
-              <a:latin typeface="Aptos"/>
-            </a:endParaRPr>
-          </a:p>
-        </p:txBody>
-      </p:sp>
-      <p:pic>
-        <p:nvPicPr>
-          <p:cNvPr id="79" name="Graphic 78" descr="Arrow circle with solid fill">
-            <a:extLst>
-              <a:ext uri="{FF2B5EF4-FFF2-40B4-BE49-F238E27FC236}">
-                <a16:creationId xmlns:a16="http://schemas.microsoft.com/office/drawing/2014/main" id="{B9B0F380-C4CB-DD8F-87D1-0B27A9B63059}"/>
               </a:ext>
             </a:extLst>
           </p:cNvPr>
@@ -11317,7 +14267,7 @@
         </p:blipFill>
         <p:spPr>
           <a:xfrm>
-            <a:off x="2842768" y="2492991"/>
+            <a:off x="1041652" y="2519304"/>
             <a:ext cx="731520" cy="731520"/>
           </a:xfrm>
           <a:prstGeom prst="rect">
@@ -11325,12 +14275,59 @@
           </a:prstGeom>
         </p:spPr>
       </p:pic>
+      <p:sp>
+        <p:nvSpPr>
+          <p:cNvPr id="77" name="TextBox 76">
+            <a:extLst>
+              <a:ext uri="{FF2B5EF4-FFF2-40B4-BE49-F238E27FC236}">
+                <a16:creationId xmlns:a16="http://schemas.microsoft.com/office/drawing/2014/main" id="{4D1787E6-CC16-93A4-0161-6F5E0D7F47B5}"/>
+              </a:ext>
+            </a:extLst>
+          </p:cNvPr>
+          <p:cNvSpPr txBox="1"/>
+          <p:nvPr/>
+        </p:nvSpPr>
+        <p:spPr>
+          <a:xfrm>
+            <a:off x="554417" y="3361297"/>
+            <a:ext cx="1830084" cy="276999"/>
+          </a:xfrm>
+          <a:prstGeom prst="rect">
+            <a:avLst/>
+          </a:prstGeom>
+          <a:noFill/>
+        </p:spPr>
+        <p:txBody>
+          <a:bodyPr wrap="square" lIns="0" tIns="0" rIns="0" bIns="0" anchor="t">
+            <a:spAutoFit/>
+          </a:bodyPr>
+          <a:lstStyle/>
+          <a:p>
+            <a:pPr algn="ctr"/>
+            <a:r>
+              <a:rPr lang="en-US" b="0" dirty="0">
+                <a:solidFill>
+                  <a:srgbClr val="0F2343"/>
+                </a:solidFill>
+                <a:latin typeface="Aptos"/>
+              </a:rPr>
+              <a:t>Automated testing</a:t>
+            </a:r>
+            <a:endParaRPr b="0" dirty="0">
+              <a:solidFill>
+                <a:srgbClr val="0F2343"/>
+              </a:solidFill>
+              <a:latin typeface="Aptos"/>
+            </a:endParaRPr>
+          </a:p>
+        </p:txBody>
+      </p:sp>
       <p:pic>
         <p:nvPicPr>
-          <p:cNvPr id="81" name="Graphic 80" descr="Layers Design with solid fill">
+          <p:cNvPr id="79" name="Graphic 78" descr="Arrow circle with solid fill">
             <a:extLst>
               <a:ext uri="{FF2B5EF4-FFF2-40B4-BE49-F238E27FC236}">
-                <a16:creationId xmlns:a16="http://schemas.microsoft.com/office/drawing/2014/main" id="{547F71B6-11C7-5617-E6E6-0FD1D3325729}"/>
+                <a16:creationId xmlns:a16="http://schemas.microsoft.com/office/drawing/2014/main" id="{B9B0F380-C4CB-DD8F-87D1-0B27A9B63059}"/>
               </a:ext>
             </a:extLst>
           </p:cNvPr>
@@ -11353,246 +14350,20 @@
         </p:blipFill>
         <p:spPr>
           <a:xfrm>
-            <a:off x="4475988" y="2407682"/>
-            <a:ext cx="914400" cy="914400"/>
+            <a:off x="2842768" y="2492991"/>
+            <a:ext cx="731520" cy="731520"/>
           </a:xfrm>
           <a:prstGeom prst="rect">
             <a:avLst/>
           </a:prstGeom>
         </p:spPr>
       </p:pic>
-      <p:sp>
-        <p:nvSpPr>
-          <p:cNvPr id="87" name="Rounded Rectangle 17">
+      <p:pic>
+        <p:nvPicPr>
+          <p:cNvPr id="81" name="Graphic 80" descr="Layers Design with solid fill">
             <a:extLst>
               <a:ext uri="{FF2B5EF4-FFF2-40B4-BE49-F238E27FC236}">
-                <a16:creationId xmlns:a16="http://schemas.microsoft.com/office/drawing/2014/main" id="{DD7DA103-519B-866E-846A-72CD5362BFBF}"/>
-              </a:ext>
-            </a:extLst>
-          </p:cNvPr>
-          <p:cNvSpPr/>
-          <p:nvPr/>
-        </p:nvSpPr>
-        <p:spPr>
-          <a:xfrm>
-            <a:off x="6675120" y="4768596"/>
-            <a:ext cx="960120" cy="822960"/>
-          </a:xfrm>
-          <a:prstGeom prst="roundRect">
-            <a:avLst/>
-          </a:prstGeom>
-          <a:solidFill>
-            <a:srgbClr val="EFF6FF"/>
-          </a:solidFill>
-          <a:ln w="12700">
-            <a:solidFill>
-              <a:srgbClr val="EFF6FF"/>
-            </a:solidFill>
-          </a:ln>
-        </p:spPr>
-        <p:style>
-          <a:lnRef idx="1">
-            <a:schemeClr val="accent1"/>
-          </a:lnRef>
-          <a:fillRef idx="3">
-            <a:schemeClr val="accent1"/>
-          </a:fillRef>
-          <a:effectRef idx="2">
-            <a:schemeClr val="accent1"/>
-          </a:effectRef>
-          <a:fontRef idx="minor">
-            <a:schemeClr val="lt1"/>
-          </a:fontRef>
-        </p:style>
-        <p:txBody>
-          <a:bodyPr rtlCol="0" anchor="ctr"/>
-          <a:lstStyle/>
-          <a:p>
-            <a:pPr algn="ctr"/>
-            <a:r>
-              <a:rPr lang="en-US" sz="2800" b="1" dirty="0">
-                <a:solidFill>
-                  <a:srgbClr val="3B82F6"/>
-                </a:solidFill>
-              </a:rPr>
-              <a:t>AI</a:t>
-            </a:r>
-            <a:endParaRPr sz="2800" b="1" dirty="0">
-              <a:solidFill>
-                <a:srgbClr val="3B82F6"/>
-              </a:solidFill>
-            </a:endParaRPr>
-          </a:p>
-        </p:txBody>
-      </p:sp>
-      <p:sp>
-        <p:nvSpPr>
-          <p:cNvPr id="95" name="TextBox 94">
-            <a:extLst>
-              <a:ext uri="{FF2B5EF4-FFF2-40B4-BE49-F238E27FC236}">
-                <a16:creationId xmlns:a16="http://schemas.microsoft.com/office/drawing/2014/main" id="{3C62797A-E0E1-EF48-8CD7-79020325176D}"/>
-              </a:ext>
-            </a:extLst>
-          </p:cNvPr>
-          <p:cNvSpPr txBox="1"/>
-          <p:nvPr/>
-        </p:nvSpPr>
-        <p:spPr>
-          <a:xfrm>
-            <a:off x="2790107" y="5603994"/>
-            <a:ext cx="1066408" cy="492443"/>
-          </a:xfrm>
-          <a:prstGeom prst="rect">
-            <a:avLst/>
-          </a:prstGeom>
-          <a:noFill/>
-        </p:spPr>
-        <p:txBody>
-          <a:bodyPr wrap="square" lIns="0" tIns="0" rIns="0" bIns="0" anchor="t">
-            <a:spAutoFit/>
-          </a:bodyPr>
-          <a:lstStyle/>
-          <a:p>
-            <a:pPr algn="ctr"/>
-            <a:r>
-              <a:rPr lang="en-US" sz="1600" b="0" dirty="0">
-                <a:solidFill>
-                  <a:srgbClr val="0F2343"/>
-                </a:solidFill>
-                <a:latin typeface="Aptos"/>
-              </a:rPr>
-              <a:t>Manual processes</a:t>
-            </a:r>
-            <a:endParaRPr sz="1600" b="0" dirty="0">
-              <a:solidFill>
-                <a:srgbClr val="0F2343"/>
-              </a:solidFill>
-              <a:latin typeface="Aptos"/>
-            </a:endParaRPr>
-          </a:p>
-        </p:txBody>
-      </p:sp>
-      <p:sp>
-        <p:nvSpPr>
-          <p:cNvPr id="97" name="TextBox 96">
-            <a:extLst>
-              <a:ext uri="{FF2B5EF4-FFF2-40B4-BE49-F238E27FC236}">
-                <a16:creationId xmlns:a16="http://schemas.microsoft.com/office/drawing/2014/main" id="{890B4742-721E-7C2E-7B57-8012CF4CF34E}"/>
-              </a:ext>
-            </a:extLst>
-          </p:cNvPr>
-          <p:cNvSpPr txBox="1"/>
-          <p:nvPr/>
-        </p:nvSpPr>
-        <p:spPr>
-          <a:xfrm>
-            <a:off x="4343400" y="5603994"/>
-            <a:ext cx="1309828" cy="492443"/>
-          </a:xfrm>
-          <a:prstGeom prst="rect">
-            <a:avLst/>
-          </a:prstGeom>
-          <a:noFill/>
-        </p:spPr>
-        <p:txBody>
-          <a:bodyPr wrap="square" lIns="0" tIns="0" rIns="0" bIns="0" anchor="t">
-            <a:spAutoFit/>
-          </a:bodyPr>
-          <a:lstStyle/>
-          <a:p>
-            <a:pPr algn="ctr"/>
-            <a:r>
-              <a:rPr lang="en-US" sz="1600" dirty="0">
-                <a:solidFill>
-                  <a:srgbClr val="0F2343"/>
-                </a:solidFill>
-                <a:latin typeface="Aptos"/>
-              </a:rPr>
-              <a:t>Unclear design</a:t>
-            </a:r>
-            <a:endParaRPr sz="1600" b="0" dirty="0">
-              <a:solidFill>
-                <a:srgbClr val="0F2343"/>
-              </a:solidFill>
-              <a:latin typeface="Aptos"/>
-            </a:endParaRPr>
-          </a:p>
-        </p:txBody>
-      </p:sp>
-      <p:sp>
-        <p:nvSpPr>
-          <p:cNvPr id="99" name="TextBox 98">
-            <a:extLst>
-              <a:ext uri="{FF2B5EF4-FFF2-40B4-BE49-F238E27FC236}">
-                <a16:creationId xmlns:a16="http://schemas.microsoft.com/office/drawing/2014/main" id="{0E8CD048-9CCA-8C88-5767-1AF0DF212CF8}"/>
-              </a:ext>
-            </a:extLst>
-          </p:cNvPr>
-          <p:cNvSpPr txBox="1"/>
-          <p:nvPr/>
-        </p:nvSpPr>
-        <p:spPr>
-          <a:xfrm>
-            <a:off x="635697" y="5603994"/>
-            <a:ext cx="1830084" cy="492443"/>
-          </a:xfrm>
-          <a:prstGeom prst="rect">
-            <a:avLst/>
-          </a:prstGeom>
-          <a:noFill/>
-        </p:spPr>
-        <p:txBody>
-          <a:bodyPr wrap="square" lIns="0" tIns="0" rIns="0" bIns="0" anchor="t">
-            <a:spAutoFit/>
-          </a:bodyPr>
-          <a:lstStyle/>
-          <a:p>
-            <a:pPr algn="ctr"/>
-            <a:r>
-              <a:rPr lang="en-US" sz="1600" dirty="0">
-                <a:solidFill>
-                  <a:srgbClr val="0F2343"/>
-                </a:solidFill>
-                <a:latin typeface="Aptos"/>
-              </a:rPr>
-              <a:t>Manual</a:t>
-            </a:r>
-            <a:r>
-              <a:rPr lang="en-US" sz="1600" b="0" dirty="0">
-                <a:solidFill>
-                  <a:srgbClr val="0F2343"/>
-                </a:solidFill>
-                <a:latin typeface="Aptos"/>
-              </a:rPr>
-              <a:t> testing</a:t>
-            </a:r>
-          </a:p>
-          <a:p>
-            <a:pPr algn="ctr"/>
-            <a:r>
-              <a:rPr lang="en-US" sz="1600" dirty="0">
-                <a:solidFill>
-                  <a:srgbClr val="0F2343"/>
-                </a:solidFill>
-                <a:latin typeface="Aptos"/>
-              </a:rPr>
-              <a:t>(or absence)</a:t>
-            </a:r>
-            <a:endParaRPr sz="1600" b="0" dirty="0">
-              <a:solidFill>
-                <a:srgbClr val="0F2343"/>
-              </a:solidFill>
-              <a:latin typeface="Aptos"/>
-            </a:endParaRPr>
-          </a:p>
-        </p:txBody>
-      </p:sp>
-      <p:pic>
-        <p:nvPicPr>
-          <p:cNvPr id="102" name="Graphic 101" descr="Touchscreen with solid fill">
-            <a:extLst>
-              <a:ext uri="{FF2B5EF4-FFF2-40B4-BE49-F238E27FC236}">
-                <a16:creationId xmlns:a16="http://schemas.microsoft.com/office/drawing/2014/main" id="{B7606590-4346-0450-F410-F0A0F70DB806}"/>
+                <a16:creationId xmlns:a16="http://schemas.microsoft.com/office/drawing/2014/main" id="{547F71B6-11C7-5617-E6E6-0FD1D3325729}"/>
               </a:ext>
             </a:extLst>
           </p:cNvPr>
@@ -11615,20 +14386,246 @@
         </p:blipFill>
         <p:spPr>
           <a:xfrm>
-            <a:off x="2895435" y="4838546"/>
-            <a:ext cx="721689" cy="721689"/>
+            <a:off x="4475988" y="2407682"/>
+            <a:ext cx="914400" cy="914400"/>
           </a:xfrm>
           <a:prstGeom prst="rect">
             <a:avLst/>
           </a:prstGeom>
         </p:spPr>
       </p:pic>
+      <p:sp>
+        <p:nvSpPr>
+          <p:cNvPr id="87" name="Rounded Rectangle 17">
+            <a:extLst>
+              <a:ext uri="{FF2B5EF4-FFF2-40B4-BE49-F238E27FC236}">
+                <a16:creationId xmlns:a16="http://schemas.microsoft.com/office/drawing/2014/main" id="{DD7DA103-519B-866E-846A-72CD5362BFBF}"/>
+              </a:ext>
+            </a:extLst>
+          </p:cNvPr>
+          <p:cNvSpPr/>
+          <p:nvPr/>
+        </p:nvSpPr>
+        <p:spPr>
+          <a:xfrm>
+            <a:off x="6675120" y="4768596"/>
+            <a:ext cx="960120" cy="822960"/>
+          </a:xfrm>
+          <a:prstGeom prst="roundRect">
+            <a:avLst/>
+          </a:prstGeom>
+          <a:solidFill>
+            <a:srgbClr val="EFF6FF"/>
+          </a:solidFill>
+          <a:ln w="12700">
+            <a:solidFill>
+              <a:srgbClr val="EFF6FF"/>
+            </a:solidFill>
+          </a:ln>
+        </p:spPr>
+        <p:style>
+          <a:lnRef idx="1">
+            <a:schemeClr val="accent1"/>
+          </a:lnRef>
+          <a:fillRef idx="3">
+            <a:schemeClr val="accent1"/>
+          </a:fillRef>
+          <a:effectRef idx="2">
+            <a:schemeClr val="accent1"/>
+          </a:effectRef>
+          <a:fontRef idx="minor">
+            <a:schemeClr val="lt1"/>
+          </a:fontRef>
+        </p:style>
+        <p:txBody>
+          <a:bodyPr rtlCol="0" anchor="ctr"/>
+          <a:lstStyle/>
+          <a:p>
+            <a:pPr algn="ctr"/>
+            <a:r>
+              <a:rPr lang="en-US" sz="2800" b="1" dirty="0">
+                <a:solidFill>
+                  <a:srgbClr val="3B82F6"/>
+                </a:solidFill>
+              </a:rPr>
+              <a:t>AI</a:t>
+            </a:r>
+            <a:endParaRPr sz="2800" b="1" dirty="0">
+              <a:solidFill>
+                <a:srgbClr val="3B82F6"/>
+              </a:solidFill>
+            </a:endParaRPr>
+          </a:p>
+        </p:txBody>
+      </p:sp>
+      <p:sp>
+        <p:nvSpPr>
+          <p:cNvPr id="95" name="TextBox 94">
+            <a:extLst>
+              <a:ext uri="{FF2B5EF4-FFF2-40B4-BE49-F238E27FC236}">
+                <a16:creationId xmlns:a16="http://schemas.microsoft.com/office/drawing/2014/main" id="{3C62797A-E0E1-EF48-8CD7-79020325176D}"/>
+              </a:ext>
+            </a:extLst>
+          </p:cNvPr>
+          <p:cNvSpPr txBox="1"/>
+          <p:nvPr/>
+        </p:nvSpPr>
+        <p:spPr>
+          <a:xfrm>
+            <a:off x="2790107" y="5603994"/>
+            <a:ext cx="1066408" cy="492443"/>
+          </a:xfrm>
+          <a:prstGeom prst="rect">
+            <a:avLst/>
+          </a:prstGeom>
+          <a:noFill/>
+        </p:spPr>
+        <p:txBody>
+          <a:bodyPr wrap="square" lIns="0" tIns="0" rIns="0" bIns="0" anchor="t">
+            <a:spAutoFit/>
+          </a:bodyPr>
+          <a:lstStyle/>
+          <a:p>
+            <a:pPr algn="ctr"/>
+            <a:r>
+              <a:rPr lang="en-US" sz="1600" b="0" dirty="0">
+                <a:solidFill>
+                  <a:srgbClr val="0F2343"/>
+                </a:solidFill>
+                <a:latin typeface="Aptos"/>
+              </a:rPr>
+              <a:t>Manual processes</a:t>
+            </a:r>
+            <a:endParaRPr sz="1600" b="0" dirty="0">
+              <a:solidFill>
+                <a:srgbClr val="0F2343"/>
+              </a:solidFill>
+              <a:latin typeface="Aptos"/>
+            </a:endParaRPr>
+          </a:p>
+        </p:txBody>
+      </p:sp>
+      <p:sp>
+        <p:nvSpPr>
+          <p:cNvPr id="97" name="TextBox 96">
+            <a:extLst>
+              <a:ext uri="{FF2B5EF4-FFF2-40B4-BE49-F238E27FC236}">
+                <a16:creationId xmlns:a16="http://schemas.microsoft.com/office/drawing/2014/main" id="{890B4742-721E-7C2E-7B57-8012CF4CF34E}"/>
+              </a:ext>
+            </a:extLst>
+          </p:cNvPr>
+          <p:cNvSpPr txBox="1"/>
+          <p:nvPr/>
+        </p:nvSpPr>
+        <p:spPr>
+          <a:xfrm>
+            <a:off x="4343400" y="5603994"/>
+            <a:ext cx="1309828" cy="492443"/>
+          </a:xfrm>
+          <a:prstGeom prst="rect">
+            <a:avLst/>
+          </a:prstGeom>
+          <a:noFill/>
+        </p:spPr>
+        <p:txBody>
+          <a:bodyPr wrap="square" lIns="0" tIns="0" rIns="0" bIns="0" anchor="t">
+            <a:spAutoFit/>
+          </a:bodyPr>
+          <a:lstStyle/>
+          <a:p>
+            <a:pPr algn="ctr"/>
+            <a:r>
+              <a:rPr lang="en-US" sz="1600" dirty="0">
+                <a:solidFill>
+                  <a:srgbClr val="0F2343"/>
+                </a:solidFill>
+                <a:latin typeface="Aptos"/>
+              </a:rPr>
+              <a:t>Unclear design</a:t>
+            </a:r>
+            <a:endParaRPr sz="1600" b="0" dirty="0">
+              <a:solidFill>
+                <a:srgbClr val="0F2343"/>
+              </a:solidFill>
+              <a:latin typeface="Aptos"/>
+            </a:endParaRPr>
+          </a:p>
+        </p:txBody>
+      </p:sp>
+      <p:sp>
+        <p:nvSpPr>
+          <p:cNvPr id="99" name="TextBox 98">
+            <a:extLst>
+              <a:ext uri="{FF2B5EF4-FFF2-40B4-BE49-F238E27FC236}">
+                <a16:creationId xmlns:a16="http://schemas.microsoft.com/office/drawing/2014/main" id="{0E8CD048-9CCA-8C88-5767-1AF0DF212CF8}"/>
+              </a:ext>
+            </a:extLst>
+          </p:cNvPr>
+          <p:cNvSpPr txBox="1"/>
+          <p:nvPr/>
+        </p:nvSpPr>
+        <p:spPr>
+          <a:xfrm>
+            <a:off x="635697" y="5603994"/>
+            <a:ext cx="1830084" cy="492443"/>
+          </a:xfrm>
+          <a:prstGeom prst="rect">
+            <a:avLst/>
+          </a:prstGeom>
+          <a:noFill/>
+        </p:spPr>
+        <p:txBody>
+          <a:bodyPr wrap="square" lIns="0" tIns="0" rIns="0" bIns="0" anchor="t">
+            <a:spAutoFit/>
+          </a:bodyPr>
+          <a:lstStyle/>
+          <a:p>
+            <a:pPr algn="ctr"/>
+            <a:r>
+              <a:rPr lang="en-US" sz="1600" dirty="0">
+                <a:solidFill>
+                  <a:srgbClr val="0F2343"/>
+                </a:solidFill>
+                <a:latin typeface="Aptos"/>
+              </a:rPr>
+              <a:t>Manual</a:t>
+            </a:r>
+            <a:r>
+              <a:rPr lang="en-US" sz="1600" b="0" dirty="0">
+                <a:solidFill>
+                  <a:srgbClr val="0F2343"/>
+                </a:solidFill>
+                <a:latin typeface="Aptos"/>
+              </a:rPr>
+              <a:t> testing</a:t>
+            </a:r>
+          </a:p>
+          <a:p>
+            <a:pPr algn="ctr"/>
+            <a:r>
+              <a:rPr lang="en-US" sz="1600" dirty="0">
+                <a:solidFill>
+                  <a:srgbClr val="0F2343"/>
+                </a:solidFill>
+                <a:latin typeface="Aptos"/>
+              </a:rPr>
+              <a:t>(or absence)</a:t>
+            </a:r>
+            <a:endParaRPr sz="1600" b="0" dirty="0">
+              <a:solidFill>
+                <a:srgbClr val="0F2343"/>
+              </a:solidFill>
+              <a:latin typeface="Aptos"/>
+            </a:endParaRPr>
+          </a:p>
+        </p:txBody>
+      </p:sp>
       <p:pic>
         <p:nvPicPr>
-          <p:cNvPr id="104" name="Graphic 103" descr="Warning with solid fill">
+          <p:cNvPr id="102" name="Graphic 101" descr="Touchscreen with solid fill">
             <a:extLst>
               <a:ext uri="{FF2B5EF4-FFF2-40B4-BE49-F238E27FC236}">
-                <a16:creationId xmlns:a16="http://schemas.microsoft.com/office/drawing/2014/main" id="{B12507AC-2721-0FDD-20E3-E6515004F50E}"/>
+                <a16:creationId xmlns:a16="http://schemas.microsoft.com/office/drawing/2014/main" id="{B7606590-4346-0450-F410-F0A0F70DB806}"/>
               </a:ext>
             </a:extLst>
           </p:cNvPr>
@@ -11651,8 +14648,8 @@
         </p:blipFill>
         <p:spPr>
           <a:xfrm>
-            <a:off x="4639212" y="4822972"/>
-            <a:ext cx="708864" cy="708864"/>
+            <a:off x="2895435" y="4838546"/>
+            <a:ext cx="721689" cy="721689"/>
           </a:xfrm>
           <a:prstGeom prst="rect">
             <a:avLst/>
@@ -11661,10 +14658,10 @@
       </p:pic>
       <p:pic>
         <p:nvPicPr>
-          <p:cNvPr id="106" name="Graphic 105" descr="Sad face with solid fill with solid fill">
+          <p:cNvPr id="104" name="Graphic 103" descr="Warning with solid fill">
             <a:extLst>
               <a:ext uri="{FF2B5EF4-FFF2-40B4-BE49-F238E27FC236}">
-                <a16:creationId xmlns:a16="http://schemas.microsoft.com/office/drawing/2014/main" id="{2E45CDB7-F9DB-FC5F-9749-ED84AD93C39E}"/>
+                <a16:creationId xmlns:a16="http://schemas.microsoft.com/office/drawing/2014/main" id="{B12507AC-2721-0FDD-20E3-E6515004F50E}"/>
               </a:ext>
             </a:extLst>
           </p:cNvPr>
@@ -11687,6 +14684,42 @@
         </p:blipFill>
         <p:spPr>
           <a:xfrm>
+            <a:off x="4639212" y="4822972"/>
+            <a:ext cx="708864" cy="708864"/>
+          </a:xfrm>
+          <a:prstGeom prst="rect">
+            <a:avLst/>
+          </a:prstGeom>
+        </p:spPr>
+      </p:pic>
+      <p:pic>
+        <p:nvPicPr>
+          <p:cNvPr id="106" name="Graphic 105" descr="Sad face with solid fill with solid fill">
+            <a:extLst>
+              <a:ext uri="{FF2B5EF4-FFF2-40B4-BE49-F238E27FC236}">
+                <a16:creationId xmlns:a16="http://schemas.microsoft.com/office/drawing/2014/main" id="{2E45CDB7-F9DB-FC5F-9749-ED84AD93C39E}"/>
+              </a:ext>
+            </a:extLst>
+          </p:cNvPr>
+          <p:cNvPicPr>
+            <a:picLocks noChangeAspect="1"/>
+          </p:cNvPicPr>
+          <p:nvPr/>
+        </p:nvPicPr>
+        <p:blipFill>
+          <a:blip>
+            <a:extLst>
+              <a:ext uri="{96DAC541-7B7A-43D3-8B79-37D633B846F1}">
+                <asvg:svgBlip xmlns:asvg="http://schemas.microsoft.com/office/drawing/2016/SVG/main" r:embed="rId8"/>
+              </a:ext>
+            </a:extLst>
+          </a:blip>
+          <a:stretch>
+            <a:fillRect/>
+          </a:stretch>
+        </p:blipFill>
+        <p:spPr>
+          <a:xfrm>
             <a:off x="1160692" y="4811463"/>
             <a:ext cx="780093" cy="780093"/>
           </a:xfrm>
@@ -11708,7 +14741,7 @@
 </p:sld>
 </file>
 
-<file path=ppt/slides/slide8.xml><?xml version="1.0" encoding="utf-8"?>
+<file path=ppt/slides/slide9.xml><?xml version="1.0" encoding="utf-8"?>
 <p:sld xmlns:a="http://schemas.openxmlformats.org/drawingml/2006/main" xmlns:r="http://schemas.openxmlformats.org/officeDocument/2006/relationships" xmlns:p="http://schemas.openxmlformats.org/presentationml/2006/main">
   <p:cSld>
     <p:spTree>
@@ -11746,7 +14779,7 @@
         <p:spPr>
           <a:xfrm>
             <a:off x="365760" y="213360"/>
-            <a:ext cx="11567160" cy="615553"/>
+            <a:ext cx="11567160" cy="1231106"/>
           </a:xfrm>
           <a:prstGeom prst="rect">
             <a:avLst/>
@@ -11761,13 +14794,22 @@
           <a:p>
             <a:pPr algn="l"/>
             <a:r>
-              <a:rPr lang="en-US" sz="4000" b="1" i="0" dirty="0">
+              <a:rPr lang="en-US" sz="4000" b="1" dirty="0">
                 <a:solidFill>
                   <a:srgbClr val="0F2343"/>
                 </a:solidFill>
                 <a:latin typeface="Aptos Display"/>
               </a:rPr>
-              <a:t>Product ownership as a deliberate choice</a:t>
+              <a:t>A reflection: what could you improve in your team structure and practices</a:t>
+            </a:r>
+            <a:r>
+              <a:rPr sz="4000" b="1" dirty="0">
+                <a:solidFill>
+                  <a:srgbClr val="0F2343"/>
+                </a:solidFill>
+                <a:latin typeface="Aptos Display"/>
+              </a:rPr>
+              <a:t>?</a:t>
             </a:r>
             <a:endParaRPr sz="4000" b="1" i="0" baseline="30000" dirty="0">
               <a:solidFill>
@@ -11778,48 +14820,257 @@
           </a:p>
         </p:txBody>
       </p:sp>
-    </p:spTree>
-    <p:extLst>
-      <p:ext uri="{BB962C8B-B14F-4D97-AF65-F5344CB8AC3E}">
-        <p14:creationId xmlns:p14="http://schemas.microsoft.com/office/powerpoint/2010/main" val="217879742"/>
-      </p:ext>
-    </p:extLst>
-  </p:cSld>
-  <p:clrMapOvr>
-    <a:masterClrMapping/>
-  </p:clrMapOvr>
-</p:sld>
-</file>
-
-<file path=ppt/slides/slide9.xml><?xml version="1.0" encoding="utf-8"?>
-<p:sld xmlns:a="http://schemas.openxmlformats.org/drawingml/2006/main" xmlns:r="http://schemas.openxmlformats.org/officeDocument/2006/relationships" xmlns:p="http://schemas.openxmlformats.org/presentationml/2006/main">
-  <p:cSld>
-    <p:spTree>
-      <p:nvGrpSpPr>
-        <p:cNvPr id="1" name="">
-          <a:extLst>
-            <a:ext uri="{FF2B5EF4-FFF2-40B4-BE49-F238E27FC236}">
-              <a16:creationId xmlns:a16="http://schemas.microsoft.com/office/drawing/2014/main" id="{A19E8281-9896-64B1-6096-21E51F7B9A98}"/>
-            </a:ext>
-          </a:extLst>
-        </p:cNvPr>
-        <p:cNvGrpSpPr/>
-        <p:nvPr/>
-      </p:nvGrpSpPr>
-      <p:grpSpPr>
-        <a:xfrm>
-          <a:off x="0" y="0"/>
-          <a:ext cx="0" cy="0"/>
-          <a:chOff x="0" y="0"/>
-          <a:chExt cx="0" cy="0"/>
-        </a:xfrm>
-      </p:grpSpPr>
-      <p:sp>
-        <p:nvSpPr>
-          <p:cNvPr id="2" name="TextBox 1">
+      <p:sp>
+        <p:nvSpPr>
+          <p:cNvPr id="43" name="Oval 42">
             <a:extLst>
               <a:ext uri="{FF2B5EF4-FFF2-40B4-BE49-F238E27FC236}">
-                <a16:creationId xmlns:a16="http://schemas.microsoft.com/office/drawing/2014/main" id="{1C46D02F-6B0B-996E-8E33-91A236B17836}"/>
+                <a16:creationId xmlns:a16="http://schemas.microsoft.com/office/drawing/2014/main" id="{29593569-2483-EC91-AB7D-E18DAFE8D5D3}"/>
+              </a:ext>
+            </a:extLst>
+          </p:cNvPr>
+          <p:cNvSpPr/>
+          <p:nvPr/>
+        </p:nvSpPr>
+        <p:spPr>
+          <a:xfrm>
+            <a:off x="462280" y="3627120"/>
+            <a:ext cx="3357880" cy="3017520"/>
+          </a:xfrm>
+          <a:prstGeom prst="ellipse">
+            <a:avLst/>
+          </a:prstGeom>
+          <a:solidFill>
+            <a:srgbClr val="F97316">
+              <a:alpha val="65000"/>
+            </a:srgbClr>
+          </a:solidFill>
+          <a:ln>
+            <a:noFill/>
+          </a:ln>
+          <a:effectLst/>
+        </p:spPr>
+        <p:style>
+          <a:lnRef idx="1">
+            <a:schemeClr val="accent1"/>
+          </a:lnRef>
+          <a:fillRef idx="3">
+            <a:schemeClr val="accent1"/>
+          </a:fillRef>
+          <a:effectRef idx="2">
+            <a:schemeClr val="accent1"/>
+          </a:effectRef>
+          <a:fontRef idx="minor">
+            <a:schemeClr val="lt1"/>
+          </a:fontRef>
+        </p:style>
+        <p:txBody>
+          <a:bodyPr rtlCol="0" anchor="ctr"/>
+          <a:lstStyle/>
+          <a:p>
+            <a:pPr algn="ctr"/>
+            <a:endParaRPr lang="en-US" sz="2000" dirty="0">
+              <a:latin typeface="Aptos" panose="020B0004020202020204" pitchFamily="34" charset="0"/>
+            </a:endParaRPr>
+          </a:p>
+        </p:txBody>
+      </p:sp>
+      <p:sp>
+        <p:nvSpPr>
+          <p:cNvPr id="44" name="Oval 43">
+            <a:extLst>
+              <a:ext uri="{FF2B5EF4-FFF2-40B4-BE49-F238E27FC236}">
+                <a16:creationId xmlns:a16="http://schemas.microsoft.com/office/drawing/2014/main" id="{48D34C75-466F-3827-9632-4E29F453AAF4}"/>
+              </a:ext>
+            </a:extLst>
+          </p:cNvPr>
+          <p:cNvSpPr/>
+          <p:nvPr/>
+        </p:nvSpPr>
+        <p:spPr>
+          <a:xfrm>
+            <a:off x="462280" y="1548844"/>
+            <a:ext cx="3357880" cy="3017520"/>
+          </a:xfrm>
+          <a:prstGeom prst="ellipse">
+            <a:avLst/>
+          </a:prstGeom>
+          <a:solidFill>
+            <a:srgbClr val="07142B">
+              <a:alpha val="65000"/>
+            </a:srgbClr>
+          </a:solidFill>
+          <a:ln>
+            <a:noFill/>
+          </a:ln>
+          <a:effectLst/>
+        </p:spPr>
+        <p:style>
+          <a:lnRef idx="1">
+            <a:schemeClr val="accent1"/>
+          </a:lnRef>
+          <a:fillRef idx="3">
+            <a:schemeClr val="accent1"/>
+          </a:fillRef>
+          <a:effectRef idx="2">
+            <a:schemeClr val="accent1"/>
+          </a:effectRef>
+          <a:fontRef idx="minor">
+            <a:schemeClr val="lt1"/>
+          </a:fontRef>
+        </p:style>
+        <p:txBody>
+          <a:bodyPr rtlCol="0" anchor="ctr"/>
+          <a:lstStyle/>
+          <a:p>
+            <a:pPr algn="ctr"/>
+            <a:endParaRPr lang="en-US" sz="2000" dirty="0">
+              <a:latin typeface="Aptos" panose="020B0004020202020204" pitchFamily="34" charset="0"/>
+            </a:endParaRPr>
+          </a:p>
+        </p:txBody>
+      </p:sp>
+      <p:cxnSp>
+        <p:nvCxnSpPr>
+          <p:cNvPr id="45" name="Straight Arrow Connector 44">
+            <a:extLst>
+              <a:ext uri="{FF2B5EF4-FFF2-40B4-BE49-F238E27FC236}">
+                <a16:creationId xmlns:a16="http://schemas.microsoft.com/office/drawing/2014/main" id="{418B315C-5074-6AE9-C194-1714346DE199}"/>
+              </a:ext>
+            </a:extLst>
+          </p:cNvPr>
+          <p:cNvCxnSpPr>
+            <a:cxnSpLocks/>
+          </p:cNvCxnSpPr>
+          <p:nvPr/>
+        </p:nvCxnSpPr>
+        <p:spPr>
+          <a:xfrm>
+            <a:off x="3027680" y="2635794"/>
+            <a:ext cx="1676400" cy="0"/>
+          </a:xfrm>
+          <a:prstGeom prst="straightConnector1">
+            <a:avLst/>
+          </a:prstGeom>
+          <a:ln>
+            <a:solidFill>
+              <a:srgbClr val="07142B"/>
+            </a:solidFill>
+            <a:tailEnd type="triangle"/>
+          </a:ln>
+          <a:effectLst/>
+        </p:spPr>
+        <p:style>
+          <a:lnRef idx="2">
+            <a:schemeClr val="accent1"/>
+          </a:lnRef>
+          <a:fillRef idx="0">
+            <a:schemeClr val="accent1"/>
+          </a:fillRef>
+          <a:effectRef idx="1">
+            <a:schemeClr val="accent1"/>
+          </a:effectRef>
+          <a:fontRef idx="minor">
+            <a:schemeClr val="tx1"/>
+          </a:fontRef>
+        </p:style>
+      </p:cxnSp>
+      <p:cxnSp>
+        <p:nvCxnSpPr>
+          <p:cNvPr id="46" name="Straight Arrow Connector 45">
+            <a:extLst>
+              <a:ext uri="{FF2B5EF4-FFF2-40B4-BE49-F238E27FC236}">
+                <a16:creationId xmlns:a16="http://schemas.microsoft.com/office/drawing/2014/main" id="{A30E2244-EC69-8FB0-2533-72D82DFA77BD}"/>
+              </a:ext>
+            </a:extLst>
+          </p:cNvPr>
+          <p:cNvCxnSpPr>
+            <a:cxnSpLocks/>
+          </p:cNvCxnSpPr>
+          <p:nvPr/>
+        </p:nvCxnSpPr>
+        <p:spPr>
+          <a:xfrm>
+            <a:off x="3027680" y="4090670"/>
+            <a:ext cx="1676400" cy="0"/>
+          </a:xfrm>
+          <a:prstGeom prst="straightConnector1">
+            <a:avLst/>
+          </a:prstGeom>
+          <a:ln>
+            <a:solidFill>
+              <a:srgbClr val="07142B"/>
+            </a:solidFill>
+            <a:tailEnd type="triangle"/>
+          </a:ln>
+          <a:effectLst/>
+        </p:spPr>
+        <p:style>
+          <a:lnRef idx="2">
+            <a:schemeClr val="accent1"/>
+          </a:lnRef>
+          <a:fillRef idx="0">
+            <a:schemeClr val="accent1"/>
+          </a:fillRef>
+          <a:effectRef idx="1">
+            <a:schemeClr val="accent1"/>
+          </a:effectRef>
+          <a:fontRef idx="minor">
+            <a:schemeClr val="tx1"/>
+          </a:fontRef>
+        </p:style>
+      </p:cxnSp>
+      <p:cxnSp>
+        <p:nvCxnSpPr>
+          <p:cNvPr id="47" name="Straight Arrow Connector 46">
+            <a:extLst>
+              <a:ext uri="{FF2B5EF4-FFF2-40B4-BE49-F238E27FC236}">
+                <a16:creationId xmlns:a16="http://schemas.microsoft.com/office/drawing/2014/main" id="{116507B7-F8DA-625B-0349-E6A2E27B504B}"/>
+              </a:ext>
+            </a:extLst>
+          </p:cNvPr>
+          <p:cNvCxnSpPr>
+            <a:cxnSpLocks/>
+          </p:cNvCxnSpPr>
+          <p:nvPr/>
+        </p:nvCxnSpPr>
+        <p:spPr>
+          <a:xfrm>
+            <a:off x="3027680" y="5542924"/>
+            <a:ext cx="1676400" cy="0"/>
+          </a:xfrm>
+          <a:prstGeom prst="straightConnector1">
+            <a:avLst/>
+          </a:prstGeom>
+          <a:ln>
+            <a:solidFill>
+              <a:srgbClr val="07142B"/>
+            </a:solidFill>
+            <a:tailEnd type="triangle"/>
+          </a:ln>
+          <a:effectLst/>
+        </p:spPr>
+        <p:style>
+          <a:lnRef idx="2">
+            <a:schemeClr val="accent1"/>
+          </a:lnRef>
+          <a:fillRef idx="0">
+            <a:schemeClr val="accent1"/>
+          </a:fillRef>
+          <a:effectRef idx="1">
+            <a:schemeClr val="accent1"/>
+          </a:effectRef>
+          <a:fontRef idx="minor">
+            <a:schemeClr val="tx1"/>
+          </a:fontRef>
+        </p:style>
+      </p:cxnSp>
+      <p:sp>
+        <p:nvSpPr>
+          <p:cNvPr id="48" name="TextBox 47">
+            <a:extLst>
+              <a:ext uri="{FF2B5EF4-FFF2-40B4-BE49-F238E27FC236}">
+                <a16:creationId xmlns:a16="http://schemas.microsoft.com/office/drawing/2014/main" id="{BFEDAD77-31D7-B464-D941-127A8BC70511}"/>
               </a:ext>
             </a:extLst>
           </p:cNvPr>
@@ -11828,8 +15079,8 @@
         </p:nvSpPr>
         <p:spPr>
           <a:xfrm>
-            <a:off x="365760" y="213360"/>
-            <a:ext cx="11567160" cy="1231106"/>
+            <a:off x="4873374" y="2297240"/>
+            <a:ext cx="7059546" cy="677108"/>
           </a:xfrm>
           <a:prstGeom prst="rect">
             <a:avLst/>
@@ -11837,34 +15088,353 @@
           <a:noFill/>
         </p:spPr>
         <p:txBody>
-          <a:bodyPr wrap="square" lIns="0" tIns="0" rIns="0" bIns="0" anchor="t">
+          <a:bodyPr wrap="square" tIns="0" rIns="45720" bIns="0">
             <a:spAutoFit/>
           </a:bodyPr>
           <a:lstStyle/>
           <a:p>
             <a:pPr algn="l"/>
             <a:r>
-              <a:rPr lang="en-US" sz="4000" b="1" i="0" dirty="0">
+              <a:rPr lang="en-US" sz="2400" b="1" dirty="0">
                 <a:solidFill>
                   <a:srgbClr val="0F2343"/>
                 </a:solidFill>
-                <a:latin typeface="Aptos Display"/>
-              </a:rPr>
-              <a:t>The OR team owns the product, but it does not need all the skills needed in the team</a:t>
-            </a:r>
-            <a:endParaRPr sz="4000" b="1" i="0" baseline="30000" dirty="0">
+                <a:latin typeface="Aptos"/>
+                <a:sym typeface="Wingdings" panose="05000000000000000000" pitchFamily="2" charset="2"/>
+              </a:rPr>
+              <a:t>Developers</a:t>
+            </a:r>
+            <a:r>
+              <a:rPr lang="en-US" sz="2000" dirty="0">
+                <a:solidFill>
+                  <a:srgbClr val="0F2343"/>
+                </a:solidFill>
+                <a:latin typeface="Aptos"/>
+                <a:sym typeface="Wingdings" panose="05000000000000000000" pitchFamily="2" charset="2"/>
+              </a:rPr>
+              <a:t> to tackle problems unrelated to OR: design a database, data, deployments.</a:t>
+            </a:r>
+            <a:endParaRPr sz="1600" dirty="0">
               <a:solidFill>
                 <a:srgbClr val="0F2343"/>
               </a:solidFill>
-              <a:latin typeface="Aptos Display"/>
+              <a:latin typeface="Aptos"/>
             </a:endParaRPr>
+          </a:p>
+        </p:txBody>
+      </p:sp>
+      <p:sp>
+        <p:nvSpPr>
+          <p:cNvPr id="49" name="TextBox 48">
+            <a:extLst>
+              <a:ext uri="{FF2B5EF4-FFF2-40B4-BE49-F238E27FC236}">
+                <a16:creationId xmlns:a16="http://schemas.microsoft.com/office/drawing/2014/main" id="{0D07A43C-BA10-A97C-9FE7-CE3F37179358}"/>
+              </a:ext>
+            </a:extLst>
+          </p:cNvPr>
+          <p:cNvSpPr txBox="1"/>
+          <p:nvPr/>
+        </p:nvSpPr>
+        <p:spPr>
+          <a:xfrm>
+            <a:off x="4842069" y="5206992"/>
+            <a:ext cx="7059546" cy="677108"/>
+          </a:xfrm>
+          <a:prstGeom prst="rect">
+            <a:avLst/>
+          </a:prstGeom>
+          <a:noFill/>
+        </p:spPr>
+        <p:txBody>
+          <a:bodyPr wrap="square" tIns="0" rIns="45720" bIns="0">
+            <a:spAutoFit/>
+          </a:bodyPr>
+          <a:lstStyle/>
+          <a:p>
+            <a:pPr algn="l"/>
+            <a:r>
+              <a:rPr lang="en-US" sz="2400" b="1" dirty="0">
+                <a:solidFill>
+                  <a:srgbClr val="0F2343"/>
+                </a:solidFill>
+                <a:latin typeface="Aptos"/>
+                <a:sym typeface="Wingdings" panose="05000000000000000000" pitchFamily="2" charset="2"/>
+              </a:rPr>
+              <a:t>Scientists</a:t>
+            </a:r>
+            <a:r>
+              <a:rPr lang="en-US" sz="2000" dirty="0">
+                <a:solidFill>
+                  <a:srgbClr val="0F2343"/>
+                </a:solidFill>
+                <a:latin typeface="Aptos"/>
+                <a:sym typeface="Wingdings" panose="05000000000000000000" pitchFamily="2" charset="2"/>
+              </a:rPr>
+              <a:t> trained in </a:t>
+            </a:r>
+            <a:r>
+              <a:rPr lang="en-US" sz="2000" u="sng" dirty="0">
+                <a:solidFill>
+                  <a:srgbClr val="0F2343"/>
+                </a:solidFill>
+                <a:latin typeface="Aptos"/>
+                <a:sym typeface="Wingdings" panose="05000000000000000000" pitchFamily="2" charset="2"/>
+              </a:rPr>
+              <a:t>some</a:t>
+            </a:r>
+            <a:r>
+              <a:rPr lang="en-US" sz="2000" dirty="0">
+                <a:solidFill>
+                  <a:srgbClr val="0F2343"/>
+                </a:solidFill>
+                <a:latin typeface="Aptos"/>
+                <a:sym typeface="Wingdings" panose="05000000000000000000" pitchFamily="2" charset="2"/>
+              </a:rPr>
+              <a:t> SE elements: SDLC, elicitation, agile, OOP, basics of design, automated testing, TDD, CI.</a:t>
+            </a:r>
+            <a:endParaRPr sz="1600" dirty="0">
+              <a:solidFill>
+                <a:srgbClr val="0F2343"/>
+              </a:solidFill>
+              <a:latin typeface="Aptos"/>
+            </a:endParaRPr>
+          </a:p>
+        </p:txBody>
+      </p:sp>
+      <p:sp>
+        <p:nvSpPr>
+          <p:cNvPr id="50" name="TextBox 49">
+            <a:extLst>
+              <a:ext uri="{FF2B5EF4-FFF2-40B4-BE49-F238E27FC236}">
+                <a16:creationId xmlns:a16="http://schemas.microsoft.com/office/drawing/2014/main" id="{7C848E63-95B3-614C-6A77-057FA3D909F4}"/>
+              </a:ext>
+            </a:extLst>
+          </p:cNvPr>
+          <p:cNvSpPr txBox="1"/>
+          <p:nvPr/>
+        </p:nvSpPr>
+        <p:spPr>
+          <a:xfrm>
+            <a:off x="4842069" y="3587750"/>
+            <a:ext cx="7059546" cy="1005840"/>
+          </a:xfrm>
+          <a:prstGeom prst="rect">
+            <a:avLst/>
+          </a:prstGeom>
+          <a:noFill/>
+        </p:spPr>
+        <p:txBody>
+          <a:bodyPr wrap="square" tIns="0" rIns="45720" bIns="0">
+            <a:spAutoFit/>
+          </a:bodyPr>
+          <a:lstStyle/>
+          <a:p>
+            <a:pPr algn="l"/>
+            <a:r>
+              <a:rPr lang="en-US" sz="2400" b="1" dirty="0">
+                <a:solidFill>
+                  <a:srgbClr val="0F2343"/>
+                </a:solidFill>
+                <a:latin typeface="Aptos"/>
+              </a:rPr>
+              <a:t>OR Engineers</a:t>
+            </a:r>
+            <a:r>
+              <a:rPr sz="2000" b="0" dirty="0">
+                <a:solidFill>
+                  <a:srgbClr val="0F2343"/>
+                </a:solidFill>
+                <a:latin typeface="Aptos"/>
+              </a:rPr>
+              <a:t> </a:t>
+            </a:r>
+            <a:r>
+              <a:rPr lang="en-US" sz="2000" b="0" dirty="0">
+                <a:solidFill>
+                  <a:srgbClr val="0F2343"/>
+                </a:solidFill>
+                <a:latin typeface="Aptos"/>
+              </a:rPr>
+              <a:t>to set</a:t>
+            </a:r>
+            <a:r>
+              <a:rPr sz="2000" b="0" dirty="0">
+                <a:solidFill>
+                  <a:srgbClr val="0F2343"/>
+                </a:solidFill>
+                <a:latin typeface="Aptos"/>
+              </a:rPr>
+              <a:t> </a:t>
+            </a:r>
+            <a:r>
+              <a:rPr lang="en-US" sz="2000" b="0" dirty="0">
+                <a:solidFill>
+                  <a:srgbClr val="0F2343"/>
+                </a:solidFill>
+                <a:latin typeface="Aptos"/>
+              </a:rPr>
+              <a:t>scientific</a:t>
+            </a:r>
+            <a:r>
+              <a:rPr sz="2000" b="0" dirty="0">
+                <a:solidFill>
+                  <a:srgbClr val="0F2343"/>
+                </a:solidFill>
+                <a:latin typeface="Aptos"/>
+              </a:rPr>
+              <a:t> </a:t>
+            </a:r>
+            <a:r>
+              <a:rPr lang="en-US" sz="2000" b="0" dirty="0">
+                <a:solidFill>
+                  <a:srgbClr val="0F2343"/>
+                </a:solidFill>
+                <a:latin typeface="Aptos"/>
+              </a:rPr>
+              <a:t>development needs: optimization model testing</a:t>
+            </a:r>
+            <a:r>
+              <a:rPr sz="2000" b="0" dirty="0">
+                <a:solidFill>
+                  <a:srgbClr val="0F2343"/>
+                </a:solidFill>
+                <a:latin typeface="Aptos"/>
+              </a:rPr>
+              <a:t>, </a:t>
+            </a:r>
+            <a:r>
+              <a:rPr lang="en-US" sz="2000" b="0" dirty="0">
+                <a:solidFill>
+                  <a:srgbClr val="0F2343"/>
+                </a:solidFill>
+                <a:latin typeface="Aptos"/>
+              </a:rPr>
+              <a:t>solver-agnostic design, experimentation suite, among others.</a:t>
+            </a:r>
+            <a:endParaRPr sz="1600" dirty="0">
+              <a:solidFill>
+                <a:srgbClr val="0F2343"/>
+              </a:solidFill>
+              <a:latin typeface="Aptos"/>
+            </a:endParaRPr>
+          </a:p>
+        </p:txBody>
+      </p:sp>
+      <p:sp>
+        <p:nvSpPr>
+          <p:cNvPr id="51" name="TextBox 50">
+            <a:extLst>
+              <a:ext uri="{FF2B5EF4-FFF2-40B4-BE49-F238E27FC236}">
+                <a16:creationId xmlns:a16="http://schemas.microsoft.com/office/drawing/2014/main" id="{7402A929-E5DD-3828-008F-A7C866990E67}"/>
+              </a:ext>
+            </a:extLst>
+          </p:cNvPr>
+          <p:cNvSpPr txBox="1"/>
+          <p:nvPr/>
+        </p:nvSpPr>
+        <p:spPr>
+          <a:xfrm>
+            <a:off x="1471536" y="2505372"/>
+            <a:ext cx="1478290" cy="707886"/>
+          </a:xfrm>
+          <a:prstGeom prst="rect">
+            <a:avLst/>
+          </a:prstGeom>
+          <a:noFill/>
+        </p:spPr>
+        <p:txBody>
+          <a:bodyPr wrap="none" rtlCol="0">
+            <a:spAutoFit/>
+          </a:bodyPr>
+          <a:lstStyle/>
+          <a:p>
+            <a:pPr algn="ctr"/>
+            <a:r>
+              <a:rPr lang="en-US" sz="2000" dirty="0">
+                <a:solidFill>
+                  <a:schemeClr val="bg1"/>
+                </a:solidFill>
+                <a:latin typeface="Aptos" panose="020B0004020202020204" pitchFamily="34" charset="0"/>
+              </a:rPr>
+              <a:t>Software</a:t>
+            </a:r>
+            <a:br>
+              <a:rPr lang="en-US" sz="2000" dirty="0">
+                <a:solidFill>
+                  <a:schemeClr val="bg1"/>
+                </a:solidFill>
+                <a:latin typeface="Aptos" panose="020B0004020202020204" pitchFamily="34" charset="0"/>
+              </a:rPr>
+            </a:br>
+            <a:r>
+              <a:rPr lang="en-US" sz="2000" dirty="0">
+                <a:solidFill>
+                  <a:schemeClr val="bg1"/>
+                </a:solidFill>
+                <a:latin typeface="Aptos" panose="020B0004020202020204" pitchFamily="34" charset="0"/>
+              </a:rPr>
+              <a:t>Engineering</a:t>
+            </a:r>
+          </a:p>
+        </p:txBody>
+      </p:sp>
+      <p:sp>
+        <p:nvSpPr>
+          <p:cNvPr id="52" name="TextBox 51">
+            <a:extLst>
+              <a:ext uri="{FF2B5EF4-FFF2-40B4-BE49-F238E27FC236}">
+                <a16:creationId xmlns:a16="http://schemas.microsoft.com/office/drawing/2014/main" id="{E86B52E4-CD6E-E2D1-8690-5AC7747DBDCE}"/>
+              </a:ext>
+            </a:extLst>
+          </p:cNvPr>
+          <p:cNvSpPr txBox="1"/>
+          <p:nvPr/>
+        </p:nvSpPr>
+        <p:spPr>
+          <a:xfrm>
+            <a:off x="1502925" y="4925949"/>
+            <a:ext cx="1415516" cy="707886"/>
+          </a:xfrm>
+          <a:prstGeom prst="rect">
+            <a:avLst/>
+          </a:prstGeom>
+          <a:noFill/>
+        </p:spPr>
+        <p:txBody>
+          <a:bodyPr wrap="none" rtlCol="0">
+            <a:spAutoFit/>
+          </a:bodyPr>
+          <a:lstStyle/>
+          <a:p>
+            <a:pPr algn="ctr"/>
+            <a:r>
+              <a:rPr lang="en-US" sz="2000" dirty="0">
+                <a:solidFill>
+                  <a:schemeClr val="bg1"/>
+                </a:solidFill>
+                <a:latin typeface="Aptos" panose="020B0004020202020204" pitchFamily="34" charset="0"/>
+              </a:rPr>
+              <a:t>Operations</a:t>
+            </a:r>
+          </a:p>
+          <a:p>
+            <a:pPr algn="ctr"/>
+            <a:r>
+              <a:rPr lang="en-US" sz="2000" dirty="0">
+                <a:solidFill>
+                  <a:schemeClr val="bg1"/>
+                </a:solidFill>
+                <a:latin typeface="Aptos" panose="020B0004020202020204" pitchFamily="34" charset="0"/>
+              </a:rPr>
+              <a:t>Research</a:t>
+            </a:r>
           </a:p>
         </p:txBody>
       </p:sp>
     </p:spTree>
     <p:extLst>
       <p:ext uri="{BB962C8B-B14F-4D97-AF65-F5344CB8AC3E}">
-        <p14:creationId xmlns:p14="http://schemas.microsoft.com/office/powerpoint/2010/main" val="1035564382"/>
+        <p14:creationId xmlns:p14="http://schemas.microsoft.com/office/powerpoint/2010/main" val="217879742"/>
       </p:ext>
     </p:extLst>
   </p:cSld>

--- a/workshops/2026-10-25-agifors-annual-symposium/agifors-sefop.pptx
+++ b/workshops/2026-10-25-agifors-annual-symposium/agifors-sefop.pptx
@@ -1,6 +1,6 @@
 
 <file path=ppt/presentation.xml><?xml version="1.0" encoding="utf-8"?>
-<p:presentation xmlns:a="http://schemas.openxmlformats.org/drawingml/2006/main" xmlns:r="http://schemas.openxmlformats.org/officeDocument/2006/relationships" xmlns:p="http://schemas.openxmlformats.org/presentationml/2006/main" saveSubsetFonts="1" autoCompressPictures="0">
+<p:presentation xmlns:a="http://schemas.openxmlformats.org/drawingml/2006/main" xmlns:r="http://schemas.openxmlformats.org/officeDocument/2006/relationships" xmlns:p="http://schemas.openxmlformats.org/presentationml/2006/main" showSpecialPlsOnTitleSld="0" saveSubsetFonts="1" autoCompressPictures="0">
   <p:sldMasterIdLst>
     <p:sldMasterId id="2147483648" r:id="rId1"/>
   </p:sldMasterIdLst>
@@ -218,7 +218,7 @@
           <a:p>
             <a:fld id="{A9508B69-4B04-442E-A249-3DCED873EEFA}" type="datetimeFigureOut">
               <a:rPr lang="en-US" smtClean="0"/>
-              <a:t>9/20/2026</a:t>
+              <a:t>9/21/2026</a:t>
             </a:fld>
             <a:endParaRPr lang="en-US"/>
           </a:p>
@@ -1697,9 +1697,9 @@
           <a:bodyPr/>
           <a:lstStyle/>
           <a:p>
-            <a:fld id="{5CEEA77D-52E4-475F-8F66-88B530FFC6E8}" type="datetime1">
+            <a:fld id="{8967FF14-F878-45E8-AFB4-46D953F41C81}" type="datetime1">
               <a:rPr lang="en-US" smtClean="0"/>
-              <a:t>9/20/2026</a:t>
+              <a:t>9/21/2026</a:t>
             </a:fld>
             <a:endParaRPr lang="en-US"/>
           </a:p>
@@ -1865,9 +1865,9 @@
           <a:bodyPr/>
           <a:lstStyle/>
           <a:p>
-            <a:fld id="{42A050E7-01C7-465F-8F29-D3A50E883B89}" type="datetime1">
+            <a:fld id="{44869591-628F-4BAB-AD9F-697EBD829841}" type="datetime1">
               <a:rPr lang="en-US" smtClean="0"/>
-              <a:t>9/20/2026</a:t>
+              <a:t>9/21/2026</a:t>
             </a:fld>
             <a:endParaRPr lang="en-US"/>
           </a:p>
@@ -2043,9 +2043,9 @@
           <a:bodyPr/>
           <a:lstStyle/>
           <a:p>
-            <a:fld id="{F3CBD988-613B-41D9-B531-672BCF9F6E33}" type="datetime1">
+            <a:fld id="{76AEFADA-DB7A-4DBF-B5C8-201C4683F8E6}" type="datetime1">
               <a:rPr lang="en-US" smtClean="0"/>
-              <a:t>9/20/2026</a:t>
+              <a:t>9/21/2026</a:t>
             </a:fld>
             <a:endParaRPr lang="en-US"/>
           </a:p>
@@ -2211,9 +2211,9 @@
           <a:bodyPr/>
           <a:lstStyle/>
           <a:p>
-            <a:fld id="{509C9C77-8531-4613-A047-115B56092CED}" type="datetime1">
+            <a:fld id="{BE3B6F46-0C3C-4175-8B43-348544656D81}" type="datetime1">
               <a:rPr lang="en-US" smtClean="0"/>
-              <a:t>9/20/2026</a:t>
+              <a:t>9/21/2026</a:t>
             </a:fld>
             <a:endParaRPr lang="en-US"/>
           </a:p>
@@ -2456,9 +2456,9 @@
           <a:bodyPr/>
           <a:lstStyle/>
           <a:p>
-            <a:fld id="{C564C9CB-EC00-45C8-90A7-B81D698AE4A7}" type="datetime1">
+            <a:fld id="{AA346EC6-7322-4DBC-84C7-E11D30942555}" type="datetime1">
               <a:rPr lang="en-US" smtClean="0"/>
-              <a:t>9/20/2026</a:t>
+              <a:t>9/21/2026</a:t>
             </a:fld>
             <a:endParaRPr lang="en-US"/>
           </a:p>
@@ -2741,9 +2741,9 @@
           <a:bodyPr/>
           <a:lstStyle/>
           <a:p>
-            <a:fld id="{39581C7E-565C-4249-ACB6-BB1600177463}" type="datetime1">
+            <a:fld id="{22848B31-6056-4B86-B43A-9DBD0BACB6B8}" type="datetime1">
               <a:rPr lang="en-US" smtClean="0"/>
-              <a:t>9/20/2026</a:t>
+              <a:t>9/21/2026</a:t>
             </a:fld>
             <a:endParaRPr lang="en-US"/>
           </a:p>
@@ -3160,9 +3160,9 @@
           <a:bodyPr/>
           <a:lstStyle/>
           <a:p>
-            <a:fld id="{A1D53354-70A1-423C-80EE-A19E21E461F6}" type="datetime1">
+            <a:fld id="{5E9A4DAE-E39A-4AB4-9A37-8C4CE854B5ED}" type="datetime1">
               <a:rPr lang="en-US" smtClean="0"/>
-              <a:t>9/20/2026</a:t>
+              <a:t>9/21/2026</a:t>
             </a:fld>
             <a:endParaRPr lang="en-US"/>
           </a:p>
@@ -3277,9 +3277,9 @@
           <a:bodyPr/>
           <a:lstStyle/>
           <a:p>
-            <a:fld id="{AA8B4E82-6E6E-45F9-B1D4-2ACB92A969F4}" type="datetime1">
+            <a:fld id="{CCC0320F-0C3E-448D-9224-8CF88A1B4ED1}" type="datetime1">
               <a:rPr lang="en-US" smtClean="0"/>
-              <a:t>9/20/2026</a:t>
+              <a:t>9/21/2026</a:t>
             </a:fld>
             <a:endParaRPr lang="en-US"/>
           </a:p>
@@ -3372,9 +3372,9 @@
           <a:bodyPr/>
           <a:lstStyle/>
           <a:p>
-            <a:fld id="{E9C7CB26-998E-485E-BE3D-E18117E7BFB1}" type="datetime1">
+            <a:fld id="{A2C46C6B-8CC5-4835-9317-0254AF58E7FA}" type="datetime1">
               <a:rPr lang="en-US" smtClean="0"/>
-              <a:t>9/20/2026</a:t>
+              <a:t>9/21/2026</a:t>
             </a:fld>
             <a:endParaRPr lang="en-US"/>
           </a:p>
@@ -3409,7 +3409,12 @@
             <p:ph type="sldNum" sz="quarter" idx="12"/>
           </p:nvPr>
         </p:nvSpPr>
-        <p:spPr/>
+        <p:spPr>
+          <a:xfrm>
+            <a:off x="9839325" y="6356350"/>
+            <a:ext cx="2133600" cy="365125"/>
+          </a:xfrm>
+        </p:spPr>
         <p:txBody>
           <a:bodyPr/>
           <a:lstStyle/>
@@ -3647,9 +3652,9 @@
           <a:bodyPr/>
           <a:lstStyle/>
           <a:p>
-            <a:fld id="{2D1B55A5-1783-4E20-9E58-3BBCD1556899}" type="datetime1">
+            <a:fld id="{AC12DB2F-C7F6-4FDA-BA62-32815EE05B27}" type="datetime1">
               <a:rPr lang="en-US" smtClean="0"/>
-              <a:t>9/20/2026</a:t>
+              <a:t>9/21/2026</a:t>
             </a:fld>
             <a:endParaRPr lang="en-US"/>
           </a:p>
@@ -3899,9 +3904,9 @@
           <a:bodyPr/>
           <a:lstStyle/>
           <a:p>
-            <a:fld id="{AE81F13B-01C5-4282-93B0-5B945710DC35}" type="datetime1">
+            <a:fld id="{5A7BFFA9-8A0F-4C1F-BDA9-E4A846D0523F}" type="datetime1">
               <a:rPr lang="en-US" smtClean="0"/>
-              <a:t>9/20/2026</a:t>
+              <a:t>9/21/2026</a:t>
             </a:fld>
             <a:endParaRPr lang="en-US"/>
           </a:p>
@@ -4110,9 +4115,9 @@
             </a:lvl1pPr>
           </a:lstStyle>
           <a:p>
-            <a:fld id="{8F05CC9C-3F22-4DB5-9F0E-65DB38F2095C}" type="datetime1">
+            <a:fld id="{AE506CE3-984D-4D4B-A976-00BBA5D668A5}" type="datetime1">
               <a:rPr lang="en-US" smtClean="0"/>
-              <a:t>9/20/2026</a:t>
+              <a:t>9/21/2026</a:t>
             </a:fld>
             <a:endParaRPr lang="en-US"/>
           </a:p>
@@ -5393,6 +5398,35 @@
           </a:p>
         </p:txBody>
       </p:sp>
+      <p:sp>
+        <p:nvSpPr>
+          <p:cNvPr id="3" name="Slide Number Placeholder 2">
+            <a:extLst>
+              <a:ext uri="{FF2B5EF4-FFF2-40B4-BE49-F238E27FC236}">
+                <a16:creationId xmlns:a16="http://schemas.microsoft.com/office/drawing/2014/main" id="{031E5FC8-297F-CDAD-6473-73C5ED40DB56}"/>
+              </a:ext>
+            </a:extLst>
+          </p:cNvPr>
+          <p:cNvSpPr>
+            <a:spLocks noGrp="1"/>
+          </p:cNvSpPr>
+          <p:nvPr>
+            <p:ph type="sldNum" sz="quarter" idx="12"/>
+          </p:nvPr>
+        </p:nvSpPr>
+        <p:spPr/>
+        <p:txBody>
+          <a:bodyPr/>
+          <a:lstStyle/>
+          <a:p>
+            <a:fld id="{C1FF6DA9-008F-8B48-92A6-B652298478BF}" type="slidenum">
+              <a:rPr lang="en-US" smtClean="0"/>
+              <a:t>10</a:t>
+            </a:fld>
+            <a:endParaRPr lang="en-US"/>
+          </a:p>
+        </p:txBody>
+      </p:sp>
     </p:spTree>
     <p:extLst>
       <p:ext uri="{BB962C8B-B14F-4D97-AF65-F5344CB8AC3E}">
@@ -5964,6 +5998,35 @@
             <a:endParaRPr sz="2800" b="1" dirty="0">
               <a:latin typeface="Aptos" panose="020B0004020202020204" pitchFamily="34" charset="0"/>
             </a:endParaRPr>
+          </a:p>
+        </p:txBody>
+      </p:sp>
+      <p:sp>
+        <p:nvSpPr>
+          <p:cNvPr id="4" name="Slide Number Placeholder 3">
+            <a:extLst>
+              <a:ext uri="{FF2B5EF4-FFF2-40B4-BE49-F238E27FC236}">
+                <a16:creationId xmlns:a16="http://schemas.microsoft.com/office/drawing/2014/main" id="{B1498A76-CE52-0DF7-63DB-9D3F8A6648C6}"/>
+              </a:ext>
+            </a:extLst>
+          </p:cNvPr>
+          <p:cNvSpPr>
+            <a:spLocks noGrp="1"/>
+          </p:cNvSpPr>
+          <p:nvPr>
+            <p:ph type="sldNum" sz="quarter" idx="12"/>
+          </p:nvPr>
+        </p:nvSpPr>
+        <p:spPr/>
+        <p:txBody>
+          <a:bodyPr/>
+          <a:lstStyle/>
+          <a:p>
+            <a:fld id="{C1FF6DA9-008F-8B48-92A6-B652298478BF}" type="slidenum">
+              <a:rPr lang="en-US" smtClean="0"/>
+              <a:t>11</a:t>
+            </a:fld>
+            <a:endParaRPr lang="en-US"/>
           </a:p>
         </p:txBody>
       </p:sp>
@@ -6766,6 +6829,35 @@
               </a:solidFill>
               <a:latin typeface="Aptos"/>
             </a:endParaRPr>
+          </a:p>
+        </p:txBody>
+      </p:sp>
+      <p:sp>
+        <p:nvSpPr>
+          <p:cNvPr id="3" name="Slide Number Placeholder 2">
+            <a:extLst>
+              <a:ext uri="{FF2B5EF4-FFF2-40B4-BE49-F238E27FC236}">
+                <a16:creationId xmlns:a16="http://schemas.microsoft.com/office/drawing/2014/main" id="{BF9FDD39-FBA8-3120-AF80-591A148CA7BE}"/>
+              </a:ext>
+            </a:extLst>
+          </p:cNvPr>
+          <p:cNvSpPr>
+            <a:spLocks noGrp="1"/>
+          </p:cNvSpPr>
+          <p:nvPr>
+            <p:ph type="sldNum" sz="quarter" idx="12"/>
+          </p:nvPr>
+        </p:nvSpPr>
+        <p:spPr/>
+        <p:txBody>
+          <a:bodyPr/>
+          <a:lstStyle/>
+          <a:p>
+            <a:fld id="{C1FF6DA9-008F-8B48-92A6-B652298478BF}" type="slidenum">
+              <a:rPr lang="en-US" smtClean="0"/>
+              <a:t>2</a:t>
+            </a:fld>
+            <a:endParaRPr lang="en-US"/>
           </a:p>
         </p:txBody>
       </p:sp>
@@ -8551,6 +8643,35 @@
           </a:p>
         </p:txBody>
       </p:sp>
+      <p:sp>
+        <p:nvSpPr>
+          <p:cNvPr id="3" name="Slide Number Placeholder 2">
+            <a:extLst>
+              <a:ext uri="{FF2B5EF4-FFF2-40B4-BE49-F238E27FC236}">
+                <a16:creationId xmlns:a16="http://schemas.microsoft.com/office/drawing/2014/main" id="{F44B2EDA-76DD-8C05-09A8-E5B310C29893}"/>
+              </a:ext>
+            </a:extLst>
+          </p:cNvPr>
+          <p:cNvSpPr>
+            <a:spLocks noGrp="1"/>
+          </p:cNvSpPr>
+          <p:nvPr>
+            <p:ph type="sldNum" sz="quarter" idx="12"/>
+          </p:nvPr>
+        </p:nvSpPr>
+        <p:spPr/>
+        <p:txBody>
+          <a:bodyPr/>
+          <a:lstStyle/>
+          <a:p>
+            <a:fld id="{C1FF6DA9-008F-8B48-92A6-B652298478BF}" type="slidenum">
+              <a:rPr lang="en-US" smtClean="0"/>
+              <a:t>3</a:t>
+            </a:fld>
+            <a:endParaRPr lang="en-US"/>
+          </a:p>
+        </p:txBody>
+      </p:sp>
     </p:spTree>
     <p:extLst>
       <p:ext uri="{BB962C8B-B14F-4D97-AF65-F5344CB8AC3E}">
@@ -9618,6 +9739,35 @@
               </a:rPr>
               <a:t>Short-lived system</a:t>
             </a:r>
+          </a:p>
+        </p:txBody>
+      </p:sp>
+      <p:sp>
+        <p:nvSpPr>
+          <p:cNvPr id="3" name="Slide Number Placeholder 2">
+            <a:extLst>
+              <a:ext uri="{FF2B5EF4-FFF2-40B4-BE49-F238E27FC236}">
+                <a16:creationId xmlns:a16="http://schemas.microsoft.com/office/drawing/2014/main" id="{0B30B03C-2123-7AEF-B77A-AE47DBACF2EF}"/>
+              </a:ext>
+            </a:extLst>
+          </p:cNvPr>
+          <p:cNvSpPr>
+            <a:spLocks noGrp="1"/>
+          </p:cNvSpPr>
+          <p:nvPr>
+            <p:ph type="sldNum" sz="quarter" idx="12"/>
+          </p:nvPr>
+        </p:nvSpPr>
+        <p:spPr/>
+        <p:txBody>
+          <a:bodyPr/>
+          <a:lstStyle/>
+          <a:p>
+            <a:fld id="{C1FF6DA9-008F-8B48-92A6-B652298478BF}" type="slidenum">
+              <a:rPr lang="en-US" smtClean="0"/>
+              <a:t>4</a:t>
+            </a:fld>
+            <a:endParaRPr lang="en-US"/>
           </a:p>
         </p:txBody>
       </p:sp>
@@ -10696,6 +10846,35 @@
           </a:p>
         </p:txBody>
       </p:sp>
+      <p:sp>
+        <p:nvSpPr>
+          <p:cNvPr id="3" name="Slide Number Placeholder 2">
+            <a:extLst>
+              <a:ext uri="{FF2B5EF4-FFF2-40B4-BE49-F238E27FC236}">
+                <a16:creationId xmlns:a16="http://schemas.microsoft.com/office/drawing/2014/main" id="{76883C84-27FD-F66D-505D-D3D913B77F22}"/>
+              </a:ext>
+            </a:extLst>
+          </p:cNvPr>
+          <p:cNvSpPr>
+            <a:spLocks noGrp="1"/>
+          </p:cNvSpPr>
+          <p:nvPr>
+            <p:ph type="sldNum" sz="quarter" idx="12"/>
+          </p:nvPr>
+        </p:nvSpPr>
+        <p:spPr/>
+        <p:txBody>
+          <a:bodyPr/>
+          <a:lstStyle/>
+          <a:p>
+            <a:fld id="{C1FF6DA9-008F-8B48-92A6-B652298478BF}" type="slidenum">
+              <a:rPr lang="en-US" smtClean="0"/>
+              <a:t>5</a:t>
+            </a:fld>
+            <a:endParaRPr lang="en-US"/>
+          </a:p>
+        </p:txBody>
+      </p:sp>
     </p:spTree>
     <p:extLst>
       <p:ext uri="{BB962C8B-B14F-4D97-AF65-F5344CB8AC3E}">
@@ -11567,6 +11746,35 @@
           </a:p>
         </p:txBody>
       </p:sp>
+      <p:sp>
+        <p:nvSpPr>
+          <p:cNvPr id="3" name="Slide Number Placeholder 2">
+            <a:extLst>
+              <a:ext uri="{FF2B5EF4-FFF2-40B4-BE49-F238E27FC236}">
+                <a16:creationId xmlns:a16="http://schemas.microsoft.com/office/drawing/2014/main" id="{28CDF058-A229-2D05-351F-B60E27EC324D}"/>
+              </a:ext>
+            </a:extLst>
+          </p:cNvPr>
+          <p:cNvSpPr>
+            <a:spLocks noGrp="1"/>
+          </p:cNvSpPr>
+          <p:nvPr>
+            <p:ph type="sldNum" sz="quarter" idx="12"/>
+          </p:nvPr>
+        </p:nvSpPr>
+        <p:spPr/>
+        <p:txBody>
+          <a:bodyPr/>
+          <a:lstStyle/>
+          <a:p>
+            <a:fld id="{C1FF6DA9-008F-8B48-92A6-B652298478BF}" type="slidenum">
+              <a:rPr lang="en-US" smtClean="0"/>
+              <a:t>6</a:t>
+            </a:fld>
+            <a:endParaRPr lang="en-US"/>
+          </a:p>
+        </p:txBody>
+      </p:sp>
     </p:spTree>
     <p:extLst>
       <p:ext uri="{BB962C8B-B14F-4D97-AF65-F5344CB8AC3E}">
@@ -13101,6 +13309,35 @@
           </a:p>
         </p:txBody>
       </p:sp>
+      <p:sp>
+        <p:nvSpPr>
+          <p:cNvPr id="3" name="Slide Number Placeholder 2">
+            <a:extLst>
+              <a:ext uri="{FF2B5EF4-FFF2-40B4-BE49-F238E27FC236}">
+                <a16:creationId xmlns:a16="http://schemas.microsoft.com/office/drawing/2014/main" id="{FA5D5E82-D47A-37A7-2B7B-84D887C7C507}"/>
+              </a:ext>
+            </a:extLst>
+          </p:cNvPr>
+          <p:cNvSpPr>
+            <a:spLocks noGrp="1"/>
+          </p:cNvSpPr>
+          <p:nvPr>
+            <p:ph type="sldNum" sz="quarter" idx="12"/>
+          </p:nvPr>
+        </p:nvSpPr>
+        <p:spPr/>
+        <p:txBody>
+          <a:bodyPr/>
+          <a:lstStyle/>
+          <a:p>
+            <a:fld id="{C1FF6DA9-008F-8B48-92A6-B652298478BF}" type="slidenum">
+              <a:rPr lang="en-US" smtClean="0"/>
+              <a:t>7</a:t>
+            </a:fld>
+            <a:endParaRPr lang="en-US"/>
+          </a:p>
+        </p:txBody>
+      </p:sp>
     </p:spTree>
     <p:extLst>
       <p:ext uri="{BB962C8B-B14F-4D97-AF65-F5344CB8AC3E}">
@@ -14728,6 +14965,35 @@
           </a:prstGeom>
         </p:spPr>
       </p:pic>
+      <p:sp>
+        <p:nvSpPr>
+          <p:cNvPr id="3" name="Slide Number Placeholder 2">
+            <a:extLst>
+              <a:ext uri="{FF2B5EF4-FFF2-40B4-BE49-F238E27FC236}">
+                <a16:creationId xmlns:a16="http://schemas.microsoft.com/office/drawing/2014/main" id="{6DC32F9C-F085-EDA4-3109-A0FDABB2CF89}"/>
+              </a:ext>
+            </a:extLst>
+          </p:cNvPr>
+          <p:cNvSpPr>
+            <a:spLocks noGrp="1"/>
+          </p:cNvSpPr>
+          <p:nvPr>
+            <p:ph type="sldNum" sz="quarter" idx="12"/>
+          </p:nvPr>
+        </p:nvSpPr>
+        <p:spPr/>
+        <p:txBody>
+          <a:bodyPr/>
+          <a:lstStyle/>
+          <a:p>
+            <a:fld id="{C1FF6DA9-008F-8B48-92A6-B652298478BF}" type="slidenum">
+              <a:rPr lang="en-US" smtClean="0"/>
+              <a:t>8</a:t>
+            </a:fld>
+            <a:endParaRPr lang="en-US"/>
+          </a:p>
+        </p:txBody>
+      </p:sp>
     </p:spTree>
     <p:extLst>
       <p:ext uri="{BB962C8B-B14F-4D97-AF65-F5344CB8AC3E}">
@@ -15428,6 +15694,35 @@
               </a:rPr>
               <a:t>Research</a:t>
             </a:r>
+          </a:p>
+        </p:txBody>
+      </p:sp>
+      <p:sp>
+        <p:nvSpPr>
+          <p:cNvPr id="3" name="Slide Number Placeholder 2">
+            <a:extLst>
+              <a:ext uri="{FF2B5EF4-FFF2-40B4-BE49-F238E27FC236}">
+                <a16:creationId xmlns:a16="http://schemas.microsoft.com/office/drawing/2014/main" id="{45663F89-8D67-7270-5D3C-4D27C3AD8B87}"/>
+              </a:ext>
+            </a:extLst>
+          </p:cNvPr>
+          <p:cNvSpPr>
+            <a:spLocks noGrp="1"/>
+          </p:cNvSpPr>
+          <p:nvPr>
+            <p:ph type="sldNum" sz="quarter" idx="12"/>
+          </p:nvPr>
+        </p:nvSpPr>
+        <p:spPr/>
+        <p:txBody>
+          <a:bodyPr/>
+          <a:lstStyle/>
+          <a:p>
+            <a:fld id="{C1FF6DA9-008F-8B48-92A6-B652298478BF}" type="slidenum">
+              <a:rPr lang="en-US" smtClean="0"/>
+              <a:t>9</a:t>
+            </a:fld>
+            <a:endParaRPr lang="en-US"/>
           </a:p>
         </p:txBody>
       </p:sp>

--- a/workshops/2026-10-25-agifors-annual-symposium/agifors-sefop.pptx
+++ b/workshops/2026-10-25-agifors-annual-symposium/agifors-sefop.pptx
@@ -5669,7 +5669,25 @@
                 </a:solidFill>
                 <a:latin typeface="Aptos"/>
               </a:rPr>
-              <a:t> need </a:t>
+              <a:t> need</a:t>
+            </a:r>
+            <a:r>
+              <a:rPr lang="en-US" sz="2400" b="0" dirty="0">
+                <a:solidFill>
+                  <a:srgbClr val="0F2343"/>
+                </a:solidFill>
+                <a:latin typeface="Aptos"/>
+              </a:rPr>
+              <a:t>s</a:t>
+            </a:r>
+            <a:r>
+              <a:rPr sz="2400" b="0" dirty="0">
+                <a:solidFill>
+                  <a:srgbClr val="0F2343"/>
+                </a:solidFill>
+                <a:latin typeface="Aptos"/>
+              </a:rPr>
+              <a:t> </a:t>
             </a:r>
             <a:r>
               <a:rPr lang="en-US" sz="2400" b="0" dirty="0">
@@ -8492,7 +8510,7 @@
                 <a:latin typeface="Aptos"/>
                 <a:sym typeface="Wingdings" panose="05000000000000000000" pitchFamily="2" charset="2"/>
               </a:rPr>
-              <a:t>They don’t know the benefits of SE, or they don’t think is for them.</a:t>
+              <a:t>They don’t know the benefits of SE, or they don’t think it is for them.</a:t>
             </a:r>
             <a:endParaRPr dirty="0">
               <a:solidFill>
@@ -9056,7 +9074,7 @@
         </p:nvSpPr>
         <p:spPr>
           <a:xfrm>
-            <a:off x="340906" y="6459974"/>
+            <a:off x="340906" y="6470484"/>
             <a:ext cx="8652623" cy="184666"/>
           </a:xfrm>
           <a:prstGeom prst="rect">
@@ -9078,7 +9096,7 @@
                 </a:solidFill>
                 <a:latin typeface="Aptos"/>
               </a:rPr>
-              <a:t>Source: A Philosophy of Software Design (John, Ousterhout). These curves are illustrative.</a:t>
+              <a:t>Source: A Philosophy of Software Design (John Ousterhout). These curves are illustrative.</a:t>
             </a:r>
             <a:endParaRPr sz="1200" dirty="0">
               <a:solidFill>

--- a/workshops/2026-10-25-agifors-annual-symposium/agifors-sefop.pptx
+++ b/workshops/2026-10-25-agifors-annual-symposium/agifors-sefop.pptx
@@ -218,7 +218,7 @@
           <a:p>
             <a:fld id="{A9508B69-4B04-442E-A249-3DCED873EEFA}" type="datetimeFigureOut">
               <a:rPr lang="en-US" smtClean="0"/>
-              <a:t>9/21/2026</a:t>
+              <a:t>9/22/2026</a:t>
             </a:fld>
             <a:endParaRPr lang="en-US"/>
           </a:p>
@@ -1699,7 +1699,7 @@
           <a:p>
             <a:fld id="{8967FF14-F878-45E8-AFB4-46D953F41C81}" type="datetime1">
               <a:rPr lang="en-US" smtClean="0"/>
-              <a:t>9/21/2026</a:t>
+              <a:t>9/22/2026</a:t>
             </a:fld>
             <a:endParaRPr lang="en-US"/>
           </a:p>
@@ -1867,7 +1867,7 @@
           <a:p>
             <a:fld id="{44869591-628F-4BAB-AD9F-697EBD829841}" type="datetime1">
               <a:rPr lang="en-US" smtClean="0"/>
-              <a:t>9/21/2026</a:t>
+              <a:t>9/22/2026</a:t>
             </a:fld>
             <a:endParaRPr lang="en-US"/>
           </a:p>
@@ -2045,7 +2045,7 @@
           <a:p>
             <a:fld id="{76AEFADA-DB7A-4DBF-B5C8-201C4683F8E6}" type="datetime1">
               <a:rPr lang="en-US" smtClean="0"/>
-              <a:t>9/21/2026</a:t>
+              <a:t>9/22/2026</a:t>
             </a:fld>
             <a:endParaRPr lang="en-US"/>
           </a:p>
@@ -2213,7 +2213,7 @@
           <a:p>
             <a:fld id="{BE3B6F46-0C3C-4175-8B43-348544656D81}" type="datetime1">
               <a:rPr lang="en-US" smtClean="0"/>
-              <a:t>9/21/2026</a:t>
+              <a:t>9/22/2026</a:t>
             </a:fld>
             <a:endParaRPr lang="en-US"/>
           </a:p>
@@ -2458,7 +2458,7 @@
           <a:p>
             <a:fld id="{AA346EC6-7322-4DBC-84C7-E11D30942555}" type="datetime1">
               <a:rPr lang="en-US" smtClean="0"/>
-              <a:t>9/21/2026</a:t>
+              <a:t>9/22/2026</a:t>
             </a:fld>
             <a:endParaRPr lang="en-US"/>
           </a:p>
@@ -2743,7 +2743,7 @@
           <a:p>
             <a:fld id="{22848B31-6056-4B86-B43A-9DBD0BACB6B8}" type="datetime1">
               <a:rPr lang="en-US" smtClean="0"/>
-              <a:t>9/21/2026</a:t>
+              <a:t>9/22/2026</a:t>
             </a:fld>
             <a:endParaRPr lang="en-US"/>
           </a:p>
@@ -3162,7 +3162,7 @@
           <a:p>
             <a:fld id="{5E9A4DAE-E39A-4AB4-9A37-8C4CE854B5ED}" type="datetime1">
               <a:rPr lang="en-US" smtClean="0"/>
-              <a:t>9/21/2026</a:t>
+              <a:t>9/22/2026</a:t>
             </a:fld>
             <a:endParaRPr lang="en-US"/>
           </a:p>
@@ -3279,7 +3279,7 @@
           <a:p>
             <a:fld id="{CCC0320F-0C3E-448D-9224-8CF88A1B4ED1}" type="datetime1">
               <a:rPr lang="en-US" smtClean="0"/>
-              <a:t>9/21/2026</a:t>
+              <a:t>9/22/2026</a:t>
             </a:fld>
             <a:endParaRPr lang="en-US"/>
           </a:p>
@@ -3374,7 +3374,7 @@
           <a:p>
             <a:fld id="{A2C46C6B-8CC5-4835-9317-0254AF58E7FA}" type="datetime1">
               <a:rPr lang="en-US" smtClean="0"/>
-              <a:t>9/21/2026</a:t>
+              <a:t>9/22/2026</a:t>
             </a:fld>
             <a:endParaRPr lang="en-US"/>
           </a:p>
@@ -3654,7 +3654,7 @@
           <a:p>
             <a:fld id="{AC12DB2F-C7F6-4FDA-BA62-32815EE05B27}" type="datetime1">
               <a:rPr lang="en-US" smtClean="0"/>
-              <a:t>9/21/2026</a:t>
+              <a:t>9/22/2026</a:t>
             </a:fld>
             <a:endParaRPr lang="en-US"/>
           </a:p>
@@ -3906,7 +3906,7 @@
           <a:p>
             <a:fld id="{5A7BFFA9-8A0F-4C1F-BDA9-E4A846D0523F}" type="datetime1">
               <a:rPr lang="en-US" smtClean="0"/>
-              <a:t>9/21/2026</a:t>
+              <a:t>9/22/2026</a:t>
             </a:fld>
             <a:endParaRPr lang="en-US"/>
           </a:p>
@@ -4117,7 +4117,7 @@
           <a:p>
             <a:fld id="{AE506CE3-984D-4D4B-A976-00BBA5D668A5}" type="datetime1">
               <a:rPr lang="en-US" smtClean="0"/>
-              <a:t>9/21/2026</a:t>
+              <a:t>9/22/2026</a:t>
             </a:fld>
             <a:endParaRPr lang="en-US"/>
           </a:p>
@@ -11872,53 +11872,6 @@
                 <a:srgbClr val="0F2343"/>
               </a:solidFill>
               <a:latin typeface="Aptos Display"/>
-            </a:endParaRPr>
-          </a:p>
-        </p:txBody>
-      </p:sp>
-      <p:sp>
-        <p:nvSpPr>
-          <p:cNvPr id="38" name="TextBox 37">
-            <a:extLst>
-              <a:ext uri="{FF2B5EF4-FFF2-40B4-BE49-F238E27FC236}">
-                <a16:creationId xmlns:a16="http://schemas.microsoft.com/office/drawing/2014/main" id="{9F05800E-4D1A-714F-D683-59C13E94EE13}"/>
-              </a:ext>
-            </a:extLst>
-          </p:cNvPr>
-          <p:cNvSpPr txBox="1"/>
-          <p:nvPr/>
-        </p:nvSpPr>
-        <p:spPr>
-          <a:xfrm>
-            <a:off x="365760" y="6505694"/>
-            <a:ext cx="11749494" cy="184666"/>
-          </a:xfrm>
-          <a:prstGeom prst="rect">
-            <a:avLst/>
-          </a:prstGeom>
-          <a:noFill/>
-        </p:spPr>
-        <p:txBody>
-          <a:bodyPr wrap="square" tIns="0" rIns="45720" bIns="0">
-            <a:spAutoFit/>
-          </a:bodyPr>
-          <a:lstStyle/>
-          <a:p>
-            <a:pPr algn="l"/>
-            <a:r>
-              <a:rPr lang="en-US" sz="1200" dirty="0">
-                <a:solidFill>
-                  <a:srgbClr val="0F2343"/>
-                </a:solidFill>
-                <a:latin typeface="Aptos"/>
-              </a:rPr>
-              <a:t>Source: Why software engineering practices are slow to spread among operations research practitioners and what changes that behavior (Zenteno Smith, 2026)</a:t>
-            </a:r>
-            <a:endParaRPr sz="1200" dirty="0">
-              <a:solidFill>
-                <a:srgbClr val="0F2343"/>
-              </a:solidFill>
-              <a:latin typeface="Aptos"/>
             </a:endParaRPr>
           </a:p>
         </p:txBody>
